--- a/presentacion/proyecto_bbdd.pptx
+++ b/presentacion/proyecto_bbdd.pptx
@@ -1,24 +1,558 @@
 
 <file path=ppt/presentation.xml><?xml version="1.0" encoding="utf-8"?>
-<p:presentation xmlns:a="http://schemas.openxmlformats.org/drawingml/2006/main" xmlns:p="http://schemas.openxmlformats.org/presentationml/2006/main" xmlns:r="http://schemas.openxmlformats.org/officeDocument/2006/relationships" xmlns:p14="http://schemas.microsoft.com/office/powerpoint/2010/main" xmlns:p15="http://schemas.microsoft.com/office/powerpoint/2012/main" xmlns:mc="http://schemas.openxmlformats.org/markup-compatibility/2006">
+<p:presentation xmlns:a="http://schemas.openxmlformats.org/drawingml/2006/main" xmlns:r="http://schemas.openxmlformats.org/officeDocument/2006/relationships" xmlns:p="http://schemas.openxmlformats.org/presentationml/2006/main">
   <p:sldMasterIdLst>
-    <p:sldMasterId id="2147483648" r:id="rId2"/>
+    <p:sldMasterId id="2147483648" r:id="rId1"/>
   </p:sldMasterIdLst>
   <p:notesMasterIdLst>
-    <p:notesMasterId r:id="rId3"/>
+    <p:notesMasterId r:id="rId7"/>
   </p:notesMasterIdLst>
   <p:sldIdLst>
-    <p:sldId id="256" r:id="rId4"/>
-    <p:sldId id="257" r:id="rId5"/>
-    <p:sldId id="258" r:id="rId6"/>
+    <p:sldId id="259" r:id="rId2"/>
+    <p:sldId id="256" r:id="rId3"/>
+    <p:sldId id="257" r:id="rId4"/>
+    <p:sldId id="258" r:id="rId5"/>
+    <p:sldId id="260" r:id="rId6"/>
   </p:sldIdLst>
-  <p:sldSz cx="9144000" cy="5143500"/>
+  <p:sldSz cx="9144000" cy="5143500" type="screen16x9"/>
   <p:notesSz cx="5143500" cy="9144000"/>
+  <p:defaultTextStyle>
+    <a:defPPr>
+      <a:defRPr lang="es-ES"/>
+    </a:defPPr>
+    <a:lvl1pPr marL="0" algn="l" defTabSz="914400" rtl="0" eaLnBrk="1" latinLnBrk="0" hangingPunct="1">
+      <a:defRPr sz="1800" kern="1200">
+        <a:solidFill>
+          <a:schemeClr val="tx1"/>
+        </a:solidFill>
+        <a:latin typeface="+mn-lt"/>
+        <a:ea typeface="+mn-ea"/>
+        <a:cs typeface="+mn-cs"/>
+      </a:defRPr>
+    </a:lvl1pPr>
+    <a:lvl2pPr marL="457200" algn="l" defTabSz="914400" rtl="0" eaLnBrk="1" latinLnBrk="0" hangingPunct="1">
+      <a:defRPr sz="1800" kern="1200">
+        <a:solidFill>
+          <a:schemeClr val="tx1"/>
+        </a:solidFill>
+        <a:latin typeface="+mn-lt"/>
+        <a:ea typeface="+mn-ea"/>
+        <a:cs typeface="+mn-cs"/>
+      </a:defRPr>
+    </a:lvl2pPr>
+    <a:lvl3pPr marL="914400" algn="l" defTabSz="914400" rtl="0" eaLnBrk="1" latinLnBrk="0" hangingPunct="1">
+      <a:defRPr sz="1800" kern="1200">
+        <a:solidFill>
+          <a:schemeClr val="tx1"/>
+        </a:solidFill>
+        <a:latin typeface="+mn-lt"/>
+        <a:ea typeface="+mn-ea"/>
+        <a:cs typeface="+mn-cs"/>
+      </a:defRPr>
+    </a:lvl3pPr>
+    <a:lvl4pPr marL="1371600" algn="l" defTabSz="914400" rtl="0" eaLnBrk="1" latinLnBrk="0" hangingPunct="1">
+      <a:defRPr sz="1800" kern="1200">
+        <a:solidFill>
+          <a:schemeClr val="tx1"/>
+        </a:solidFill>
+        <a:latin typeface="+mn-lt"/>
+        <a:ea typeface="+mn-ea"/>
+        <a:cs typeface="+mn-cs"/>
+      </a:defRPr>
+    </a:lvl4pPr>
+    <a:lvl5pPr marL="1828800" algn="l" defTabSz="914400" rtl="0" eaLnBrk="1" latinLnBrk="0" hangingPunct="1">
+      <a:defRPr sz="1800" kern="1200">
+        <a:solidFill>
+          <a:schemeClr val="tx1"/>
+        </a:solidFill>
+        <a:latin typeface="+mn-lt"/>
+        <a:ea typeface="+mn-ea"/>
+        <a:cs typeface="+mn-cs"/>
+      </a:defRPr>
+    </a:lvl5pPr>
+    <a:lvl6pPr marL="2286000" algn="l" defTabSz="914400" rtl="0" eaLnBrk="1" latinLnBrk="0" hangingPunct="1">
+      <a:defRPr sz="1800" kern="1200">
+        <a:solidFill>
+          <a:schemeClr val="tx1"/>
+        </a:solidFill>
+        <a:latin typeface="+mn-lt"/>
+        <a:ea typeface="+mn-ea"/>
+        <a:cs typeface="+mn-cs"/>
+      </a:defRPr>
+    </a:lvl6pPr>
+    <a:lvl7pPr marL="2743200" algn="l" defTabSz="914400" rtl="0" eaLnBrk="1" latinLnBrk="0" hangingPunct="1">
+      <a:defRPr sz="1800" kern="1200">
+        <a:solidFill>
+          <a:schemeClr val="tx1"/>
+        </a:solidFill>
+        <a:latin typeface="+mn-lt"/>
+        <a:ea typeface="+mn-ea"/>
+        <a:cs typeface="+mn-cs"/>
+      </a:defRPr>
+    </a:lvl7pPr>
+    <a:lvl8pPr marL="3200400" algn="l" defTabSz="914400" rtl="0" eaLnBrk="1" latinLnBrk="0" hangingPunct="1">
+      <a:defRPr sz="1800" kern="1200">
+        <a:solidFill>
+          <a:schemeClr val="tx1"/>
+        </a:solidFill>
+        <a:latin typeface="+mn-lt"/>
+        <a:ea typeface="+mn-ea"/>
+        <a:cs typeface="+mn-cs"/>
+      </a:defRPr>
+    </a:lvl8pPr>
+    <a:lvl9pPr marL="3657600" algn="l" defTabSz="914400" rtl="0" eaLnBrk="1" latinLnBrk="0" hangingPunct="1">
+      <a:defRPr sz="1800" kern="1200">
+        <a:solidFill>
+          <a:schemeClr val="tx1"/>
+        </a:solidFill>
+        <a:latin typeface="+mn-lt"/>
+        <a:ea typeface="+mn-ea"/>
+        <a:cs typeface="+mn-cs"/>
+      </a:defRPr>
+    </a:lvl9pPr>
+  </p:defaultTextStyle>
 </p:presentation>
 </file>
 
 <file path=ppt/notesMasters/notesMaster1.xml><?xml version="1.0" encoding="utf-8"?>
-<p:notesMaster xmlns:a="http://schemas.openxmlformats.org/drawingml/2006/main" xmlns:p="http://schemas.openxmlformats.org/presentationml/2006/main" xmlns:r="http://schemas.openxmlformats.org/officeDocument/2006/relationships" xmlns:p14="http://schemas.microsoft.com/office/powerpoint/2010/main" xmlns:p15="http://schemas.microsoft.com/office/powerpoint/2012/main" xmlns:mc="http://schemas.openxmlformats.org/markup-compatibility/2006">
+<p:notesMaster xmlns:a="http://schemas.openxmlformats.org/drawingml/2006/main" xmlns:r="http://schemas.openxmlformats.org/officeDocument/2006/relationships" xmlns:p="http://schemas.openxmlformats.org/presentationml/2006/main">
+  <p:cSld>
+    <p:bg>
+      <p:bgRef idx="1001">
+        <a:schemeClr val="bg1"/>
+      </p:bgRef>
+    </p:bg>
+    <p:spTree>
+      <p:nvGrpSpPr>
+        <p:cNvPr id="1" name=""/>
+        <p:cNvGrpSpPr/>
+        <p:nvPr/>
+      </p:nvGrpSpPr>
+      <p:grpSpPr>
+        <a:xfrm>
+          <a:off x="0" y="0"/>
+          <a:ext cx="0" cy="0"/>
+          <a:chOff x="0" y="0"/>
+          <a:chExt cx="0" cy="0"/>
+        </a:xfrm>
+      </p:grpSpPr>
+      <p:sp>
+        <p:nvSpPr>
+          <p:cNvPr id="4" name="PlaceHolder 1"/>
+          <p:cNvSpPr>
+            <a:spLocks noGrp="1" noRot="1" noChangeAspect="1"/>
+          </p:cNvSpPr>
+          <p:nvPr>
+            <p:ph type="sldImg"/>
+          </p:nvPr>
+        </p:nvSpPr>
+        <p:spPr>
+          <a:xfrm>
+            <a:off x="216000" y="812520"/>
+            <a:ext cx="7127280" cy="4008960"/>
+          </a:xfrm>
+          <a:prstGeom prst="rect">
+            <a:avLst/>
+          </a:prstGeom>
+          <a:noFill/>
+          <a:ln w="0">
+            <a:noFill/>
+          </a:ln>
+        </p:spPr>
+        <p:txBody>
+          <a:bodyPr lIns="0" tIns="0" rIns="0" bIns="0" anchor="ctr">
+            <a:noAutofit/>
+          </a:bodyPr>
+          <a:lstStyle/>
+          <a:p>
+            <a:r>
+              <a:rPr lang="es-ES" sz="1800" b="0" u="none" strike="noStrike">
+                <a:solidFill>
+                  <a:schemeClr val="dk1"/>
+                </a:solidFill>
+                <a:effectLst/>
+                <a:uFillTx/>
+                <a:latin typeface="Calibri"/>
+              </a:rPr>
+              <a:t>Pulse para desplazar la diapositiva</a:t>
+            </a:r>
+          </a:p>
+        </p:txBody>
+      </p:sp>
+      <p:sp>
+        <p:nvSpPr>
+          <p:cNvPr id="5" name="PlaceHolder 2"/>
+          <p:cNvSpPr>
+            <a:spLocks noGrp="1"/>
+          </p:cNvSpPr>
+          <p:nvPr>
+            <p:ph type="body"/>
+          </p:nvPr>
+        </p:nvSpPr>
+        <p:spPr>
+          <a:xfrm>
+            <a:off x="756000" y="5078520"/>
+            <a:ext cx="6047640" cy="4811040"/>
+          </a:xfrm>
+          <a:prstGeom prst="rect">
+            <a:avLst/>
+          </a:prstGeom>
+          <a:noFill/>
+          <a:ln w="0">
+            <a:noFill/>
+          </a:ln>
+        </p:spPr>
+        <p:txBody>
+          <a:bodyPr lIns="0" tIns="0" rIns="0" bIns="0" anchor="t">
+            <a:noAutofit/>
+          </a:bodyPr>
+          <a:lstStyle/>
+          <a:p>
+            <a:pPr indent="0" algn="l">
+              <a:buNone/>
+            </a:pPr>
+            <a:r>
+              <a:rPr lang="es-ES" sz="2000" b="0" u="none" strike="noStrike">
+                <a:solidFill>
+                  <a:srgbClr val="000000"/>
+                </a:solidFill>
+                <a:effectLst/>
+                <a:uFillTx/>
+                <a:latin typeface="Arial"/>
+              </a:rPr>
+              <a:t>Pulse para editar el formato de las notas</a:t>
+            </a:r>
+          </a:p>
+        </p:txBody>
+      </p:sp>
+      <p:sp>
+        <p:nvSpPr>
+          <p:cNvPr id="6" name="PlaceHolder 3"/>
+          <p:cNvSpPr>
+            <a:spLocks noGrp="1"/>
+          </p:cNvSpPr>
+          <p:nvPr>
+            <p:ph type="hdr"/>
+          </p:nvPr>
+        </p:nvSpPr>
+        <p:spPr>
+          <a:xfrm>
+            <a:off x="0" y="0"/>
+            <a:ext cx="3280680" cy="534240"/>
+          </a:xfrm>
+          <a:prstGeom prst="rect">
+            <a:avLst/>
+          </a:prstGeom>
+          <a:noFill/>
+          <a:ln w="0">
+            <a:noFill/>
+          </a:ln>
+        </p:spPr>
+        <p:txBody>
+          <a:bodyPr lIns="0" tIns="0" rIns="0" bIns="0" anchor="t">
+            <a:noAutofit/>
+          </a:bodyPr>
+          <a:lstStyle/>
+          <a:p>
+            <a:pPr indent="0" algn="l">
+              <a:buNone/>
+            </a:pPr>
+            <a:r>
+              <a:rPr lang="es-ES" sz="1400" b="0" u="none" strike="noStrike">
+                <a:solidFill>
+                  <a:srgbClr val="000000"/>
+                </a:solidFill>
+                <a:effectLst/>
+                <a:uFillTx/>
+                <a:latin typeface="Times New Roman"/>
+              </a:rPr>
+              <a:t> </a:t>
+            </a:r>
+          </a:p>
+        </p:txBody>
+      </p:sp>
+      <p:sp>
+        <p:nvSpPr>
+          <p:cNvPr id="7" name="PlaceHolder 4"/>
+          <p:cNvSpPr>
+            <a:spLocks noGrp="1"/>
+          </p:cNvSpPr>
+          <p:nvPr>
+            <p:ph type="dt" idx="1"/>
+          </p:nvPr>
+        </p:nvSpPr>
+        <p:spPr>
+          <a:xfrm>
+            <a:off x="4278960" y="0"/>
+            <a:ext cx="3280680" cy="534240"/>
+          </a:xfrm>
+          <a:prstGeom prst="rect">
+            <a:avLst/>
+          </a:prstGeom>
+          <a:noFill/>
+          <a:ln w="0">
+            <a:noFill/>
+          </a:ln>
+        </p:spPr>
+        <p:txBody>
+          <a:bodyPr lIns="0" tIns="0" rIns="0" bIns="0" anchor="t">
+            <a:noAutofit/>
+          </a:bodyPr>
+          <a:lstStyle>
+            <a:lvl1pPr indent="0" algn="r">
+              <a:buNone/>
+              <a:defRPr lang="es-ES" sz="1400" b="0" u="none" strike="noStrike">
+                <a:solidFill>
+                  <a:srgbClr val="000000"/>
+                </a:solidFill>
+                <a:effectLst/>
+                <a:uFillTx/>
+                <a:latin typeface="Times New Roman"/>
+              </a:defRPr>
+            </a:lvl1pPr>
+          </a:lstStyle>
+          <a:p>
+            <a:pPr indent="0" algn="r">
+              <a:buNone/>
+            </a:pPr>
+            <a:r>
+              <a:rPr lang="es-ES" sz="1400" b="0" u="none" strike="noStrike">
+                <a:solidFill>
+                  <a:srgbClr val="000000"/>
+                </a:solidFill>
+                <a:effectLst/>
+                <a:uFillTx/>
+                <a:latin typeface="Times New Roman"/>
+              </a:rPr>
+              <a:t> </a:t>
+            </a:r>
+          </a:p>
+        </p:txBody>
+      </p:sp>
+      <p:sp>
+        <p:nvSpPr>
+          <p:cNvPr id="8" name="PlaceHolder 5"/>
+          <p:cNvSpPr>
+            <a:spLocks noGrp="1"/>
+          </p:cNvSpPr>
+          <p:nvPr>
+            <p:ph type="ftr" idx="2"/>
+          </p:nvPr>
+        </p:nvSpPr>
+        <p:spPr>
+          <a:xfrm>
+            <a:off x="0" y="10157400"/>
+            <a:ext cx="3280680" cy="534240"/>
+          </a:xfrm>
+          <a:prstGeom prst="rect">
+            <a:avLst/>
+          </a:prstGeom>
+          <a:noFill/>
+          <a:ln w="0">
+            <a:noFill/>
+          </a:ln>
+        </p:spPr>
+        <p:txBody>
+          <a:bodyPr lIns="0" tIns="0" rIns="0" bIns="0" anchor="b">
+            <a:noAutofit/>
+          </a:bodyPr>
+          <a:lstStyle>
+            <a:lvl1pPr indent="0" algn="l">
+              <a:buNone/>
+              <a:defRPr lang="es-ES" sz="1400" b="0" u="none" strike="noStrike">
+                <a:solidFill>
+                  <a:srgbClr val="000000"/>
+                </a:solidFill>
+                <a:effectLst/>
+                <a:uFillTx/>
+                <a:latin typeface="Times New Roman"/>
+              </a:defRPr>
+            </a:lvl1pPr>
+          </a:lstStyle>
+          <a:p>
+            <a:pPr indent="0" algn="l">
+              <a:buNone/>
+            </a:pPr>
+            <a:r>
+              <a:rPr lang="es-ES" sz="1400" b="0" u="none" strike="noStrike">
+                <a:solidFill>
+                  <a:srgbClr val="000000"/>
+                </a:solidFill>
+                <a:effectLst/>
+                <a:uFillTx/>
+                <a:latin typeface="Times New Roman"/>
+              </a:rPr>
+              <a:t> </a:t>
+            </a:r>
+          </a:p>
+        </p:txBody>
+      </p:sp>
+      <p:sp>
+        <p:nvSpPr>
+          <p:cNvPr id="9" name="PlaceHolder 6"/>
+          <p:cNvSpPr>
+            <a:spLocks noGrp="1"/>
+          </p:cNvSpPr>
+          <p:nvPr>
+            <p:ph type="sldNum" idx="3"/>
+          </p:nvPr>
+        </p:nvSpPr>
+        <p:spPr>
+          <a:xfrm>
+            <a:off x="4278960" y="10157400"/>
+            <a:ext cx="3280680" cy="534240"/>
+          </a:xfrm>
+          <a:prstGeom prst="rect">
+            <a:avLst/>
+          </a:prstGeom>
+          <a:noFill/>
+          <a:ln w="0">
+            <a:noFill/>
+          </a:ln>
+        </p:spPr>
+        <p:txBody>
+          <a:bodyPr lIns="0" tIns="0" rIns="0" bIns="0" anchor="b">
+            <a:noAutofit/>
+          </a:bodyPr>
+          <a:lstStyle>
+            <a:lvl1pPr indent="0" algn="r">
+              <a:buNone/>
+              <a:defRPr lang="es-ES" sz="1400" b="0" u="none" strike="noStrike">
+                <a:solidFill>
+                  <a:srgbClr val="000000"/>
+                </a:solidFill>
+                <a:effectLst/>
+                <a:uFillTx/>
+                <a:latin typeface="Times New Roman"/>
+              </a:defRPr>
+            </a:lvl1pPr>
+          </a:lstStyle>
+          <a:p>
+            <a:pPr indent="0" algn="r">
+              <a:buNone/>
+            </a:pPr>
+            <a:fld id="{95DF098D-01A8-476C-86C1-17CBEAEFBA91}" type="slidenum">
+              <a:rPr lang="es-ES" sz="1400" b="0" u="none" strike="noStrike">
+                <a:solidFill>
+                  <a:srgbClr val="000000"/>
+                </a:solidFill>
+                <a:effectLst/>
+                <a:uFillTx/>
+                <a:latin typeface="Times New Roman"/>
+              </a:rPr>
+              <a:t>‹Nº›</a:t>
+            </a:fld>
+            <a:endParaRPr lang="es-ES" sz="1400" b="0" u="none" strike="noStrike">
+              <a:solidFill>
+                <a:srgbClr val="000000"/>
+              </a:solidFill>
+              <a:effectLst/>
+              <a:uFillTx/>
+              <a:latin typeface="Times New Roman"/>
+            </a:endParaRPr>
+          </a:p>
+        </p:txBody>
+      </p:sp>
+    </p:spTree>
+  </p:cSld>
+  <p:clrMap bg1="lt1" tx1="dk1" bg2="lt2" tx2="dk2" accent1="accent1" accent2="accent2" accent3="accent3" accent4="accent4" accent5="accent5" accent6="accent6" hlink="hlink" folHlink="folHlink"/>
+  <p:notesStyle>
+    <a:lvl1pPr marL="0" algn="l" defTabSz="914400" rtl="0" eaLnBrk="1" latinLnBrk="0" hangingPunct="1">
+      <a:defRPr sz="1200" kern="1200">
+        <a:solidFill>
+          <a:schemeClr val="tx1"/>
+        </a:solidFill>
+        <a:latin typeface="+mn-lt"/>
+        <a:ea typeface="+mn-ea"/>
+        <a:cs typeface="+mn-cs"/>
+      </a:defRPr>
+    </a:lvl1pPr>
+    <a:lvl2pPr marL="457200" algn="l" defTabSz="914400" rtl="0" eaLnBrk="1" latinLnBrk="0" hangingPunct="1">
+      <a:defRPr sz="1200" kern="1200">
+        <a:solidFill>
+          <a:schemeClr val="tx1"/>
+        </a:solidFill>
+        <a:latin typeface="+mn-lt"/>
+        <a:ea typeface="+mn-ea"/>
+        <a:cs typeface="+mn-cs"/>
+      </a:defRPr>
+    </a:lvl2pPr>
+    <a:lvl3pPr marL="914400" algn="l" defTabSz="914400" rtl="0" eaLnBrk="1" latinLnBrk="0" hangingPunct="1">
+      <a:defRPr sz="1200" kern="1200">
+        <a:solidFill>
+          <a:schemeClr val="tx1"/>
+        </a:solidFill>
+        <a:latin typeface="+mn-lt"/>
+        <a:ea typeface="+mn-ea"/>
+        <a:cs typeface="+mn-cs"/>
+      </a:defRPr>
+    </a:lvl3pPr>
+    <a:lvl4pPr marL="1371600" algn="l" defTabSz="914400" rtl="0" eaLnBrk="1" latinLnBrk="0" hangingPunct="1">
+      <a:defRPr sz="1200" kern="1200">
+        <a:solidFill>
+          <a:schemeClr val="tx1"/>
+        </a:solidFill>
+        <a:latin typeface="+mn-lt"/>
+        <a:ea typeface="+mn-ea"/>
+        <a:cs typeface="+mn-cs"/>
+      </a:defRPr>
+    </a:lvl4pPr>
+    <a:lvl5pPr marL="1828800" algn="l" defTabSz="914400" rtl="0" eaLnBrk="1" latinLnBrk="0" hangingPunct="1">
+      <a:defRPr sz="1200" kern="1200">
+        <a:solidFill>
+          <a:schemeClr val="tx1"/>
+        </a:solidFill>
+        <a:latin typeface="+mn-lt"/>
+        <a:ea typeface="+mn-ea"/>
+        <a:cs typeface="+mn-cs"/>
+      </a:defRPr>
+    </a:lvl5pPr>
+    <a:lvl6pPr marL="2286000" algn="l" defTabSz="914400" rtl="0" eaLnBrk="1" latinLnBrk="0" hangingPunct="1">
+      <a:defRPr sz="1200" kern="1200">
+        <a:solidFill>
+          <a:schemeClr val="tx1"/>
+        </a:solidFill>
+        <a:latin typeface="+mn-lt"/>
+        <a:ea typeface="+mn-ea"/>
+        <a:cs typeface="+mn-cs"/>
+      </a:defRPr>
+    </a:lvl6pPr>
+    <a:lvl7pPr marL="2743200" algn="l" defTabSz="914400" rtl="0" eaLnBrk="1" latinLnBrk="0" hangingPunct="1">
+      <a:defRPr sz="1200" kern="1200">
+        <a:solidFill>
+          <a:schemeClr val="tx1"/>
+        </a:solidFill>
+        <a:latin typeface="+mn-lt"/>
+        <a:ea typeface="+mn-ea"/>
+        <a:cs typeface="+mn-cs"/>
+      </a:defRPr>
+    </a:lvl7pPr>
+    <a:lvl8pPr marL="3200400" algn="l" defTabSz="914400" rtl="0" eaLnBrk="1" latinLnBrk="0" hangingPunct="1">
+      <a:defRPr sz="1200" kern="1200">
+        <a:solidFill>
+          <a:schemeClr val="tx1"/>
+        </a:solidFill>
+        <a:latin typeface="+mn-lt"/>
+        <a:ea typeface="+mn-ea"/>
+        <a:cs typeface="+mn-cs"/>
+      </a:defRPr>
+    </a:lvl8pPr>
+    <a:lvl9pPr marL="3657600" algn="l" defTabSz="914400" rtl="0" eaLnBrk="1" latinLnBrk="0" hangingPunct="1">
+      <a:defRPr sz="1200" kern="1200">
+        <a:solidFill>
+          <a:schemeClr val="tx1"/>
+        </a:solidFill>
+        <a:latin typeface="+mn-lt"/>
+        <a:ea typeface="+mn-ea"/>
+        <a:cs typeface="+mn-cs"/>
+      </a:defRPr>
+    </a:lvl9pPr>
+  </p:notesStyle>
+</p:notesMaster>
+</file>
+
+<file path=ppt/notesSlides/notesSlide1.xml><?xml version="1.0" encoding="utf-8"?>
+<p:notes xmlns:a="http://schemas.openxmlformats.org/drawingml/2006/main" xmlns:r="http://schemas.openxmlformats.org/officeDocument/2006/relationships" xmlns:p="http://schemas.openxmlformats.org/presentationml/2006/main">
   <p:cSld>
     <p:spTree>
       <p:nvGrpSpPr>
@@ -36,9 +570,9 @@
       </p:grpSpPr>
       <p:sp>
         <p:nvSpPr>
-          <p:cNvPr id="4" name="PlaceHolder 1"/>
+          <p:cNvPr id="130" name="PlaceHolder 1"/>
           <p:cNvSpPr>
-            <a:spLocks noGrp="1"/>
+            <a:spLocks noGrp="1" noRot="1" noChangeAspect="1"/>
           </p:cNvSpPr>
           <p:nvPr>
             <p:ph type="sldImg"/>
@@ -46,47 +580,20 @@
         </p:nvSpPr>
         <p:spPr>
           <a:xfrm>
-            <a:off x="216000" y="812520"/>
-            <a:ext cx="7127280" cy="4008960"/>
-          </a:xfrm>
-          <a:prstGeom prst="rect">
-            <a:avLst/>
-          </a:prstGeom>
-          <a:noFill/>
+            <a:off x="685800" y="1143000"/>
+            <a:ext cx="5486400" cy="3086100"/>
+          </a:xfrm>
+          <a:prstGeom prst="rect">
+            <a:avLst/>
+          </a:prstGeom>
           <a:ln w="0">
             <a:noFill/>
           </a:ln>
         </p:spPr>
-        <p:txBody>
-          <a:bodyPr lIns="0" tIns="0" rIns="0" bIns="0" anchor="ctr">
-            <a:noAutofit/>
-          </a:bodyPr>
-          <a:p>
-            <a:r>
-              <a:rPr lang="es-ES" sz="1800" b="0" u="none" strike="noStrike">
-                <a:solidFill>
-                  <a:schemeClr val="dk1"/>
-                </a:solidFill>
-                <a:effectLst/>
-                <a:uFillTx/>
-                <a:latin typeface="Calibri"/>
-              </a:rPr>
-              <a:t>Pulse para desplazar la diapositiva</a:t>
-            </a:r>
-            <a:endParaRPr lang="es-ES" sz="1800" b="0" u="none" strike="noStrike">
-              <a:solidFill>
-                <a:schemeClr val="dk1"/>
-              </a:solidFill>
-              <a:effectLst/>
-              <a:uFillTx/>
-              <a:latin typeface="Calibri"/>
-            </a:endParaRPr>
-          </a:p>
-        </p:txBody>
-      </p:sp>
-      <p:sp>
-        <p:nvSpPr>
-          <p:cNvPr id="5" name="PlaceHolder 2"/>
+      </p:sp>
+      <p:sp>
+        <p:nvSpPr>
+          <p:cNvPr id="131" name="PlaceHolder 2"/>
           <p:cNvSpPr>
             <a:spLocks noGrp="1"/>
           </p:cNvSpPr>
@@ -96,8 +603,8 @@
         </p:nvSpPr>
         <p:spPr>
           <a:xfrm>
-            <a:off x="756000" y="5078520"/>
-            <a:ext cx="6047640" cy="4811040"/>
+            <a:off x="685800" y="4400640"/>
+            <a:ext cx="5485680" cy="3599640"/>
           </a:xfrm>
           <a:prstGeom prst="rect">
             <a:avLst/>
@@ -108,25 +615,15 @@
           </a:ln>
         </p:spPr>
         <p:txBody>
-          <a:bodyPr lIns="0" tIns="0" rIns="0" bIns="0" anchor="t">
-            <a:noAutofit/>
-          </a:bodyPr>
+          <a:bodyPr lIns="91440" tIns="45720" rIns="91440" bIns="45720" anchor="t">
+            <a:noAutofit/>
+          </a:bodyPr>
+          <a:lstStyle/>
           <a:p>
             <a:pPr indent="0" algn="l">
               <a:buNone/>
             </a:pPr>
-            <a:r>
-              <a:rPr lang="es-ES" sz="2000" b="0" u="none" strike="noStrike">
-                <a:solidFill>
-                  <a:srgbClr val="000000"/>
-                </a:solidFill>
-                <a:effectLst/>
-                <a:uFillTx/>
-                <a:latin typeface="Arial"/>
-              </a:rPr>
-              <a:t>Pulse para editar el formato de las notas</a:t>
-            </a:r>
-            <a:endParaRPr lang="es-ES" sz="2000" b="0" u="none" strike="noStrike">
+            <a:endParaRPr lang="es-ES" sz="1800" b="0" u="none" strike="noStrike">
               <a:solidFill>
                 <a:srgbClr val="000000"/>
               </a:solidFill>
@@ -139,18 +636,18 @@
       </p:sp>
       <p:sp>
         <p:nvSpPr>
-          <p:cNvPr id="6" name="PlaceHolder 3"/>
+          <p:cNvPr id="132" name="PlaceHolder 3"/>
           <p:cNvSpPr>
             <a:spLocks noGrp="1"/>
           </p:cNvSpPr>
           <p:nvPr>
-            <p:ph type="hdr"/>
+            <p:ph type="sldNum" idx="4"/>
           </p:nvPr>
         </p:nvSpPr>
         <p:spPr>
           <a:xfrm>
-            <a:off x="0" y="0"/>
-            <a:ext cx="3280680" cy="534240"/>
+            <a:off x="3884760" y="8685360"/>
+            <a:ext cx="2971080" cy="457920"/>
           </a:xfrm>
           <a:prstGeom prst="rect">
             <a:avLst/>
@@ -161,223 +658,52 @@
           </a:ln>
         </p:spPr>
         <p:txBody>
-          <a:bodyPr lIns="0" tIns="0" rIns="0" bIns="0" anchor="t">
-            <a:noAutofit/>
-          </a:bodyPr>
-          <a:p>
-            <a:pPr indent="0" algn="l">
+          <a:bodyPr lIns="91440" tIns="45720" rIns="91440" bIns="45720" anchor="b">
+            <a:noAutofit/>
+          </a:bodyPr>
+          <a:lstStyle>
+            <a:lvl1pPr indent="0" algn="r" defTabSz="914400">
+              <a:lnSpc>
+                <a:spcPct val="100000"/>
+              </a:lnSpc>
               <a:buNone/>
-            </a:pPr>
-            <a:r>
-              <a:rPr lang="es-ES" sz="1400" b="0" u="none" strike="noStrike">
-                <a:solidFill>
-                  <a:srgbClr val="000000"/>
-                </a:solidFill>
-                <a:effectLst/>
-                <a:uFillTx/>
-                <a:latin typeface="Times New Roman"/>
-              </a:rPr>
-              <a:t> </a:t>
-            </a:r>
-            <a:endParaRPr lang="es-ES" sz="1400" b="0" u="none" strike="noStrike">
-              <a:solidFill>
-                <a:srgbClr val="000000"/>
-              </a:solidFill>
-              <a:effectLst/>
-              <a:uFillTx/>
-              <a:latin typeface="Times New Roman"/>
-            </a:endParaRPr>
-          </a:p>
-        </p:txBody>
-      </p:sp>
-      <p:sp>
-        <p:nvSpPr>
-          <p:cNvPr id="7" name="PlaceHolder 4"/>
-          <p:cNvSpPr>
-            <a:spLocks noGrp="1"/>
-          </p:cNvSpPr>
-          <p:nvPr>
-            <p:ph type="dt" idx="1"/>
-          </p:nvPr>
-        </p:nvSpPr>
-        <p:spPr>
-          <a:xfrm>
-            <a:off x="4278960" y="0"/>
-            <a:ext cx="3280680" cy="534240"/>
-          </a:xfrm>
-          <a:prstGeom prst="rect">
-            <a:avLst/>
-          </a:prstGeom>
-          <a:noFill/>
-          <a:ln w="0">
-            <a:noFill/>
-          </a:ln>
-        </p:spPr>
-        <p:txBody>
-          <a:bodyPr lIns="0" tIns="0" rIns="0" bIns="0" anchor="t">
-            <a:noAutofit/>
-          </a:bodyPr>
-          <a:lstStyle>
-            <a:lvl1pPr indent="0" algn="r">
-              <a:buNone/>
-              <a:defRPr lang="es-ES" sz="1400" b="0" u="none" strike="noStrike">
-                <a:solidFill>
-                  <a:srgbClr val="000000"/>
-                </a:solidFill>
-                <a:effectLst/>
-                <a:uFillTx/>
-                <a:latin typeface="Times New Roman"/>
+              <a:tabLst>
+                <a:tab pos="0" algn="l"/>
+              </a:tabLst>
+              <a:defRPr lang="en-US" sz="1200" b="0" u="none" strike="noStrike">
+                <a:solidFill>
+                  <a:schemeClr val="dk1"/>
+                </a:solidFill>
+                <a:effectLst/>
+                <a:uFillTx/>
+                <a:latin typeface="+mn-lt"/>
+                <a:ea typeface="+mn-ea"/>
               </a:defRPr>
             </a:lvl1pPr>
           </a:lstStyle>
           <a:p>
-            <a:pPr indent="0" algn="r">
+            <a:pPr indent="0" algn="r" defTabSz="914400">
+              <a:lnSpc>
+                <a:spcPct val="100000"/>
+              </a:lnSpc>
               <a:buNone/>
+              <a:tabLst>
+                <a:tab pos="0" algn="l"/>
+              </a:tabLst>
             </a:pPr>
-            <a:r>
-              <a:rPr lang="es-ES" sz="1400" b="0" u="none" strike="noStrike">
-                <a:solidFill>
-                  <a:srgbClr val="000000"/>
-                </a:solidFill>
-                <a:effectLst/>
-                <a:uFillTx/>
-                <a:latin typeface="Times New Roman"/>
-              </a:rPr>
-              <a:t> </a:t>
-            </a:r>
-            <a:endParaRPr lang="es-ES" sz="1400" b="0" u="none" strike="noStrike">
-              <a:solidFill>
-                <a:srgbClr val="000000"/>
-              </a:solidFill>
-              <a:effectLst/>
-              <a:uFillTx/>
-              <a:latin typeface="Times New Roman"/>
-            </a:endParaRPr>
-          </a:p>
-        </p:txBody>
-      </p:sp>
-      <p:sp>
-        <p:nvSpPr>
-          <p:cNvPr id="8" name="PlaceHolder 5"/>
-          <p:cNvSpPr>
-            <a:spLocks noGrp="1"/>
-          </p:cNvSpPr>
-          <p:nvPr>
-            <p:ph type="ftr" idx="2"/>
-          </p:nvPr>
-        </p:nvSpPr>
-        <p:spPr>
-          <a:xfrm>
-            <a:off x="0" y="10157400"/>
-            <a:ext cx="3280680" cy="534240"/>
-          </a:xfrm>
-          <a:prstGeom prst="rect">
-            <a:avLst/>
-          </a:prstGeom>
-          <a:noFill/>
-          <a:ln w="0">
-            <a:noFill/>
-          </a:ln>
-        </p:spPr>
-        <p:txBody>
-          <a:bodyPr lIns="0" tIns="0" rIns="0" bIns="0" anchor="b">
-            <a:noAutofit/>
-          </a:bodyPr>
-          <a:lstStyle>
-            <a:lvl1pPr indent="0" algn="l">
-              <a:buNone/>
-              <a:defRPr lang="es-ES" sz="1400" b="0" u="none" strike="noStrike">
-                <a:solidFill>
-                  <a:srgbClr val="000000"/>
-                </a:solidFill>
-                <a:effectLst/>
-                <a:uFillTx/>
-                <a:latin typeface="Times New Roman"/>
-              </a:defRPr>
-            </a:lvl1pPr>
-          </a:lstStyle>
-          <a:p>
-            <a:pPr indent="0" algn="l">
-              <a:buNone/>
-            </a:pPr>
-            <a:r>
-              <a:rPr lang="es-ES" sz="1400" b="0" u="none" strike="noStrike">
-                <a:solidFill>
-                  <a:srgbClr val="000000"/>
-                </a:solidFill>
-                <a:effectLst/>
-                <a:uFillTx/>
-                <a:latin typeface="Times New Roman"/>
-              </a:rPr>
-              <a:t> </a:t>
-            </a:r>
-            <a:endParaRPr lang="es-ES" sz="1400" b="0" u="none" strike="noStrike">
-              <a:solidFill>
-                <a:srgbClr val="000000"/>
-              </a:solidFill>
-              <a:effectLst/>
-              <a:uFillTx/>
-              <a:latin typeface="Times New Roman"/>
-            </a:endParaRPr>
-          </a:p>
-        </p:txBody>
-      </p:sp>
-      <p:sp>
-        <p:nvSpPr>
-          <p:cNvPr id="9" name="PlaceHolder 6"/>
-          <p:cNvSpPr>
-            <a:spLocks noGrp="1"/>
-          </p:cNvSpPr>
-          <p:nvPr>
-            <p:ph type="sldNum" idx="3"/>
-          </p:nvPr>
-        </p:nvSpPr>
-        <p:spPr>
-          <a:xfrm>
-            <a:off x="4278960" y="10157400"/>
-            <a:ext cx="3280680" cy="534240"/>
-          </a:xfrm>
-          <a:prstGeom prst="rect">
-            <a:avLst/>
-          </a:prstGeom>
-          <a:noFill/>
-          <a:ln w="0">
-            <a:noFill/>
-          </a:ln>
-        </p:spPr>
-        <p:txBody>
-          <a:bodyPr lIns="0" tIns="0" rIns="0" bIns="0" anchor="b">
-            <a:noAutofit/>
-          </a:bodyPr>
-          <a:lstStyle>
-            <a:lvl1pPr indent="0" algn="r">
-              <a:buNone/>
-              <a:defRPr lang="es-ES" sz="1400" b="0" u="none" strike="noStrike">
-                <a:solidFill>
-                  <a:srgbClr val="000000"/>
-                </a:solidFill>
-                <a:effectLst/>
-                <a:uFillTx/>
-                <a:latin typeface="Times New Roman"/>
-              </a:defRPr>
-            </a:lvl1pPr>
-          </a:lstStyle>
-          <a:p>
-            <a:pPr indent="0" algn="r">
-              <a:buNone/>
-            </a:pPr>
-            <a:fld id="{95DF098D-01A8-476C-86C1-17CBEAEFBA91}" type="slidenum">
-              <a:rPr lang="es-ES" sz="1400" b="0" u="none" strike="noStrike">
-                <a:solidFill>
-                  <a:srgbClr val="000000"/>
-                </a:solidFill>
-                <a:effectLst/>
-                <a:uFillTx/>
-                <a:latin typeface="Times New Roman"/>
-              </a:rPr>
-              <a:t>1</a:t>
+            <a:fld id="{B3CF1EB8-D070-4A7D-BCA6-C9BB85FB33B1}" type="slidenum">
+              <a:rPr lang="en-US" sz="1200" b="0" u="none" strike="noStrike">
+                <a:solidFill>
+                  <a:schemeClr val="dk1"/>
+                </a:solidFill>
+                <a:effectLst/>
+                <a:uFillTx/>
+                <a:latin typeface="+mn-lt"/>
+                <a:ea typeface="+mn-ea"/>
+              </a:rPr>
+              <a:t>2</a:t>
             </a:fld>
-            <a:endParaRPr lang="es-ES" sz="1400" b="0" u="none" strike="noStrike">
+            <a:endParaRPr lang="es-ES" sz="1200" b="0" u="none" strike="noStrike">
               <a:solidFill>
                 <a:srgbClr val="000000"/>
               </a:solidFill>
@@ -390,12 +716,14 @@
       </p:sp>
     </p:spTree>
   </p:cSld>
-  <p:clrMap bg1="lt1" bg2="lt2" tx1="dk1" tx2="dk2" accent1="accent1" accent2="accent2" accent3="accent3" accent4="accent4" accent5="accent5" accent6="accent6" hlink="hlink" folHlink="folHlink"/>
-</p:notesMaster>
+  <p:clrMapOvr>
+    <a:masterClrMapping/>
+  </p:clrMapOvr>
+</p:notes>
 </file>
 
-<file path=ppt/notesSlides/notesSlide1.xml><?xml version="1.0" encoding="utf-8"?>
-<p:notes xmlns:a="http://schemas.openxmlformats.org/drawingml/2006/main" xmlns:p="http://schemas.openxmlformats.org/presentationml/2006/main" xmlns:r="http://schemas.openxmlformats.org/officeDocument/2006/relationships" xmlns:p14="http://schemas.microsoft.com/office/powerpoint/2010/main" xmlns:p15="http://schemas.microsoft.com/office/powerpoint/2012/main" xmlns:mc="http://schemas.openxmlformats.org/markup-compatibility/2006">
+<file path=ppt/notesSlides/notesSlide2.xml><?xml version="1.0" encoding="utf-8"?>
+<p:notes xmlns:a="http://schemas.openxmlformats.org/drawingml/2006/main" xmlns:r="http://schemas.openxmlformats.org/officeDocument/2006/relationships" xmlns:p="http://schemas.openxmlformats.org/presentationml/2006/main">
   <p:cSld>
     <p:spTree>
       <p:nvGrpSpPr>
@@ -413,9 +741,9 @@
       </p:grpSpPr>
       <p:sp>
         <p:nvSpPr>
-          <p:cNvPr id="130" name="PlaceHolder 1"/>
+          <p:cNvPr id="133" name="PlaceHolder 1"/>
           <p:cNvSpPr>
-            <a:spLocks noGrp="1"/>
+            <a:spLocks noGrp="1" noRot="1" noChangeAspect="1"/>
           </p:cNvSpPr>
           <p:nvPr>
             <p:ph type="sldImg"/>
@@ -424,7 +752,7 @@
         <p:spPr>
           <a:xfrm>
             <a:off x="685800" y="1143000"/>
-            <a:ext cx="5485680" cy="3085560"/>
+            <a:ext cx="5486400" cy="3086100"/>
           </a:xfrm>
           <a:prstGeom prst="rect">
             <a:avLst/>
@@ -436,7 +764,7 @@
       </p:sp>
       <p:sp>
         <p:nvSpPr>
-          <p:cNvPr id="131" name="PlaceHolder 2"/>
+          <p:cNvPr id="134" name="PlaceHolder 2"/>
           <p:cNvSpPr>
             <a:spLocks noGrp="1"/>
           </p:cNvSpPr>
@@ -461,6 +789,7 @@
           <a:bodyPr lIns="91440" tIns="45720" rIns="91440" bIns="45720" anchor="t">
             <a:noAutofit/>
           </a:bodyPr>
+          <a:lstStyle/>
           <a:p>
             <a:pPr indent="0" algn="l">
               <a:buNone/>
@@ -478,12 +807,12 @@
       </p:sp>
       <p:sp>
         <p:nvSpPr>
-          <p:cNvPr id="132" name="PlaceHolder 3"/>
+          <p:cNvPr id="135" name="PlaceHolder 3"/>
           <p:cNvSpPr>
             <a:spLocks noGrp="1"/>
           </p:cNvSpPr>
           <p:nvPr>
-            <p:ph type="sldNum" idx="4"/>
+            <p:ph type="sldNum" idx="5"/>
           </p:nvPr>
         </p:nvSpPr>
         <p:spPr>
@@ -533,7 +862,7 @@
                 <a:tab pos="0" algn="l"/>
               </a:tabLst>
             </a:pPr>
-            <a:fld id="{B3CF1EB8-D070-4A7D-BCA6-C9BB85FB33B1}" type="slidenum">
+            <a:fld id="{3304B765-2A15-4FD4-932A-FF27DF7FC9F0}" type="slidenum">
               <a:rPr lang="en-US" sz="1200" b="0" u="none" strike="noStrike">
                 <a:solidFill>
                   <a:schemeClr val="dk1"/>
@@ -543,7 +872,7 @@
                 <a:latin typeface="+mn-lt"/>
                 <a:ea typeface="+mn-ea"/>
               </a:rPr>
-              <a:t>&lt;número&gt;</a:t>
+              <a:t>3</a:t>
             </a:fld>
             <a:endParaRPr lang="es-ES" sz="1200" b="0" u="none" strike="noStrike">
               <a:solidFill>
@@ -558,11 +887,14 @@
       </p:sp>
     </p:spTree>
   </p:cSld>
+  <p:clrMapOvr>
+    <a:masterClrMapping/>
+  </p:clrMapOvr>
 </p:notes>
 </file>
 
-<file path=ppt/notesSlides/notesSlide2.xml><?xml version="1.0" encoding="utf-8"?>
-<p:notes xmlns:a="http://schemas.openxmlformats.org/drawingml/2006/main" xmlns:p="http://schemas.openxmlformats.org/presentationml/2006/main" xmlns:r="http://schemas.openxmlformats.org/officeDocument/2006/relationships" xmlns:p14="http://schemas.microsoft.com/office/powerpoint/2010/main" xmlns:p15="http://schemas.microsoft.com/office/powerpoint/2012/main" xmlns:mc="http://schemas.openxmlformats.org/markup-compatibility/2006">
+<file path=ppt/notesSlides/notesSlide3.xml><?xml version="1.0" encoding="utf-8"?>
+<p:notes xmlns:a="http://schemas.openxmlformats.org/drawingml/2006/main" xmlns:r="http://schemas.openxmlformats.org/officeDocument/2006/relationships" xmlns:p="http://schemas.openxmlformats.org/presentationml/2006/main">
   <p:cSld>
     <p:spTree>
       <p:nvGrpSpPr>
@@ -580,9 +912,9 @@
       </p:grpSpPr>
       <p:sp>
         <p:nvSpPr>
-          <p:cNvPr id="133" name="PlaceHolder 1"/>
+          <p:cNvPr id="136" name="PlaceHolder 1"/>
           <p:cNvSpPr>
-            <a:spLocks noGrp="1"/>
+            <a:spLocks noGrp="1" noRot="1" noChangeAspect="1"/>
           </p:cNvSpPr>
           <p:nvPr>
             <p:ph type="sldImg"/>
@@ -591,174 +923,7 @@
         <p:spPr>
           <a:xfrm>
             <a:off x="685800" y="1143000"/>
-            <a:ext cx="5485680" cy="3085560"/>
-          </a:xfrm>
-          <a:prstGeom prst="rect">
-            <a:avLst/>
-          </a:prstGeom>
-          <a:ln w="0">
-            <a:noFill/>
-          </a:ln>
-        </p:spPr>
-      </p:sp>
-      <p:sp>
-        <p:nvSpPr>
-          <p:cNvPr id="134" name="PlaceHolder 2"/>
-          <p:cNvSpPr>
-            <a:spLocks noGrp="1"/>
-          </p:cNvSpPr>
-          <p:nvPr>
-            <p:ph type="body"/>
-          </p:nvPr>
-        </p:nvSpPr>
-        <p:spPr>
-          <a:xfrm>
-            <a:off x="685800" y="4400640"/>
-            <a:ext cx="5485680" cy="3599640"/>
-          </a:xfrm>
-          <a:prstGeom prst="rect">
-            <a:avLst/>
-          </a:prstGeom>
-          <a:noFill/>
-          <a:ln w="0">
-            <a:noFill/>
-          </a:ln>
-        </p:spPr>
-        <p:txBody>
-          <a:bodyPr lIns="91440" tIns="45720" rIns="91440" bIns="45720" anchor="t">
-            <a:noAutofit/>
-          </a:bodyPr>
-          <a:p>
-            <a:pPr indent="0" algn="l">
-              <a:buNone/>
-            </a:pPr>
-            <a:endParaRPr lang="es-ES" sz="1800" b="0" u="none" strike="noStrike">
-              <a:solidFill>
-                <a:srgbClr val="000000"/>
-              </a:solidFill>
-              <a:effectLst/>
-              <a:uFillTx/>
-              <a:latin typeface="Arial"/>
-            </a:endParaRPr>
-          </a:p>
-        </p:txBody>
-      </p:sp>
-      <p:sp>
-        <p:nvSpPr>
-          <p:cNvPr id="135" name="PlaceHolder 3"/>
-          <p:cNvSpPr>
-            <a:spLocks noGrp="1"/>
-          </p:cNvSpPr>
-          <p:nvPr>
-            <p:ph type="sldNum" idx="5"/>
-          </p:nvPr>
-        </p:nvSpPr>
-        <p:spPr>
-          <a:xfrm>
-            <a:off x="3884760" y="8685360"/>
-            <a:ext cx="2971080" cy="457920"/>
-          </a:xfrm>
-          <a:prstGeom prst="rect">
-            <a:avLst/>
-          </a:prstGeom>
-          <a:noFill/>
-          <a:ln w="0">
-            <a:noFill/>
-          </a:ln>
-        </p:spPr>
-        <p:txBody>
-          <a:bodyPr lIns="91440" tIns="45720" rIns="91440" bIns="45720" anchor="b">
-            <a:noAutofit/>
-          </a:bodyPr>
-          <a:lstStyle>
-            <a:lvl1pPr indent="0" algn="r" defTabSz="914400">
-              <a:lnSpc>
-                <a:spcPct val="100000"/>
-              </a:lnSpc>
-              <a:buNone/>
-              <a:tabLst>
-                <a:tab pos="0" algn="l"/>
-              </a:tabLst>
-              <a:defRPr lang="en-US" sz="1200" b="0" u="none" strike="noStrike">
-                <a:solidFill>
-                  <a:schemeClr val="dk1"/>
-                </a:solidFill>
-                <a:effectLst/>
-                <a:uFillTx/>
-                <a:latin typeface="+mn-lt"/>
-                <a:ea typeface="+mn-ea"/>
-              </a:defRPr>
-            </a:lvl1pPr>
-          </a:lstStyle>
-          <a:p>
-            <a:pPr indent="0" algn="r" defTabSz="914400">
-              <a:lnSpc>
-                <a:spcPct val="100000"/>
-              </a:lnSpc>
-              <a:buNone/>
-              <a:tabLst>
-                <a:tab pos="0" algn="l"/>
-              </a:tabLst>
-            </a:pPr>
-            <a:fld id="{3304B765-2A15-4FD4-932A-FF27DF7FC9F0}" type="slidenum">
-              <a:rPr lang="en-US" sz="1200" b="0" u="none" strike="noStrike">
-                <a:solidFill>
-                  <a:schemeClr val="dk1"/>
-                </a:solidFill>
-                <a:effectLst/>
-                <a:uFillTx/>
-                <a:latin typeface="+mn-lt"/>
-                <a:ea typeface="+mn-ea"/>
-              </a:rPr>
-              <a:t>&lt;número&gt;</a:t>
-            </a:fld>
-            <a:endParaRPr lang="es-ES" sz="1200" b="0" u="none" strike="noStrike">
-              <a:solidFill>
-                <a:srgbClr val="000000"/>
-              </a:solidFill>
-              <a:effectLst/>
-              <a:uFillTx/>
-              <a:latin typeface="Times New Roman"/>
-            </a:endParaRPr>
-          </a:p>
-        </p:txBody>
-      </p:sp>
-    </p:spTree>
-  </p:cSld>
-</p:notes>
-</file>
-
-<file path=ppt/notesSlides/notesSlide3.xml><?xml version="1.0" encoding="utf-8"?>
-<p:notes xmlns:a="http://schemas.openxmlformats.org/drawingml/2006/main" xmlns:p="http://schemas.openxmlformats.org/presentationml/2006/main" xmlns:r="http://schemas.openxmlformats.org/officeDocument/2006/relationships" xmlns:p14="http://schemas.microsoft.com/office/powerpoint/2010/main" xmlns:p15="http://schemas.microsoft.com/office/powerpoint/2012/main" xmlns:mc="http://schemas.openxmlformats.org/markup-compatibility/2006">
-  <p:cSld>
-    <p:spTree>
-      <p:nvGrpSpPr>
-        <p:cNvPr id="1" name=""/>
-        <p:cNvGrpSpPr/>
-        <p:nvPr/>
-      </p:nvGrpSpPr>
-      <p:grpSpPr>
-        <a:xfrm>
-          <a:off x="0" y="0"/>
-          <a:ext cx="0" cy="0"/>
-          <a:chOff x="0" y="0"/>
-          <a:chExt cx="0" cy="0"/>
-        </a:xfrm>
-      </p:grpSpPr>
-      <p:sp>
-        <p:nvSpPr>
-          <p:cNvPr id="136" name="PlaceHolder 1"/>
-          <p:cNvSpPr>
-            <a:spLocks noGrp="1"/>
-          </p:cNvSpPr>
-          <p:nvPr>
-            <p:ph type="sldImg"/>
-          </p:nvPr>
-        </p:nvSpPr>
-        <p:spPr>
-          <a:xfrm>
-            <a:off x="685800" y="1143000"/>
-            <a:ext cx="5485680" cy="3085560"/>
+            <a:ext cx="5486400" cy="3086100"/>
           </a:xfrm>
           <a:prstGeom prst="rect">
             <a:avLst/>
@@ -795,6 +960,7 @@
           <a:bodyPr lIns="91440" tIns="45720" rIns="91440" bIns="45720" anchor="t">
             <a:noAutofit/>
           </a:bodyPr>
+          <a:lstStyle/>
           <a:p>
             <a:pPr indent="0" algn="l">
               <a:buNone/>
@@ -877,7 +1043,7 @@
                 <a:latin typeface="+mn-lt"/>
                 <a:ea typeface="+mn-ea"/>
               </a:rPr>
-              <a:t>&lt;número&gt;</a:t>
+              <a:t>4</a:t>
             </a:fld>
             <a:endParaRPr lang="es-ES" sz="1200" b="0" u="none" strike="noStrike">
               <a:solidFill>
@@ -892,11 +1058,14 @@
       </p:sp>
     </p:spTree>
   </p:cSld>
+  <p:clrMapOvr>
+    <a:masterClrMapping/>
+  </p:clrMapOvr>
 </p:notes>
 </file>
 
 <file path=ppt/slideLayouts/slideLayout1.xml><?xml version="1.0" encoding="utf-8"?>
-<p:sldLayout xmlns:a="http://schemas.openxmlformats.org/drawingml/2006/main" xmlns:p="http://schemas.openxmlformats.org/presentationml/2006/main" xmlns:r="http://schemas.openxmlformats.org/officeDocument/2006/relationships" xmlns:p14="http://schemas.microsoft.com/office/powerpoint/2010/main" xmlns:p15="http://schemas.microsoft.com/office/powerpoint/2012/main" xmlns:mc="http://schemas.openxmlformats.org/markup-compatibility/2006" type="blank" preserve="1">
+<p:sldLayout xmlns:a="http://schemas.openxmlformats.org/drawingml/2006/main" xmlns:r="http://schemas.openxmlformats.org/officeDocument/2006/relationships" xmlns:p="http://schemas.openxmlformats.org/presentationml/2006/main" type="blank" preserve="1">
   <p:cSld name="DEFAULT">
     <p:spTree>
       <p:nvGrpSpPr>
@@ -914,17 +1083,21 @@
       </p:grpSpPr>
     </p:spTree>
   </p:cSld>
+  <p:clrMapOvr>
+    <a:masterClrMapping/>
+  </p:clrMapOvr>
 </p:sldLayout>
 </file>
 
 <file path=ppt/slideMasters/slideMaster1.xml><?xml version="1.0" encoding="utf-8"?>
-<p:sldMaster xmlns:a="http://schemas.openxmlformats.org/drawingml/2006/main" xmlns:p="http://schemas.openxmlformats.org/presentationml/2006/main" xmlns:r="http://schemas.openxmlformats.org/officeDocument/2006/relationships" xmlns:p14="http://schemas.microsoft.com/office/powerpoint/2010/main" xmlns:p15="http://schemas.microsoft.com/office/powerpoint/2012/main" xmlns:mc="http://schemas.openxmlformats.org/markup-compatibility/2006">
+<p:sldMaster xmlns:a="http://schemas.openxmlformats.org/drawingml/2006/main" xmlns:r="http://schemas.openxmlformats.org/officeDocument/2006/relationships" xmlns:p="http://schemas.openxmlformats.org/presentationml/2006/main">
   <p:cSld>
     <p:bg>
       <p:bgPr>
         <a:solidFill>
           <a:srgbClr val="FFFFFF"/>
         </a:solidFill>
+        <a:effectLst/>
       </p:bgPr>
     </p:bg>
     <p:spTree>
@@ -1002,14 +1175,6 @@
               </a:rPr>
               <a:t>Pulse para editar el formato del texto de título</a:t>
             </a:r>
-            <a:endParaRPr lang="es-ES" sz="1800" b="0" u="none" strike="noStrike">
-              <a:solidFill>
-                <a:schemeClr val="dk1"/>
-              </a:solidFill>
-              <a:effectLst/>
-              <a:uFillTx/>
-              <a:latin typeface="Calibri"/>
-            </a:endParaRPr>
           </a:p>
         </p:txBody>
       </p:sp>
@@ -1198,14 +1363,6 @@
               </a:rPr>
               <a:t>Pulse para editar el formato de texto del esquema</a:t>
             </a:r>
-            <a:endParaRPr lang="es-ES" sz="3200" b="0" u="none" strike="noStrike">
-              <a:solidFill>
-                <a:schemeClr val="dk1"/>
-              </a:solidFill>
-              <a:effectLst/>
-              <a:uFillTx/>
-              <a:latin typeface="Calibri"/>
-            </a:endParaRPr>
           </a:p>
           <a:p>
             <a:pPr marL="864000" lvl="1" indent="-324000" algn="l">
@@ -1230,14 +1387,6 @@
               </a:rPr>
               <a:t>Segundo nivel del esquema</a:t>
             </a:r>
-            <a:endParaRPr lang="es-ES" sz="2400" b="0" u="none" strike="noStrike">
-              <a:solidFill>
-                <a:schemeClr val="dk1"/>
-              </a:solidFill>
-              <a:effectLst/>
-              <a:uFillTx/>
-              <a:latin typeface="Calibri"/>
-            </a:endParaRPr>
           </a:p>
           <a:p>
             <a:pPr marL="1296000" lvl="2" indent="-288000" algn="l">
@@ -1262,14 +1411,6 @@
               </a:rPr>
               <a:t>Tercer nivel del esquema</a:t>
             </a:r>
-            <a:endParaRPr lang="es-ES" sz="2000" b="0" u="none" strike="noStrike">
-              <a:solidFill>
-                <a:schemeClr val="dk1"/>
-              </a:solidFill>
-              <a:effectLst/>
-              <a:uFillTx/>
-              <a:latin typeface="Calibri"/>
-            </a:endParaRPr>
           </a:p>
           <a:p>
             <a:pPr marL="1728000" lvl="3" indent="-216000" algn="l">
@@ -1294,14 +1435,6 @@
               </a:rPr>
               <a:t>Cuarto nivel del esquema</a:t>
             </a:r>
-            <a:endParaRPr lang="es-ES" sz="2000" b="0" u="none" strike="noStrike">
-              <a:solidFill>
-                <a:schemeClr val="dk1"/>
-              </a:solidFill>
-              <a:effectLst/>
-              <a:uFillTx/>
-              <a:latin typeface="Calibri"/>
-            </a:endParaRPr>
           </a:p>
           <a:p>
             <a:pPr marL="2160000" lvl="4" indent="-216000" algn="l">
@@ -1326,14 +1459,6 @@
               </a:rPr>
               <a:t>Quinto nivel del esquema</a:t>
             </a:r>
-            <a:endParaRPr lang="es-ES" sz="2000" b="0" u="none" strike="noStrike">
-              <a:solidFill>
-                <a:schemeClr val="dk1"/>
-              </a:solidFill>
-              <a:effectLst/>
-              <a:uFillTx/>
-              <a:latin typeface="Calibri"/>
-            </a:endParaRPr>
           </a:p>
           <a:p>
             <a:pPr marL="2592000" lvl="5" indent="-216000" algn="l">
@@ -1358,14 +1483,6 @@
               </a:rPr>
               <a:t>Sexto nivel del esquema</a:t>
             </a:r>
-            <a:endParaRPr lang="es-ES" sz="2000" b="0" u="none" strike="noStrike">
-              <a:solidFill>
-                <a:schemeClr val="dk1"/>
-              </a:solidFill>
-              <a:effectLst/>
-              <a:uFillTx/>
-              <a:latin typeface="Calibri"/>
-            </a:endParaRPr>
           </a:p>
           <a:p>
             <a:pPr marL="3024000" lvl="6" indent="-216000" algn="l">
@@ -1390,14 +1507,6 @@
               </a:rPr>
               <a:t>Séptimo nivel del esquema</a:t>
             </a:r>
-            <a:endParaRPr lang="es-ES" sz="2000" b="0" u="none" strike="noStrike">
-              <a:solidFill>
-                <a:schemeClr val="dk1"/>
-              </a:solidFill>
-              <a:effectLst/>
-              <a:uFillTx/>
-              <a:latin typeface="Calibri"/>
-            </a:endParaRPr>
           </a:p>
         </p:txBody>
       </p:sp>
@@ -1405,19 +1514,400 @@
   </p:cSld>
   <p:clrMap bg1="lt1" tx1="dk1" bg2="lt2" tx2="dk2" accent1="accent1" accent2="accent2" accent3="accent3" accent4="accent4" accent5="accent5" accent6="accent6" hlink="hlink" folHlink="folHlink"/>
   <p:sldLayoutIdLst>
-    <p:sldLayoutId id="2147483649" r:id="rId2"/>
+    <p:sldLayoutId id="2147483649" r:id="rId1"/>
   </p:sldLayoutIdLst>
+  <p:txStyles>
+    <p:titleStyle>
+      <a:lvl1pPr algn="l" defTabSz="914400" rtl="0" eaLnBrk="1" latinLnBrk="0" hangingPunct="1">
+        <a:lnSpc>
+          <a:spcPct val="90000"/>
+        </a:lnSpc>
+        <a:spcBef>
+          <a:spcPct val="0"/>
+        </a:spcBef>
+        <a:buNone/>
+        <a:defRPr sz="4400" kern="1200">
+          <a:solidFill>
+            <a:schemeClr val="tx1"/>
+          </a:solidFill>
+          <a:latin typeface="+mj-lt"/>
+          <a:ea typeface="+mj-ea"/>
+          <a:cs typeface="+mj-cs"/>
+        </a:defRPr>
+      </a:lvl1pPr>
+    </p:titleStyle>
+    <p:bodyStyle>
+      <a:lvl1pPr marL="228600" indent="-228600" algn="l" defTabSz="914400" rtl="0" eaLnBrk="1" latinLnBrk="0" hangingPunct="1">
+        <a:lnSpc>
+          <a:spcPct val="90000"/>
+        </a:lnSpc>
+        <a:spcBef>
+          <a:spcPts val="1000"/>
+        </a:spcBef>
+        <a:buFont typeface="Arial" panose="020B0604020202020204" pitchFamily="34" charset="0"/>
+        <a:buChar char="•"/>
+        <a:defRPr sz="2800" kern="1200">
+          <a:solidFill>
+            <a:schemeClr val="tx1"/>
+          </a:solidFill>
+          <a:latin typeface="+mn-lt"/>
+          <a:ea typeface="+mn-ea"/>
+          <a:cs typeface="+mn-cs"/>
+        </a:defRPr>
+      </a:lvl1pPr>
+      <a:lvl2pPr marL="685800" indent="-228600" algn="l" defTabSz="914400" rtl="0" eaLnBrk="1" latinLnBrk="0" hangingPunct="1">
+        <a:lnSpc>
+          <a:spcPct val="90000"/>
+        </a:lnSpc>
+        <a:spcBef>
+          <a:spcPts val="500"/>
+        </a:spcBef>
+        <a:buFont typeface="Arial" panose="020B0604020202020204" pitchFamily="34" charset="0"/>
+        <a:buChar char="•"/>
+        <a:defRPr sz="2400" kern="1200">
+          <a:solidFill>
+            <a:schemeClr val="tx1"/>
+          </a:solidFill>
+          <a:latin typeface="+mn-lt"/>
+          <a:ea typeface="+mn-ea"/>
+          <a:cs typeface="+mn-cs"/>
+        </a:defRPr>
+      </a:lvl2pPr>
+      <a:lvl3pPr marL="1143000" indent="-228600" algn="l" defTabSz="914400" rtl="0" eaLnBrk="1" latinLnBrk="0" hangingPunct="1">
+        <a:lnSpc>
+          <a:spcPct val="90000"/>
+        </a:lnSpc>
+        <a:spcBef>
+          <a:spcPts val="500"/>
+        </a:spcBef>
+        <a:buFont typeface="Arial" panose="020B0604020202020204" pitchFamily="34" charset="0"/>
+        <a:buChar char="•"/>
+        <a:defRPr sz="2000" kern="1200">
+          <a:solidFill>
+            <a:schemeClr val="tx1"/>
+          </a:solidFill>
+          <a:latin typeface="+mn-lt"/>
+          <a:ea typeface="+mn-ea"/>
+          <a:cs typeface="+mn-cs"/>
+        </a:defRPr>
+      </a:lvl3pPr>
+      <a:lvl4pPr marL="1600200" indent="-228600" algn="l" defTabSz="914400" rtl="0" eaLnBrk="1" latinLnBrk="0" hangingPunct="1">
+        <a:lnSpc>
+          <a:spcPct val="90000"/>
+        </a:lnSpc>
+        <a:spcBef>
+          <a:spcPts val="500"/>
+        </a:spcBef>
+        <a:buFont typeface="Arial" panose="020B0604020202020204" pitchFamily="34" charset="0"/>
+        <a:buChar char="•"/>
+        <a:defRPr sz="1800" kern="1200">
+          <a:solidFill>
+            <a:schemeClr val="tx1"/>
+          </a:solidFill>
+          <a:latin typeface="+mn-lt"/>
+          <a:ea typeface="+mn-ea"/>
+          <a:cs typeface="+mn-cs"/>
+        </a:defRPr>
+      </a:lvl4pPr>
+      <a:lvl5pPr marL="2057400" indent="-228600" algn="l" defTabSz="914400" rtl="0" eaLnBrk="1" latinLnBrk="0" hangingPunct="1">
+        <a:lnSpc>
+          <a:spcPct val="90000"/>
+        </a:lnSpc>
+        <a:spcBef>
+          <a:spcPts val="500"/>
+        </a:spcBef>
+        <a:buFont typeface="Arial" panose="020B0604020202020204" pitchFamily="34" charset="0"/>
+        <a:buChar char="•"/>
+        <a:defRPr sz="1800" kern="1200">
+          <a:solidFill>
+            <a:schemeClr val="tx1"/>
+          </a:solidFill>
+          <a:latin typeface="+mn-lt"/>
+          <a:ea typeface="+mn-ea"/>
+          <a:cs typeface="+mn-cs"/>
+        </a:defRPr>
+      </a:lvl5pPr>
+      <a:lvl6pPr marL="2514600" indent="-228600" algn="l" defTabSz="914400" rtl="0" eaLnBrk="1" latinLnBrk="0" hangingPunct="1">
+        <a:lnSpc>
+          <a:spcPct val="90000"/>
+        </a:lnSpc>
+        <a:spcBef>
+          <a:spcPts val="500"/>
+        </a:spcBef>
+        <a:buFont typeface="Arial" panose="020B0604020202020204" pitchFamily="34" charset="0"/>
+        <a:buChar char="•"/>
+        <a:defRPr sz="1800" kern="1200">
+          <a:solidFill>
+            <a:schemeClr val="tx1"/>
+          </a:solidFill>
+          <a:latin typeface="+mn-lt"/>
+          <a:ea typeface="+mn-ea"/>
+          <a:cs typeface="+mn-cs"/>
+        </a:defRPr>
+      </a:lvl6pPr>
+      <a:lvl7pPr marL="2971800" indent="-228600" algn="l" defTabSz="914400" rtl="0" eaLnBrk="1" latinLnBrk="0" hangingPunct="1">
+        <a:lnSpc>
+          <a:spcPct val="90000"/>
+        </a:lnSpc>
+        <a:spcBef>
+          <a:spcPts val="500"/>
+        </a:spcBef>
+        <a:buFont typeface="Arial" panose="020B0604020202020204" pitchFamily="34" charset="0"/>
+        <a:buChar char="•"/>
+        <a:defRPr sz="1800" kern="1200">
+          <a:solidFill>
+            <a:schemeClr val="tx1"/>
+          </a:solidFill>
+          <a:latin typeface="+mn-lt"/>
+          <a:ea typeface="+mn-ea"/>
+          <a:cs typeface="+mn-cs"/>
+        </a:defRPr>
+      </a:lvl7pPr>
+      <a:lvl8pPr marL="3429000" indent="-228600" algn="l" defTabSz="914400" rtl="0" eaLnBrk="1" latinLnBrk="0" hangingPunct="1">
+        <a:lnSpc>
+          <a:spcPct val="90000"/>
+        </a:lnSpc>
+        <a:spcBef>
+          <a:spcPts val="500"/>
+        </a:spcBef>
+        <a:buFont typeface="Arial" panose="020B0604020202020204" pitchFamily="34" charset="0"/>
+        <a:buChar char="•"/>
+        <a:defRPr sz="1800" kern="1200">
+          <a:solidFill>
+            <a:schemeClr val="tx1"/>
+          </a:solidFill>
+          <a:latin typeface="+mn-lt"/>
+          <a:ea typeface="+mn-ea"/>
+          <a:cs typeface="+mn-cs"/>
+        </a:defRPr>
+      </a:lvl8pPr>
+      <a:lvl9pPr marL="3886200" indent="-228600" algn="l" defTabSz="914400" rtl="0" eaLnBrk="1" latinLnBrk="0" hangingPunct="1">
+        <a:lnSpc>
+          <a:spcPct val="90000"/>
+        </a:lnSpc>
+        <a:spcBef>
+          <a:spcPts val="500"/>
+        </a:spcBef>
+        <a:buFont typeface="Arial" panose="020B0604020202020204" pitchFamily="34" charset="0"/>
+        <a:buChar char="•"/>
+        <a:defRPr sz="1800" kern="1200">
+          <a:solidFill>
+            <a:schemeClr val="tx1"/>
+          </a:solidFill>
+          <a:latin typeface="+mn-lt"/>
+          <a:ea typeface="+mn-ea"/>
+          <a:cs typeface="+mn-cs"/>
+        </a:defRPr>
+      </a:lvl9pPr>
+    </p:bodyStyle>
+    <p:otherStyle>
+      <a:defPPr>
+        <a:defRPr lang="es-ES"/>
+      </a:defPPr>
+      <a:lvl1pPr marL="0" algn="l" defTabSz="914400" rtl="0" eaLnBrk="1" latinLnBrk="0" hangingPunct="1">
+        <a:defRPr sz="1800" kern="1200">
+          <a:solidFill>
+            <a:schemeClr val="tx1"/>
+          </a:solidFill>
+          <a:latin typeface="+mn-lt"/>
+          <a:ea typeface="+mn-ea"/>
+          <a:cs typeface="+mn-cs"/>
+        </a:defRPr>
+      </a:lvl1pPr>
+      <a:lvl2pPr marL="457200" algn="l" defTabSz="914400" rtl="0" eaLnBrk="1" latinLnBrk="0" hangingPunct="1">
+        <a:defRPr sz="1800" kern="1200">
+          <a:solidFill>
+            <a:schemeClr val="tx1"/>
+          </a:solidFill>
+          <a:latin typeface="+mn-lt"/>
+          <a:ea typeface="+mn-ea"/>
+          <a:cs typeface="+mn-cs"/>
+        </a:defRPr>
+      </a:lvl2pPr>
+      <a:lvl3pPr marL="914400" algn="l" defTabSz="914400" rtl="0" eaLnBrk="1" latinLnBrk="0" hangingPunct="1">
+        <a:defRPr sz="1800" kern="1200">
+          <a:solidFill>
+            <a:schemeClr val="tx1"/>
+          </a:solidFill>
+          <a:latin typeface="+mn-lt"/>
+          <a:ea typeface="+mn-ea"/>
+          <a:cs typeface="+mn-cs"/>
+        </a:defRPr>
+      </a:lvl3pPr>
+      <a:lvl4pPr marL="1371600" algn="l" defTabSz="914400" rtl="0" eaLnBrk="1" latinLnBrk="0" hangingPunct="1">
+        <a:defRPr sz="1800" kern="1200">
+          <a:solidFill>
+            <a:schemeClr val="tx1"/>
+          </a:solidFill>
+          <a:latin typeface="+mn-lt"/>
+          <a:ea typeface="+mn-ea"/>
+          <a:cs typeface="+mn-cs"/>
+        </a:defRPr>
+      </a:lvl4pPr>
+      <a:lvl5pPr marL="1828800" algn="l" defTabSz="914400" rtl="0" eaLnBrk="1" latinLnBrk="0" hangingPunct="1">
+        <a:defRPr sz="1800" kern="1200">
+          <a:solidFill>
+            <a:schemeClr val="tx1"/>
+          </a:solidFill>
+          <a:latin typeface="+mn-lt"/>
+          <a:ea typeface="+mn-ea"/>
+          <a:cs typeface="+mn-cs"/>
+        </a:defRPr>
+      </a:lvl5pPr>
+      <a:lvl6pPr marL="2286000" algn="l" defTabSz="914400" rtl="0" eaLnBrk="1" latinLnBrk="0" hangingPunct="1">
+        <a:defRPr sz="1800" kern="1200">
+          <a:solidFill>
+            <a:schemeClr val="tx1"/>
+          </a:solidFill>
+          <a:latin typeface="+mn-lt"/>
+          <a:ea typeface="+mn-ea"/>
+          <a:cs typeface="+mn-cs"/>
+        </a:defRPr>
+      </a:lvl6pPr>
+      <a:lvl7pPr marL="2743200" algn="l" defTabSz="914400" rtl="0" eaLnBrk="1" latinLnBrk="0" hangingPunct="1">
+        <a:defRPr sz="1800" kern="1200">
+          <a:solidFill>
+            <a:schemeClr val="tx1"/>
+          </a:solidFill>
+          <a:latin typeface="+mn-lt"/>
+          <a:ea typeface="+mn-ea"/>
+          <a:cs typeface="+mn-cs"/>
+        </a:defRPr>
+      </a:lvl7pPr>
+      <a:lvl8pPr marL="3200400" algn="l" defTabSz="914400" rtl="0" eaLnBrk="1" latinLnBrk="0" hangingPunct="1">
+        <a:defRPr sz="1800" kern="1200">
+          <a:solidFill>
+            <a:schemeClr val="tx1"/>
+          </a:solidFill>
+          <a:latin typeface="+mn-lt"/>
+          <a:ea typeface="+mn-ea"/>
+          <a:cs typeface="+mn-cs"/>
+        </a:defRPr>
+      </a:lvl8pPr>
+      <a:lvl9pPr marL="3657600" algn="l" defTabSz="914400" rtl="0" eaLnBrk="1" latinLnBrk="0" hangingPunct="1">
+        <a:defRPr sz="1800" kern="1200">
+          <a:solidFill>
+            <a:schemeClr val="tx1"/>
+          </a:solidFill>
+          <a:latin typeface="+mn-lt"/>
+          <a:ea typeface="+mn-ea"/>
+          <a:cs typeface="+mn-cs"/>
+        </a:defRPr>
+      </a:lvl9pPr>
+    </p:otherStyle>
+  </p:txStyles>
 </p:sldMaster>
 </file>
 
 <file path=ppt/slides/slide1.xml><?xml version="1.0" encoding="utf-8"?>
-<p:sld xmlns:a="http://schemas.openxmlformats.org/drawingml/2006/main" xmlns:p="http://schemas.openxmlformats.org/presentationml/2006/main" xmlns:r="http://schemas.openxmlformats.org/officeDocument/2006/relationships" xmlns:p14="http://schemas.microsoft.com/office/powerpoint/2010/main" xmlns:p15="http://schemas.microsoft.com/office/powerpoint/2012/main" xmlns:mc="http://schemas.openxmlformats.org/markup-compatibility/2006">
+<p:sld xmlns:a="http://schemas.openxmlformats.org/drawingml/2006/main" xmlns:r="http://schemas.openxmlformats.org/officeDocument/2006/relationships" xmlns:p="http://schemas.openxmlformats.org/presentationml/2006/main">
+  <p:cSld>
+    <p:spTree>
+      <p:nvGrpSpPr>
+        <p:cNvPr id="1" name=""/>
+        <p:cNvGrpSpPr/>
+        <p:nvPr/>
+      </p:nvGrpSpPr>
+      <p:grpSpPr>
+        <a:xfrm>
+          <a:off x="0" y="0"/>
+          <a:ext cx="0" cy="0"/>
+          <a:chOff x="0" y="0"/>
+          <a:chExt cx="0" cy="0"/>
+        </a:xfrm>
+      </p:grpSpPr>
+      <p:sp>
+        <p:nvSpPr>
+          <p:cNvPr id="2" name="CuadroTexto 1">
+            <a:extLst>
+              <a:ext uri="{FF2B5EF4-FFF2-40B4-BE49-F238E27FC236}">
+                <a16:creationId xmlns:a16="http://schemas.microsoft.com/office/drawing/2014/main" id="{211093FA-CCB2-1FA1-57B5-5CE461F41298}"/>
+              </a:ext>
+            </a:extLst>
+          </p:cNvPr>
+          <p:cNvSpPr txBox="1"/>
+          <p:nvPr/>
+        </p:nvSpPr>
+        <p:spPr>
+          <a:xfrm>
+            <a:off x="1668965" y="2156251"/>
+            <a:ext cx="6177776" cy="830997"/>
+          </a:xfrm>
+          <a:prstGeom prst="rect">
+            <a:avLst/>
+          </a:prstGeom>
+          <a:noFill/>
+        </p:spPr>
+        <p:txBody>
+          <a:bodyPr wrap="square" rtlCol="0">
+            <a:spAutoFit/>
+          </a:bodyPr>
+          <a:lstStyle/>
+          <a:p>
+            <a:r>
+              <a:rPr lang="es-ES" sz="2400" b="1" dirty="0"/>
+              <a:t>CREACIÓN DE BASE DE DATOS RELACIONAL BASADA EN DATOS DE LA ESCUELA THE BRIDGE</a:t>
+            </a:r>
+          </a:p>
+        </p:txBody>
+      </p:sp>
+      <p:sp>
+        <p:nvSpPr>
+          <p:cNvPr id="3" name="CuadroTexto 2">
+            <a:extLst>
+              <a:ext uri="{FF2B5EF4-FFF2-40B4-BE49-F238E27FC236}">
+                <a16:creationId xmlns:a16="http://schemas.microsoft.com/office/drawing/2014/main" id="{4231414C-910E-0DC6-F0AB-EBE4ADC957FA}"/>
+              </a:ext>
+            </a:extLst>
+          </p:cNvPr>
+          <p:cNvSpPr txBox="1"/>
+          <p:nvPr/>
+        </p:nvSpPr>
+        <p:spPr>
+          <a:xfrm>
+            <a:off x="5642516" y="4237464"/>
+            <a:ext cx="3129776" cy="369332"/>
+          </a:xfrm>
+          <a:prstGeom prst="rect">
+            <a:avLst/>
+          </a:prstGeom>
+          <a:noFill/>
+        </p:spPr>
+        <p:txBody>
+          <a:bodyPr wrap="square" rtlCol="0">
+            <a:spAutoFit/>
+          </a:bodyPr>
+          <a:lstStyle/>
+          <a:p>
+            <a:r>
+              <a:rPr lang="es-ES" dirty="0"/>
+              <a:t>Roberto, Ainara, Iqra, Estibaliz</a:t>
+            </a:r>
+          </a:p>
+        </p:txBody>
+      </p:sp>
+    </p:spTree>
+    <p:extLst>
+      <p:ext uri="{BB962C8B-B14F-4D97-AF65-F5344CB8AC3E}">
+        <p14:creationId xmlns:p14="http://schemas.microsoft.com/office/powerpoint/2010/main" val="410469393"/>
+      </p:ext>
+    </p:extLst>
+  </p:cSld>
+  <p:clrMapOvr>
+    <a:masterClrMapping/>
+  </p:clrMapOvr>
+</p:sld>
+</file>
+
+<file path=ppt/slides/slide2.xml><?xml version="1.0" encoding="utf-8"?>
+<p:sld xmlns:a="http://schemas.openxmlformats.org/drawingml/2006/main" xmlns:r="http://schemas.openxmlformats.org/officeDocument/2006/relationships" xmlns:p="http://schemas.openxmlformats.org/presentationml/2006/main">
   <p:cSld>
     <p:bg>
       <p:bgPr>
         <a:solidFill>
           <a:srgbClr val="1C2B4A"/>
         </a:solidFill>
+        <a:effectLst/>
       </p:bgPr>
     </p:bg>
     <p:spTree>
@@ -1459,15 +1949,22 @@
           </a:ln>
         </p:spPr>
         <p:style>
-          <a:lnRef idx="0"/>
-          <a:fillRef idx="0"/>
-          <a:effectRef idx="0"/>
+          <a:lnRef idx="0">
+            <a:scrgbClr r="0" g="0" b="0"/>
+          </a:lnRef>
+          <a:fillRef idx="0">
+            <a:scrgbClr r="0" g="0" b="0"/>
+          </a:fillRef>
+          <a:effectRef idx="0">
+            <a:scrgbClr r="0" g="0" b="0"/>
+          </a:effectRef>
           <a:fontRef idx="minor"/>
         </p:style>
         <p:txBody>
           <a:bodyPr lIns="90000" tIns="45000" rIns="90000" bIns="45000" anchor="t">
             <a:noAutofit/>
           </a:bodyPr>
+          <a:lstStyle/>
           <a:p>
             <a:endParaRPr lang="es-ES" sz="1800" b="0" u="none" strike="noStrike">
               <a:solidFill>
@@ -1500,15 +1997,22 @@
           </a:ln>
         </p:spPr>
         <p:style>
-          <a:lnRef idx="0"/>
-          <a:fillRef idx="0"/>
-          <a:effectRef idx="0"/>
+          <a:lnRef idx="0">
+            <a:scrgbClr r="0" g="0" b="0"/>
+          </a:lnRef>
+          <a:fillRef idx="0">
+            <a:scrgbClr r="0" g="0" b="0"/>
+          </a:fillRef>
+          <a:effectRef idx="0">
+            <a:scrgbClr r="0" g="0" b="0"/>
+          </a:effectRef>
           <a:fontRef idx="minor"/>
         </p:style>
         <p:txBody>
           <a:bodyPr lIns="90000" tIns="45000" rIns="90000" bIns="45000" anchor="ctr">
             <a:noAutofit/>
           </a:bodyPr>
+          <a:lstStyle/>
           <a:p>
             <a:pPr defTabSz="914400">
               <a:lnSpc>
@@ -1519,7 +2023,7 @@
               </a:tabLst>
             </a:pPr>
             <a:r>
-              <a:rPr lang="en-US" sz="900" b="0" u="none" spc="201" strike="noStrike">
+              <a:rPr lang="en-US" sz="900" b="0" u="none" strike="noStrike" spc="201">
                 <a:solidFill>
                   <a:srgbClr val="8DA9C4"/>
                 </a:solidFill>
@@ -1549,8 +2053,8 @@
         </p:nvSpPr>
         <p:spPr>
           <a:xfrm>
-            <a:off x="384120" y="621720"/>
-            <a:ext cx="5119920" cy="730800"/>
+            <a:off x="384120" y="502776"/>
+            <a:ext cx="5119920" cy="441361"/>
           </a:xfrm>
           <a:prstGeom prst="rect">
             <a:avLst/>
@@ -1561,15 +2065,22 @@
           </a:ln>
         </p:spPr>
         <p:style>
-          <a:lnRef idx="0"/>
-          <a:fillRef idx="0"/>
-          <a:effectRef idx="0"/>
+          <a:lnRef idx="0">
+            <a:scrgbClr r="0" g="0" b="0"/>
+          </a:lnRef>
+          <a:fillRef idx="0">
+            <a:scrgbClr r="0" g="0" b="0"/>
+          </a:fillRef>
+          <a:effectRef idx="0">
+            <a:scrgbClr r="0" g="0" b="0"/>
+          </a:effectRef>
           <a:fontRef idx="minor"/>
         </p:style>
         <p:txBody>
           <a:bodyPr lIns="90000" tIns="45000" rIns="90000" bIns="45000" anchor="ctr">
             <a:noAutofit/>
           </a:bodyPr>
+          <a:lstStyle/>
           <a:p>
             <a:pPr defTabSz="914400">
               <a:lnSpc>
@@ -1580,7 +2091,7 @@
               </a:tabLst>
             </a:pPr>
             <a:r>
-              <a:rPr lang="en-US" sz="3600" b="1" u="none" strike="noStrike">
+              <a:rPr lang="en-US" sz="3600" b="1" u="none" strike="noStrike" dirty="0">
                 <a:solidFill>
                   <a:srgbClr val="FFFFFF"/>
                 </a:solidFill>
@@ -1589,9 +2100,45 @@
                 <a:latin typeface="Calibri"/>
                 <a:ea typeface="Calibri"/>
               </a:rPr>
-              <a:t>Modelo Entidad–Relación</a:t>
-            </a:r>
-            <a:endParaRPr lang="es-ES" sz="3600" b="0" u="none" strike="noStrike">
+              <a:t>Modelo </a:t>
+            </a:r>
+            <a:r>
+              <a:rPr lang="en-US" sz="3600" b="1" u="none" strike="noStrike" dirty="0" err="1">
+                <a:solidFill>
+                  <a:srgbClr val="FFFFFF"/>
+                </a:solidFill>
+                <a:effectLst/>
+                <a:uFillTx/>
+                <a:latin typeface="Calibri"/>
+                <a:ea typeface="Calibri"/>
+              </a:rPr>
+              <a:t>Entidad</a:t>
+            </a:r>
+            <a:r>
+              <a:rPr lang="en-US" sz="3600" b="1" u="none" strike="noStrike" dirty="0">
+                <a:solidFill>
+                  <a:srgbClr val="FFFFFF"/>
+                </a:solidFill>
+                <a:effectLst/>
+                <a:uFillTx/>
+                <a:latin typeface="Calibri"/>
+                <a:ea typeface="Calibri"/>
+              </a:rPr>
+              <a:t>–</a:t>
+            </a:r>
+            <a:r>
+              <a:rPr lang="en-US" sz="3600" b="1" u="none" strike="noStrike" dirty="0" err="1">
+                <a:solidFill>
+                  <a:srgbClr val="FFFFFF"/>
+                </a:solidFill>
+                <a:effectLst/>
+                <a:uFillTx/>
+                <a:latin typeface="Calibri"/>
+                <a:ea typeface="Calibri"/>
+              </a:rPr>
+              <a:t>Relación</a:t>
+            </a:r>
+            <a:endParaRPr lang="es-ES" sz="3600" b="0" u="none" strike="noStrike" dirty="0">
               <a:solidFill>
                 <a:srgbClr val="FFFFFF"/>
               </a:solidFill>
@@ -1602,2568 +2149,59 @@
           </a:p>
         </p:txBody>
       </p:sp>
-      <p:sp>
-        <p:nvSpPr>
-          <p:cNvPr id="13" name="Text 3"/>
-          <p:cNvSpPr/>
-          <p:nvPr/>
-        </p:nvSpPr>
-        <p:spPr>
-          <a:xfrm>
-            <a:off x="384120" y="1463040"/>
-            <a:ext cx="4937040" cy="319320"/>
-          </a:xfrm>
-          <a:prstGeom prst="rect">
-            <a:avLst/>
-          </a:prstGeom>
-          <a:noFill/>
-          <a:ln w="0">
-            <a:noFill/>
-          </a:ln>
-        </p:spPr>
-        <p:style>
-          <a:lnRef idx="0"/>
-          <a:fillRef idx="0"/>
-          <a:effectRef idx="0"/>
-          <a:fontRef idx="minor"/>
-        </p:style>
-        <p:txBody>
-          <a:bodyPr lIns="90000" tIns="45000" rIns="90000" bIns="45000" anchor="ctr">
-            <a:noAutofit/>
-          </a:bodyPr>
-          <a:p>
-            <a:pPr defTabSz="914400">
-              <a:lnSpc>
-                <a:spcPct val="100000"/>
-              </a:lnSpc>
-              <a:tabLst>
-                <a:tab pos="0" algn="l"/>
-              </a:tabLst>
-            </a:pPr>
-            <a:r>
-              <a:rPr lang="en-US" sz="1300" b="1" u="none" strike="noStrike">
-                <a:solidFill>
-                  <a:srgbClr val="4EADD4"/>
-                </a:solidFill>
-                <a:effectLst/>
-                <a:uFillTx/>
-                <a:latin typeface="Calibri"/>
-                <a:ea typeface="Calibri"/>
-              </a:rPr>
-              <a:t>¿Qué es el modelo E/R?</a:t>
-            </a:r>
-            <a:endParaRPr lang="es-ES" sz="1300" b="0" u="none" strike="noStrike">
-              <a:solidFill>
-                <a:srgbClr val="FFFFFF"/>
-              </a:solidFill>
-              <a:effectLst/>
-              <a:uFillTx/>
-              <a:latin typeface="Arial"/>
-            </a:endParaRPr>
-          </a:p>
-        </p:txBody>
-      </p:sp>
-      <p:sp>
-        <p:nvSpPr>
-          <p:cNvPr id="14" name="Text 4"/>
-          <p:cNvSpPr/>
-          <p:nvPr/>
-        </p:nvSpPr>
-        <p:spPr>
-          <a:xfrm>
-            <a:off x="384120" y="1810440"/>
-            <a:ext cx="4754160" cy="776520"/>
-          </a:xfrm>
-          <a:prstGeom prst="rect">
-            <a:avLst/>
-          </a:prstGeom>
-          <a:noFill/>
-          <a:ln w="0">
-            <a:noFill/>
-          </a:ln>
-        </p:spPr>
-        <p:style>
-          <a:lnRef idx="0"/>
-          <a:fillRef idx="0"/>
-          <a:effectRef idx="0"/>
-          <a:fontRef idx="minor"/>
-        </p:style>
-        <p:txBody>
-          <a:bodyPr lIns="90000" tIns="45000" rIns="90000" bIns="45000" anchor="ctr">
-            <a:noAutofit/>
-          </a:bodyPr>
-          <a:p>
-            <a:pPr defTabSz="914400">
-              <a:lnSpc>
-                <a:spcPct val="100000"/>
-              </a:lnSpc>
-              <a:tabLst>
-                <a:tab pos="0" algn="l"/>
-              </a:tabLst>
-            </a:pPr>
-            <a:r>
-              <a:rPr lang="en-US" sz="1200" b="0" u="none" strike="noStrike">
-                <a:solidFill>
-                  <a:srgbClr val="F0F4F8"/>
-                </a:solidFill>
-                <a:effectLst/>
-                <a:uFillTx/>
-                <a:latin typeface="Calibri"/>
-                <a:ea typeface="Calibri"/>
-              </a:rPr>
-              <a:t>Describe qué existe en el sistema y cómo se relaciona, sin entrar en detalles técnicos. No habla de tablas ni SQL — solo de entidades y relaciones. Las relaciones N:M se representan con rombos, sin tabla puente.</a:t>
-            </a:r>
-            <a:endParaRPr lang="es-ES" sz="1200" b="0" u="none" strike="noStrike">
-              <a:solidFill>
-                <a:srgbClr val="FFFFFF"/>
-              </a:solidFill>
-              <a:effectLst/>
-              <a:uFillTx/>
-              <a:latin typeface="Arial"/>
-            </a:endParaRPr>
-          </a:p>
-        </p:txBody>
-      </p:sp>
-      <p:sp>
-        <p:nvSpPr>
-          <p:cNvPr id="15" name="Shape 5"/>
-          <p:cNvSpPr/>
-          <p:nvPr/>
-        </p:nvSpPr>
-        <p:spPr>
-          <a:xfrm>
-            <a:off x="384120" y="2724840"/>
-            <a:ext cx="8375040" cy="291960"/>
-          </a:xfrm>
-          <a:prstGeom prst="rect">
-            <a:avLst/>
-          </a:prstGeom>
-          <a:solidFill>
-            <a:srgbClr val="2D6A9F"/>
-          </a:solidFill>
-          <a:ln w="12700">
-            <a:solidFill>
-              <a:srgbClr val="2D6A9F"/>
-            </a:solidFill>
-            <a:round/>
-          </a:ln>
-        </p:spPr>
-        <p:style>
-          <a:lnRef idx="0"/>
-          <a:fillRef idx="0"/>
-          <a:effectRef idx="0"/>
-          <a:fontRef idx="minor"/>
-        </p:style>
-        <p:txBody>
-          <a:bodyPr lIns="90000" tIns="45000" rIns="90000" bIns="45000" anchor="t">
-            <a:noAutofit/>
-          </a:bodyPr>
-          <a:p>
-            <a:endParaRPr lang="es-ES" sz="1800" b="0" u="none" strike="noStrike">
-              <a:solidFill>
-                <a:srgbClr val="FFFFFF"/>
-              </a:solidFill>
-              <a:effectLst/>
-              <a:uFillTx/>
-              <a:latin typeface="Arial"/>
-            </a:endParaRPr>
-          </a:p>
-        </p:txBody>
-      </p:sp>
-      <p:sp>
-        <p:nvSpPr>
-          <p:cNvPr id="16" name="Text 6"/>
-          <p:cNvSpPr/>
-          <p:nvPr/>
-        </p:nvSpPr>
-        <p:spPr>
-          <a:xfrm>
-            <a:off x="475560" y="2724840"/>
-            <a:ext cx="8228880" cy="291960"/>
-          </a:xfrm>
-          <a:prstGeom prst="rect">
-            <a:avLst/>
-          </a:prstGeom>
-          <a:noFill/>
-          <a:ln w="0">
-            <a:noFill/>
-          </a:ln>
-        </p:spPr>
-        <p:style>
-          <a:lnRef idx="0"/>
-          <a:fillRef idx="0"/>
-          <a:effectRef idx="0"/>
-          <a:fontRef idx="minor"/>
-        </p:style>
-        <p:txBody>
-          <a:bodyPr lIns="90000" tIns="45000" rIns="90000" bIns="45000" anchor="ctr">
-            <a:noAutofit/>
-          </a:bodyPr>
-          <a:p>
-            <a:pPr defTabSz="914400">
-              <a:lnSpc>
-                <a:spcPct val="100000"/>
-              </a:lnSpc>
-              <a:tabLst>
-                <a:tab pos="0" algn="l"/>
-              </a:tabLst>
-            </a:pPr>
-            <a:r>
-              <a:rPr lang="en-US" sz="1000" b="1" u="none" strike="noStrike">
-                <a:solidFill>
-                  <a:srgbClr val="FFFFFF"/>
-                </a:solidFill>
-                <a:effectLst/>
-                <a:uFillTx/>
-                <a:latin typeface="Calibri"/>
-                <a:ea typeface="Calibri"/>
-              </a:rPr>
-              <a:t>Relación</a:t>
-            </a:r>
-            <a:r>
-              <a:rPr lang="en-US" sz="1000" b="1" u="none" strike="noStrike">
-                <a:solidFill>
-                  <a:srgbClr val="FFFFFF"/>
-                </a:solidFill>
-                <a:effectLst/>
-                <a:uFillTx/>
-                <a:latin typeface="Calibri"/>
-                <a:ea typeface="Calibri"/>
-              </a:rPr>
-              <a:t>	</a:t>
-            </a:r>
-            <a:r>
-              <a:rPr lang="en-US" sz="1000" b="1" u="none" strike="noStrike">
-                <a:solidFill>
-                  <a:srgbClr val="FFFFFF"/>
-                </a:solidFill>
-                <a:effectLst/>
-                <a:uFillTx/>
-                <a:latin typeface="Calibri"/>
-                <a:ea typeface="Calibri"/>
-              </a:rPr>
-              <a:t>	</a:t>
-            </a:r>
-            <a:r>
-              <a:rPr lang="en-US" sz="1000" b="1" u="none" strike="noStrike">
-                <a:solidFill>
-                  <a:srgbClr val="FFFFFF"/>
-                </a:solidFill>
-                <a:effectLst/>
-                <a:uFillTx/>
-                <a:latin typeface="Calibri"/>
-                <a:ea typeface="Calibri"/>
-              </a:rPr>
-              <a:t>Cardinalidad</a:t>
-            </a:r>
-            <a:r>
-              <a:rPr lang="en-US" sz="1000" b="1" u="none" strike="noStrike">
-                <a:solidFill>
-                  <a:srgbClr val="FFFFFF"/>
-                </a:solidFill>
-                <a:effectLst/>
-                <a:uFillTx/>
-                <a:latin typeface="Calibri"/>
-                <a:ea typeface="Calibri"/>
-              </a:rPr>
-              <a:t>	</a:t>
-            </a:r>
-            <a:r>
-              <a:rPr lang="en-US" sz="1000" b="1" u="none" strike="noStrike">
-                <a:solidFill>
-                  <a:srgbClr val="FFFFFF"/>
-                </a:solidFill>
-                <a:effectLst/>
-                <a:uFillTx/>
-                <a:latin typeface="Calibri"/>
-                <a:ea typeface="Calibri"/>
-              </a:rPr>
-              <a:t>	</a:t>
-            </a:r>
-            <a:r>
-              <a:rPr lang="en-US" sz="1000" b="1" u="none" strike="noStrike">
-                <a:solidFill>
-                  <a:srgbClr val="FFFFFF"/>
-                </a:solidFill>
-                <a:effectLst/>
-                <a:uFillTx/>
-                <a:latin typeface="Calibri"/>
-                <a:ea typeface="Calibri"/>
-              </a:rPr>
-              <a:t>	</a:t>
-            </a:r>
-            <a:r>
-              <a:rPr lang="en-US" sz="1000" b="1" u="none" strike="noStrike">
-                <a:solidFill>
-                  <a:srgbClr val="FFFFFF"/>
-                </a:solidFill>
-                <a:effectLst/>
-                <a:uFillTx/>
-                <a:latin typeface="Calibri"/>
-                <a:ea typeface="Calibri"/>
-              </a:rPr>
-              <a:t>	</a:t>
-            </a:r>
-            <a:r>
-              <a:rPr lang="en-US" sz="1000" b="1" u="none" strike="noStrike">
-                <a:solidFill>
-                  <a:srgbClr val="FFFFFF"/>
-                </a:solidFill>
-                <a:effectLst/>
-                <a:uFillTx/>
-                <a:latin typeface="Calibri"/>
-                <a:ea typeface="Calibri"/>
-              </a:rPr>
-              <a:t>Explicación</a:t>
-            </a:r>
-            <a:endParaRPr lang="es-ES" sz="1000" b="0" u="none" strike="noStrike">
-              <a:solidFill>
-                <a:srgbClr val="FFFFFF"/>
-              </a:solidFill>
-              <a:effectLst/>
-              <a:uFillTx/>
-              <a:latin typeface="Arial"/>
-            </a:endParaRPr>
-          </a:p>
-        </p:txBody>
-      </p:sp>
-      <p:sp>
-        <p:nvSpPr>
-          <p:cNvPr id="17" name="Shape 7"/>
-          <p:cNvSpPr/>
-          <p:nvPr/>
-        </p:nvSpPr>
-        <p:spPr>
-          <a:xfrm>
-            <a:off x="384120" y="3017520"/>
-            <a:ext cx="8375040" cy="250920"/>
-          </a:xfrm>
-          <a:prstGeom prst="rect">
-            <a:avLst/>
-          </a:prstGeom>
-          <a:solidFill>
-            <a:srgbClr val="1E3354"/>
-          </a:solidFill>
-          <a:ln w="12700">
-            <a:solidFill>
-              <a:srgbClr val="1E3354"/>
-            </a:solidFill>
-            <a:round/>
-          </a:ln>
-        </p:spPr>
-        <p:style>
-          <a:lnRef idx="0"/>
-          <a:fillRef idx="0"/>
-          <a:effectRef idx="0"/>
-          <a:fontRef idx="minor"/>
-        </p:style>
-        <p:txBody>
-          <a:bodyPr lIns="90000" tIns="45000" rIns="90000" bIns="45000" anchor="t">
-            <a:noAutofit/>
-          </a:bodyPr>
-          <a:p>
-            <a:endParaRPr lang="es-ES" sz="1800" b="0" u="none" strike="noStrike">
-              <a:solidFill>
-                <a:srgbClr val="FFFFFF"/>
-              </a:solidFill>
-              <a:effectLst/>
-              <a:uFillTx/>
-              <a:latin typeface="Arial"/>
-            </a:endParaRPr>
-          </a:p>
-        </p:txBody>
-      </p:sp>
-      <p:sp>
-        <p:nvSpPr>
-          <p:cNvPr id="18" name="Text 8"/>
-          <p:cNvSpPr/>
-          <p:nvPr/>
-        </p:nvSpPr>
-        <p:spPr>
-          <a:xfrm>
-            <a:off x="475560" y="3026520"/>
-            <a:ext cx="2833920" cy="236880"/>
-          </a:xfrm>
-          <a:prstGeom prst="rect">
-            <a:avLst/>
-          </a:prstGeom>
-          <a:noFill/>
-          <a:ln w="0">
-            <a:noFill/>
-          </a:ln>
-        </p:spPr>
-        <p:style>
-          <a:lnRef idx="0"/>
-          <a:fillRef idx="0"/>
-          <a:effectRef idx="0"/>
-          <a:fontRef idx="minor"/>
-        </p:style>
-        <p:txBody>
-          <a:bodyPr lIns="90000" tIns="45000" rIns="90000" bIns="45000" anchor="ctr">
-            <a:noAutofit/>
-          </a:bodyPr>
-          <a:p>
-            <a:pPr defTabSz="914400">
-              <a:lnSpc>
-                <a:spcPct val="100000"/>
-              </a:lnSpc>
-              <a:tabLst>
-                <a:tab pos="0" algn="l"/>
-              </a:tabLst>
-            </a:pPr>
-            <a:r>
-              <a:rPr lang="en-US" sz="950" b="0" u="none" strike="noStrike">
-                <a:solidFill>
-                  <a:srgbClr val="F0F4F8"/>
-                </a:solidFill>
-                <a:effectLst/>
-                <a:uFillTx/>
-                <a:latin typeface="Calibri"/>
-                <a:ea typeface="Calibri"/>
-              </a:rPr>
-              <a:t>Sedes → Promociones</a:t>
-            </a:r>
-            <a:endParaRPr lang="es-ES" sz="950" b="0" u="none" strike="noStrike">
-              <a:solidFill>
-                <a:srgbClr val="FFFFFF"/>
-              </a:solidFill>
-              <a:effectLst/>
-              <a:uFillTx/>
-              <a:latin typeface="Arial"/>
-            </a:endParaRPr>
-          </a:p>
-        </p:txBody>
-      </p:sp>
-      <p:sp>
-        <p:nvSpPr>
-          <p:cNvPr id="19" name="Shape 9"/>
-          <p:cNvSpPr/>
-          <p:nvPr/>
-        </p:nvSpPr>
-        <p:spPr>
-          <a:xfrm>
-            <a:off x="3401640" y="3063240"/>
-            <a:ext cx="657720" cy="173160"/>
-          </a:xfrm>
-          <a:prstGeom prst="roundRect">
-            <a:avLst>
-              <a:gd name="adj" fmla="val 26316"/>
-            </a:avLst>
-          </a:prstGeom>
-          <a:solidFill>
-            <a:srgbClr val="4EADD4"/>
-          </a:solidFill>
-          <a:ln w="12700">
-            <a:solidFill>
-              <a:srgbClr val="4EADD4"/>
-            </a:solidFill>
-            <a:round/>
-          </a:ln>
-        </p:spPr>
-        <p:style>
-          <a:lnRef idx="0"/>
-          <a:fillRef idx="0"/>
-          <a:effectRef idx="0"/>
-          <a:fontRef idx="minor"/>
-        </p:style>
-        <p:txBody>
-          <a:bodyPr lIns="90000" tIns="45000" rIns="90000" bIns="45000" anchor="t">
-            <a:noAutofit/>
-          </a:bodyPr>
-          <a:p>
-            <a:endParaRPr lang="es-ES" sz="1800" b="0" u="none" strike="noStrike">
-              <a:solidFill>
-                <a:srgbClr val="000000"/>
-              </a:solidFill>
-              <a:effectLst/>
-              <a:uFillTx/>
-              <a:latin typeface="Arial"/>
-            </a:endParaRPr>
-          </a:p>
-        </p:txBody>
-      </p:sp>
-      <p:sp>
-        <p:nvSpPr>
-          <p:cNvPr id="20" name="Text 10"/>
-          <p:cNvSpPr/>
-          <p:nvPr/>
-        </p:nvSpPr>
-        <p:spPr>
-          <a:xfrm>
-            <a:off x="3401640" y="3054240"/>
-            <a:ext cx="657720" cy="200520"/>
-          </a:xfrm>
-          <a:prstGeom prst="rect">
-            <a:avLst/>
-          </a:prstGeom>
-          <a:noFill/>
-          <a:ln w="0">
-            <a:noFill/>
-          </a:ln>
-        </p:spPr>
-        <p:style>
-          <a:lnRef idx="0"/>
-          <a:fillRef idx="0"/>
-          <a:effectRef idx="0"/>
-          <a:fontRef idx="minor"/>
-        </p:style>
-        <p:txBody>
-          <a:bodyPr lIns="90000" tIns="45000" rIns="90000" bIns="45000" anchor="ctr">
-            <a:noAutofit/>
-          </a:bodyPr>
-          <a:p>
-            <a:pPr algn="ctr" defTabSz="914400">
-              <a:lnSpc>
-                <a:spcPct val="100000"/>
-              </a:lnSpc>
-              <a:tabLst>
-                <a:tab pos="0" algn="l"/>
-              </a:tabLst>
-            </a:pPr>
-            <a:r>
-              <a:rPr lang="en-US" sz="800" b="1" u="none" strike="noStrike">
-                <a:solidFill>
-                  <a:srgbClr val="FFFFFF"/>
-                </a:solidFill>
-                <a:effectLst/>
-                <a:uFillTx/>
-                <a:latin typeface="Calibri"/>
-                <a:ea typeface="Calibri"/>
-              </a:rPr>
-              <a:t>1:N</a:t>
-            </a:r>
-            <a:endParaRPr lang="es-ES" sz="800" b="0" u="none" strike="noStrike">
-              <a:solidFill>
-                <a:srgbClr val="FFFFFF"/>
-              </a:solidFill>
-              <a:effectLst/>
-              <a:uFillTx/>
-              <a:latin typeface="Arial"/>
-            </a:endParaRPr>
-          </a:p>
-        </p:txBody>
-      </p:sp>
-      <p:sp>
-        <p:nvSpPr>
-          <p:cNvPr id="21" name="Text 11"/>
-          <p:cNvSpPr/>
-          <p:nvPr/>
-        </p:nvSpPr>
-        <p:spPr>
-          <a:xfrm>
-            <a:off x="4169520" y="3026520"/>
-            <a:ext cx="4525560" cy="236880"/>
-          </a:xfrm>
-          <a:prstGeom prst="rect">
-            <a:avLst/>
-          </a:prstGeom>
-          <a:noFill/>
-          <a:ln w="0">
-            <a:noFill/>
-          </a:ln>
-        </p:spPr>
-        <p:style>
-          <a:lnRef idx="0"/>
-          <a:fillRef idx="0"/>
-          <a:effectRef idx="0"/>
-          <a:fontRef idx="minor"/>
-        </p:style>
-        <p:txBody>
-          <a:bodyPr lIns="90000" tIns="45000" rIns="90000" bIns="45000" anchor="ctr">
-            <a:noAutofit/>
-          </a:bodyPr>
-          <a:p>
-            <a:pPr defTabSz="914400">
-              <a:lnSpc>
-                <a:spcPct val="100000"/>
-              </a:lnSpc>
-              <a:tabLst>
-                <a:tab pos="0" algn="l"/>
-              </a:tabLst>
-            </a:pPr>
-            <a:r>
-              <a:rPr lang="en-US" sz="950" b="0" u="none" strike="noStrike">
-                <a:solidFill>
-                  <a:srgbClr val="8DA9C4"/>
-                </a:solidFill>
-                <a:effectLst/>
-                <a:uFillTx/>
-                <a:latin typeface="Calibri"/>
-                <a:ea typeface="Calibri"/>
-              </a:rPr>
-              <a:t>Una sede alberga muchas promociones</a:t>
-            </a:r>
-            <a:endParaRPr lang="es-ES" sz="950" b="0" u="none" strike="noStrike">
-              <a:solidFill>
-                <a:srgbClr val="FFFFFF"/>
-              </a:solidFill>
-              <a:effectLst/>
-              <a:uFillTx/>
-              <a:latin typeface="Arial"/>
-            </a:endParaRPr>
-          </a:p>
-        </p:txBody>
-      </p:sp>
-      <p:sp>
-        <p:nvSpPr>
-          <p:cNvPr id="22" name="Shape 12"/>
-          <p:cNvSpPr/>
-          <p:nvPr/>
-        </p:nvSpPr>
-        <p:spPr>
-          <a:xfrm>
-            <a:off x="384120" y="3269160"/>
-            <a:ext cx="8375040" cy="250920"/>
-          </a:xfrm>
-          <a:prstGeom prst="rect">
-            <a:avLst/>
-          </a:prstGeom>
-          <a:solidFill>
-            <a:srgbClr val="223060"/>
-          </a:solidFill>
-          <a:ln w="12700">
-            <a:solidFill>
-              <a:srgbClr val="223060"/>
-            </a:solidFill>
-            <a:round/>
-          </a:ln>
-        </p:spPr>
-        <p:style>
-          <a:lnRef idx="0"/>
-          <a:fillRef idx="0"/>
-          <a:effectRef idx="0"/>
-          <a:fontRef idx="minor"/>
-        </p:style>
-        <p:txBody>
-          <a:bodyPr lIns="90000" tIns="45000" rIns="90000" bIns="45000" anchor="t">
-            <a:noAutofit/>
-          </a:bodyPr>
-          <a:p>
-            <a:endParaRPr lang="es-ES" sz="1800" b="0" u="none" strike="noStrike">
-              <a:solidFill>
-                <a:srgbClr val="FFFFFF"/>
-              </a:solidFill>
-              <a:effectLst/>
-              <a:uFillTx/>
-              <a:latin typeface="Arial"/>
-            </a:endParaRPr>
-          </a:p>
-        </p:txBody>
-      </p:sp>
-      <p:sp>
-        <p:nvSpPr>
-          <p:cNvPr id="23" name="Text 13"/>
-          <p:cNvSpPr/>
-          <p:nvPr/>
-        </p:nvSpPr>
-        <p:spPr>
-          <a:xfrm>
-            <a:off x="475560" y="3278160"/>
-            <a:ext cx="2833920" cy="236880"/>
-          </a:xfrm>
-          <a:prstGeom prst="rect">
-            <a:avLst/>
-          </a:prstGeom>
-          <a:noFill/>
-          <a:ln w="0">
-            <a:noFill/>
-          </a:ln>
-        </p:spPr>
-        <p:style>
-          <a:lnRef idx="0"/>
-          <a:fillRef idx="0"/>
-          <a:effectRef idx="0"/>
-          <a:fontRef idx="minor"/>
-        </p:style>
-        <p:txBody>
-          <a:bodyPr lIns="90000" tIns="45000" rIns="90000" bIns="45000" anchor="ctr">
-            <a:noAutofit/>
-          </a:bodyPr>
-          <a:p>
-            <a:pPr defTabSz="914400">
-              <a:lnSpc>
-                <a:spcPct val="100000"/>
-              </a:lnSpc>
-              <a:tabLst>
-                <a:tab pos="0" algn="l"/>
-              </a:tabLst>
-            </a:pPr>
-            <a:r>
-              <a:rPr lang="en-US" sz="950" b="0" u="none" strike="noStrike">
-                <a:solidFill>
-                  <a:srgbClr val="F0F4F8"/>
-                </a:solidFill>
-                <a:effectLst/>
-                <a:uFillTx/>
-                <a:latin typeface="Calibri"/>
-                <a:ea typeface="Calibri"/>
-              </a:rPr>
-              <a:t>Modalidades → Promociones</a:t>
-            </a:r>
-            <a:endParaRPr lang="es-ES" sz="950" b="0" u="none" strike="noStrike">
-              <a:solidFill>
-                <a:srgbClr val="FFFFFF"/>
-              </a:solidFill>
-              <a:effectLst/>
-              <a:uFillTx/>
-              <a:latin typeface="Arial"/>
-            </a:endParaRPr>
-          </a:p>
-        </p:txBody>
-      </p:sp>
-      <p:sp>
-        <p:nvSpPr>
-          <p:cNvPr id="24" name="Shape 14"/>
-          <p:cNvSpPr/>
-          <p:nvPr/>
-        </p:nvSpPr>
-        <p:spPr>
-          <a:xfrm>
-            <a:off x="3401640" y="3314880"/>
-            <a:ext cx="657720" cy="173160"/>
-          </a:xfrm>
-          <a:prstGeom prst="roundRect">
-            <a:avLst>
-              <a:gd name="adj" fmla="val 26316"/>
-            </a:avLst>
-          </a:prstGeom>
-          <a:solidFill>
-            <a:srgbClr val="4EADD4"/>
-          </a:solidFill>
-          <a:ln w="12700">
-            <a:solidFill>
-              <a:srgbClr val="4EADD4"/>
-            </a:solidFill>
-            <a:round/>
-          </a:ln>
-        </p:spPr>
-        <p:style>
-          <a:lnRef idx="0"/>
-          <a:fillRef idx="0"/>
-          <a:effectRef idx="0"/>
-          <a:fontRef idx="minor"/>
-        </p:style>
-        <p:txBody>
-          <a:bodyPr lIns="90000" tIns="45000" rIns="90000" bIns="45000" anchor="t">
-            <a:noAutofit/>
-          </a:bodyPr>
-          <a:p>
-            <a:endParaRPr lang="es-ES" sz="1800" b="0" u="none" strike="noStrike">
-              <a:solidFill>
-                <a:srgbClr val="000000"/>
-              </a:solidFill>
-              <a:effectLst/>
-              <a:uFillTx/>
-              <a:latin typeface="Arial"/>
-            </a:endParaRPr>
-          </a:p>
-        </p:txBody>
-      </p:sp>
-      <p:sp>
-        <p:nvSpPr>
-          <p:cNvPr id="25" name="Text 15"/>
-          <p:cNvSpPr/>
-          <p:nvPr/>
-        </p:nvSpPr>
-        <p:spPr>
-          <a:xfrm>
-            <a:off x="3401640" y="3305520"/>
-            <a:ext cx="657720" cy="200520"/>
-          </a:xfrm>
-          <a:prstGeom prst="rect">
-            <a:avLst/>
-          </a:prstGeom>
-          <a:noFill/>
-          <a:ln w="0">
-            <a:noFill/>
-          </a:ln>
-        </p:spPr>
-        <p:style>
-          <a:lnRef idx="0"/>
-          <a:fillRef idx="0"/>
-          <a:effectRef idx="0"/>
-          <a:fontRef idx="minor"/>
-        </p:style>
-        <p:txBody>
-          <a:bodyPr lIns="90000" tIns="45000" rIns="90000" bIns="45000" anchor="ctr">
-            <a:noAutofit/>
-          </a:bodyPr>
-          <a:p>
-            <a:pPr algn="ctr" defTabSz="914400">
-              <a:lnSpc>
-                <a:spcPct val="100000"/>
-              </a:lnSpc>
-              <a:tabLst>
-                <a:tab pos="0" algn="l"/>
-              </a:tabLst>
-            </a:pPr>
-            <a:r>
-              <a:rPr lang="en-US" sz="800" b="1" u="none" strike="noStrike">
-                <a:solidFill>
-                  <a:srgbClr val="FFFFFF"/>
-                </a:solidFill>
-                <a:effectLst/>
-                <a:uFillTx/>
-                <a:latin typeface="Calibri"/>
-                <a:ea typeface="Calibri"/>
-              </a:rPr>
-              <a:t>1:N</a:t>
-            </a:r>
-            <a:endParaRPr lang="es-ES" sz="800" b="0" u="none" strike="noStrike">
-              <a:solidFill>
-                <a:srgbClr val="FFFFFF"/>
-              </a:solidFill>
-              <a:effectLst/>
-              <a:uFillTx/>
-              <a:latin typeface="Arial"/>
-            </a:endParaRPr>
-          </a:p>
-        </p:txBody>
-      </p:sp>
-      <p:sp>
-        <p:nvSpPr>
-          <p:cNvPr id="26" name="Text 16"/>
-          <p:cNvSpPr/>
-          <p:nvPr/>
-        </p:nvSpPr>
-        <p:spPr>
-          <a:xfrm>
-            <a:off x="4169520" y="3278160"/>
-            <a:ext cx="4525560" cy="236880"/>
-          </a:xfrm>
-          <a:prstGeom prst="rect">
-            <a:avLst/>
-          </a:prstGeom>
-          <a:noFill/>
-          <a:ln w="0">
-            <a:noFill/>
-          </a:ln>
-        </p:spPr>
-        <p:style>
-          <a:lnRef idx="0"/>
-          <a:fillRef idx="0"/>
-          <a:effectRef idx="0"/>
-          <a:fontRef idx="minor"/>
-        </p:style>
-        <p:txBody>
-          <a:bodyPr lIns="90000" tIns="45000" rIns="90000" bIns="45000" anchor="ctr">
-            <a:noAutofit/>
-          </a:bodyPr>
-          <a:p>
-            <a:pPr defTabSz="914400">
-              <a:lnSpc>
-                <a:spcPct val="100000"/>
-              </a:lnSpc>
-              <a:tabLst>
-                <a:tab pos="0" algn="l"/>
-              </a:tabLst>
-            </a:pPr>
-            <a:r>
-              <a:rPr lang="en-US" sz="950" b="0" u="none" strike="noStrike">
-                <a:solidFill>
-                  <a:srgbClr val="8DA9C4"/>
-                </a:solidFill>
-                <a:effectLst/>
-                <a:uFillTx/>
-                <a:latin typeface="Calibri"/>
-                <a:ea typeface="Calibri"/>
-              </a:rPr>
-              <a:t>Una modalidad clasifica muchas promociones</a:t>
-            </a:r>
-            <a:endParaRPr lang="es-ES" sz="950" b="0" u="none" strike="noStrike">
-              <a:solidFill>
-                <a:srgbClr val="FFFFFF"/>
-              </a:solidFill>
-              <a:effectLst/>
-              <a:uFillTx/>
-              <a:latin typeface="Arial"/>
-            </a:endParaRPr>
-          </a:p>
-        </p:txBody>
-      </p:sp>
-      <p:sp>
-        <p:nvSpPr>
-          <p:cNvPr id="27" name="Shape 17"/>
-          <p:cNvSpPr/>
-          <p:nvPr/>
-        </p:nvSpPr>
-        <p:spPr>
-          <a:xfrm>
-            <a:off x="384120" y="3520440"/>
-            <a:ext cx="8375040" cy="250920"/>
-          </a:xfrm>
-          <a:prstGeom prst="rect">
-            <a:avLst/>
-          </a:prstGeom>
-          <a:solidFill>
-            <a:srgbClr val="1E3354"/>
-          </a:solidFill>
-          <a:ln w="12700">
-            <a:solidFill>
-              <a:srgbClr val="1E3354"/>
-            </a:solidFill>
-            <a:round/>
-          </a:ln>
-        </p:spPr>
-        <p:style>
-          <a:lnRef idx="0"/>
-          <a:fillRef idx="0"/>
-          <a:effectRef idx="0"/>
-          <a:fontRef idx="minor"/>
-        </p:style>
-        <p:txBody>
-          <a:bodyPr lIns="90000" tIns="45000" rIns="90000" bIns="45000" anchor="t">
-            <a:noAutofit/>
-          </a:bodyPr>
-          <a:p>
-            <a:endParaRPr lang="es-ES" sz="1800" b="0" u="none" strike="noStrike">
-              <a:solidFill>
-                <a:srgbClr val="FFFFFF"/>
-              </a:solidFill>
-              <a:effectLst/>
-              <a:uFillTx/>
-              <a:latin typeface="Arial"/>
-            </a:endParaRPr>
-          </a:p>
-        </p:txBody>
-      </p:sp>
-      <p:sp>
-        <p:nvSpPr>
-          <p:cNvPr id="28" name="Text 18"/>
-          <p:cNvSpPr/>
-          <p:nvPr/>
-        </p:nvSpPr>
-        <p:spPr>
-          <a:xfrm>
-            <a:off x="475560" y="3529440"/>
-            <a:ext cx="2833920" cy="236880"/>
-          </a:xfrm>
-          <a:prstGeom prst="rect">
-            <a:avLst/>
-          </a:prstGeom>
-          <a:noFill/>
-          <a:ln w="0">
-            <a:noFill/>
-          </a:ln>
-        </p:spPr>
-        <p:style>
-          <a:lnRef idx="0"/>
-          <a:fillRef idx="0"/>
-          <a:effectRef idx="0"/>
-          <a:fontRef idx="minor"/>
-        </p:style>
-        <p:txBody>
-          <a:bodyPr lIns="90000" tIns="45000" rIns="90000" bIns="45000" anchor="ctr">
-            <a:noAutofit/>
-          </a:bodyPr>
-          <a:p>
-            <a:pPr defTabSz="914400">
-              <a:lnSpc>
-                <a:spcPct val="100000"/>
-              </a:lnSpc>
-              <a:tabLst>
-                <a:tab pos="0" algn="l"/>
-              </a:tabLst>
-            </a:pPr>
-            <a:r>
-              <a:rPr lang="en-US" sz="950" b="0" u="none" strike="noStrike">
-                <a:solidFill>
-                  <a:srgbClr val="F0F4F8"/>
-                </a:solidFill>
-                <a:effectLst/>
-                <a:uFillTx/>
-                <a:latin typeface="Calibri"/>
-                <a:ea typeface="Calibri"/>
-              </a:rPr>
-              <a:t>Cursos → Promociones</a:t>
-            </a:r>
-            <a:endParaRPr lang="es-ES" sz="950" b="0" u="none" strike="noStrike">
-              <a:solidFill>
-                <a:srgbClr val="FFFFFF"/>
-              </a:solidFill>
-              <a:effectLst/>
-              <a:uFillTx/>
-              <a:latin typeface="Arial"/>
-            </a:endParaRPr>
-          </a:p>
-        </p:txBody>
-      </p:sp>
-      <p:sp>
-        <p:nvSpPr>
-          <p:cNvPr id="29" name="Shape 19"/>
-          <p:cNvSpPr/>
-          <p:nvPr/>
-        </p:nvSpPr>
-        <p:spPr>
-          <a:xfrm>
-            <a:off x="3401640" y="3566160"/>
-            <a:ext cx="657720" cy="173160"/>
-          </a:xfrm>
-          <a:prstGeom prst="roundRect">
-            <a:avLst>
-              <a:gd name="adj" fmla="val 26316"/>
-            </a:avLst>
-          </a:prstGeom>
-          <a:solidFill>
-            <a:srgbClr val="4EADD4"/>
-          </a:solidFill>
-          <a:ln w="12700">
-            <a:solidFill>
-              <a:srgbClr val="4EADD4"/>
-            </a:solidFill>
-            <a:round/>
-          </a:ln>
-        </p:spPr>
-        <p:style>
-          <a:lnRef idx="0"/>
-          <a:fillRef idx="0"/>
-          <a:effectRef idx="0"/>
-          <a:fontRef idx="minor"/>
-        </p:style>
-        <p:txBody>
-          <a:bodyPr lIns="90000" tIns="45000" rIns="90000" bIns="45000" anchor="t">
-            <a:noAutofit/>
-          </a:bodyPr>
-          <a:p>
-            <a:endParaRPr lang="es-ES" sz="1800" b="0" u="none" strike="noStrike">
-              <a:solidFill>
-                <a:srgbClr val="000000"/>
-              </a:solidFill>
-              <a:effectLst/>
-              <a:uFillTx/>
-              <a:latin typeface="Arial"/>
-            </a:endParaRPr>
-          </a:p>
-        </p:txBody>
-      </p:sp>
-      <p:sp>
-        <p:nvSpPr>
-          <p:cNvPr id="30" name="Text 20"/>
-          <p:cNvSpPr/>
-          <p:nvPr/>
-        </p:nvSpPr>
-        <p:spPr>
-          <a:xfrm>
-            <a:off x="3401640" y="3557160"/>
-            <a:ext cx="657720" cy="200520"/>
-          </a:xfrm>
-          <a:prstGeom prst="rect">
-            <a:avLst/>
-          </a:prstGeom>
-          <a:noFill/>
-          <a:ln w="0">
-            <a:noFill/>
-          </a:ln>
-        </p:spPr>
-        <p:style>
-          <a:lnRef idx="0"/>
-          <a:fillRef idx="0"/>
-          <a:effectRef idx="0"/>
-          <a:fontRef idx="minor"/>
-        </p:style>
-        <p:txBody>
-          <a:bodyPr lIns="90000" tIns="45000" rIns="90000" bIns="45000" anchor="ctr">
-            <a:noAutofit/>
-          </a:bodyPr>
-          <a:p>
-            <a:pPr algn="ctr" defTabSz="914400">
-              <a:lnSpc>
-                <a:spcPct val="100000"/>
-              </a:lnSpc>
-              <a:tabLst>
-                <a:tab pos="0" algn="l"/>
-              </a:tabLst>
-            </a:pPr>
-            <a:r>
-              <a:rPr lang="en-US" sz="800" b="1" u="none" strike="noStrike">
-                <a:solidFill>
-                  <a:srgbClr val="FFFFFF"/>
-                </a:solidFill>
-                <a:effectLst/>
-                <a:uFillTx/>
-                <a:latin typeface="Calibri"/>
-                <a:ea typeface="Calibri"/>
-              </a:rPr>
-              <a:t>1:N</a:t>
-            </a:r>
-            <a:endParaRPr lang="es-ES" sz="800" b="0" u="none" strike="noStrike">
-              <a:solidFill>
-                <a:srgbClr val="FFFFFF"/>
-              </a:solidFill>
-              <a:effectLst/>
-              <a:uFillTx/>
-              <a:latin typeface="Arial"/>
-            </a:endParaRPr>
-          </a:p>
-        </p:txBody>
-      </p:sp>
-      <p:sp>
-        <p:nvSpPr>
-          <p:cNvPr id="31" name="Text 21"/>
-          <p:cNvSpPr/>
-          <p:nvPr/>
-        </p:nvSpPr>
-        <p:spPr>
-          <a:xfrm>
-            <a:off x="4169520" y="3529440"/>
-            <a:ext cx="4525560" cy="236880"/>
-          </a:xfrm>
-          <a:prstGeom prst="rect">
-            <a:avLst/>
-          </a:prstGeom>
-          <a:noFill/>
-          <a:ln w="0">
-            <a:noFill/>
-          </a:ln>
-        </p:spPr>
-        <p:style>
-          <a:lnRef idx="0"/>
-          <a:fillRef idx="0"/>
-          <a:effectRef idx="0"/>
-          <a:fontRef idx="minor"/>
-        </p:style>
-        <p:txBody>
-          <a:bodyPr lIns="90000" tIns="45000" rIns="90000" bIns="45000" anchor="ctr">
-            <a:noAutofit/>
-          </a:bodyPr>
-          <a:p>
-            <a:pPr defTabSz="914400">
-              <a:lnSpc>
-                <a:spcPct val="100000"/>
-              </a:lnSpc>
-              <a:tabLst>
-                <a:tab pos="0" algn="l"/>
-              </a:tabLst>
-            </a:pPr>
-            <a:r>
-              <a:rPr lang="en-US" sz="950" b="0" u="none" strike="noStrike">
-                <a:solidFill>
-                  <a:srgbClr val="8DA9C4"/>
-                </a:solidFill>
-                <a:effectLst/>
-                <a:uFillTx/>
-                <a:latin typeface="Calibri"/>
-                <a:ea typeface="Calibri"/>
-              </a:rPr>
-              <a:t>Un curso agrupa muchas promociones</a:t>
-            </a:r>
-            <a:endParaRPr lang="es-ES" sz="950" b="0" u="none" strike="noStrike">
-              <a:solidFill>
-                <a:srgbClr val="FFFFFF"/>
-              </a:solidFill>
-              <a:effectLst/>
-              <a:uFillTx/>
-              <a:latin typeface="Arial"/>
-            </a:endParaRPr>
-          </a:p>
-        </p:txBody>
-      </p:sp>
-      <p:sp>
-        <p:nvSpPr>
-          <p:cNvPr id="32" name="Shape 22"/>
-          <p:cNvSpPr/>
-          <p:nvPr/>
-        </p:nvSpPr>
-        <p:spPr>
-          <a:xfrm>
-            <a:off x="384120" y="3772080"/>
-            <a:ext cx="8375040" cy="250920"/>
-          </a:xfrm>
-          <a:prstGeom prst="rect">
-            <a:avLst/>
-          </a:prstGeom>
-          <a:solidFill>
-            <a:srgbClr val="223060"/>
-          </a:solidFill>
-          <a:ln w="12700">
-            <a:solidFill>
-              <a:srgbClr val="223060"/>
-            </a:solidFill>
-            <a:round/>
-          </a:ln>
-        </p:spPr>
-        <p:style>
-          <a:lnRef idx="0"/>
-          <a:fillRef idx="0"/>
-          <a:effectRef idx="0"/>
-          <a:fontRef idx="minor"/>
-        </p:style>
-        <p:txBody>
-          <a:bodyPr lIns="90000" tIns="45000" rIns="90000" bIns="45000" anchor="t">
-            <a:noAutofit/>
-          </a:bodyPr>
-          <a:p>
-            <a:endParaRPr lang="es-ES" sz="1800" b="0" u="none" strike="noStrike">
-              <a:solidFill>
-                <a:srgbClr val="FFFFFF"/>
-              </a:solidFill>
-              <a:effectLst/>
-              <a:uFillTx/>
-              <a:latin typeface="Arial"/>
-            </a:endParaRPr>
-          </a:p>
-        </p:txBody>
-      </p:sp>
-      <p:sp>
-        <p:nvSpPr>
-          <p:cNvPr id="33" name="Text 23"/>
-          <p:cNvSpPr/>
-          <p:nvPr/>
-        </p:nvSpPr>
-        <p:spPr>
-          <a:xfrm>
-            <a:off x="475560" y="3781080"/>
-            <a:ext cx="2833920" cy="236880"/>
-          </a:xfrm>
-          <a:prstGeom prst="rect">
-            <a:avLst/>
-          </a:prstGeom>
-          <a:noFill/>
-          <a:ln w="0">
-            <a:noFill/>
-          </a:ln>
-        </p:spPr>
-        <p:style>
-          <a:lnRef idx="0"/>
-          <a:fillRef idx="0"/>
-          <a:effectRef idx="0"/>
-          <a:fontRef idx="minor"/>
-        </p:style>
-        <p:txBody>
-          <a:bodyPr lIns="90000" tIns="45000" rIns="90000" bIns="45000" anchor="ctr">
-            <a:noAutofit/>
-          </a:bodyPr>
-          <a:p>
-            <a:pPr defTabSz="914400">
-              <a:lnSpc>
-                <a:spcPct val="100000"/>
-              </a:lnSpc>
-              <a:tabLst>
-                <a:tab pos="0" algn="l"/>
-              </a:tabLst>
-            </a:pPr>
-            <a:r>
-              <a:rPr lang="en-US" sz="950" b="0" u="none" strike="noStrike">
-                <a:solidFill>
-                  <a:srgbClr val="F0F4F8"/>
-                </a:solidFill>
-                <a:effectLst/>
-                <a:uFillTx/>
-                <a:latin typeface="Calibri"/>
-                <a:ea typeface="Calibri"/>
-              </a:rPr>
-              <a:t>Cursos → Proyectos</a:t>
-            </a:r>
-            <a:endParaRPr lang="es-ES" sz="950" b="0" u="none" strike="noStrike">
-              <a:solidFill>
-                <a:srgbClr val="FFFFFF"/>
-              </a:solidFill>
-              <a:effectLst/>
-              <a:uFillTx/>
-              <a:latin typeface="Arial"/>
-            </a:endParaRPr>
-          </a:p>
-        </p:txBody>
-      </p:sp>
-      <p:sp>
-        <p:nvSpPr>
-          <p:cNvPr id="34" name="Shape 24"/>
-          <p:cNvSpPr/>
-          <p:nvPr/>
-        </p:nvSpPr>
-        <p:spPr>
-          <a:xfrm>
-            <a:off x="3401640" y="3817800"/>
-            <a:ext cx="657720" cy="173160"/>
-          </a:xfrm>
-          <a:prstGeom prst="roundRect">
-            <a:avLst>
-              <a:gd name="adj" fmla="val 26316"/>
-            </a:avLst>
-          </a:prstGeom>
-          <a:solidFill>
-            <a:srgbClr val="4EADD4"/>
-          </a:solidFill>
-          <a:ln w="12700">
-            <a:solidFill>
-              <a:srgbClr val="4EADD4"/>
-            </a:solidFill>
-            <a:round/>
-          </a:ln>
-        </p:spPr>
-        <p:style>
-          <a:lnRef idx="0"/>
-          <a:fillRef idx="0"/>
-          <a:effectRef idx="0"/>
-          <a:fontRef idx="minor"/>
-        </p:style>
-        <p:txBody>
-          <a:bodyPr lIns="90000" tIns="45000" rIns="90000" bIns="45000" anchor="t">
-            <a:noAutofit/>
-          </a:bodyPr>
-          <a:p>
-            <a:endParaRPr lang="es-ES" sz="1800" b="0" u="none" strike="noStrike">
-              <a:solidFill>
-                <a:srgbClr val="000000"/>
-              </a:solidFill>
-              <a:effectLst/>
-              <a:uFillTx/>
-              <a:latin typeface="Arial"/>
-            </a:endParaRPr>
-          </a:p>
-        </p:txBody>
-      </p:sp>
-      <p:sp>
-        <p:nvSpPr>
-          <p:cNvPr id="35" name="Text 25"/>
-          <p:cNvSpPr/>
-          <p:nvPr/>
-        </p:nvSpPr>
-        <p:spPr>
-          <a:xfrm>
-            <a:off x="3401640" y="3808440"/>
-            <a:ext cx="657720" cy="200520"/>
-          </a:xfrm>
-          <a:prstGeom prst="rect">
-            <a:avLst/>
-          </a:prstGeom>
-          <a:noFill/>
-          <a:ln w="0">
-            <a:noFill/>
-          </a:ln>
-        </p:spPr>
-        <p:style>
-          <a:lnRef idx="0"/>
-          <a:fillRef idx="0"/>
-          <a:effectRef idx="0"/>
-          <a:fontRef idx="minor"/>
-        </p:style>
-        <p:txBody>
-          <a:bodyPr lIns="90000" tIns="45000" rIns="90000" bIns="45000" anchor="ctr">
-            <a:noAutofit/>
-          </a:bodyPr>
-          <a:p>
-            <a:pPr algn="ctr" defTabSz="914400">
-              <a:lnSpc>
-                <a:spcPct val="100000"/>
-              </a:lnSpc>
-              <a:tabLst>
-                <a:tab pos="0" algn="l"/>
-              </a:tabLst>
-            </a:pPr>
-            <a:r>
-              <a:rPr lang="en-US" sz="800" b="1" u="none" strike="noStrike">
-                <a:solidFill>
-                  <a:srgbClr val="FFFFFF"/>
-                </a:solidFill>
-                <a:effectLst/>
-                <a:uFillTx/>
-                <a:latin typeface="Calibri"/>
-                <a:ea typeface="Calibri"/>
-              </a:rPr>
-              <a:t>1:N</a:t>
-            </a:r>
-            <a:endParaRPr lang="es-ES" sz="800" b="0" u="none" strike="noStrike">
-              <a:solidFill>
-                <a:srgbClr val="FFFFFF"/>
-              </a:solidFill>
-              <a:effectLst/>
-              <a:uFillTx/>
-              <a:latin typeface="Arial"/>
-            </a:endParaRPr>
-          </a:p>
-        </p:txBody>
-      </p:sp>
-      <p:sp>
-        <p:nvSpPr>
-          <p:cNvPr id="36" name="Text 26"/>
-          <p:cNvSpPr/>
-          <p:nvPr/>
-        </p:nvSpPr>
-        <p:spPr>
-          <a:xfrm>
-            <a:off x="4169520" y="3781080"/>
-            <a:ext cx="4525560" cy="236880"/>
-          </a:xfrm>
-          <a:prstGeom prst="rect">
-            <a:avLst/>
-          </a:prstGeom>
-          <a:noFill/>
-          <a:ln w="0">
-            <a:noFill/>
-          </a:ln>
-        </p:spPr>
-        <p:style>
-          <a:lnRef idx="0"/>
-          <a:fillRef idx="0"/>
-          <a:effectRef idx="0"/>
-          <a:fontRef idx="minor"/>
-        </p:style>
-        <p:txBody>
-          <a:bodyPr lIns="90000" tIns="45000" rIns="90000" bIns="45000" anchor="ctr">
-            <a:noAutofit/>
-          </a:bodyPr>
-          <a:p>
-            <a:pPr defTabSz="914400">
-              <a:lnSpc>
-                <a:spcPct val="100000"/>
-              </a:lnSpc>
-              <a:tabLst>
-                <a:tab pos="0" algn="l"/>
-              </a:tabLst>
-            </a:pPr>
-            <a:r>
-              <a:rPr lang="en-US" sz="950" b="0" u="none" strike="noStrike">
-                <a:solidFill>
-                  <a:srgbClr val="8DA9C4"/>
-                </a:solidFill>
-                <a:effectLst/>
-                <a:uFillTx/>
-                <a:latin typeface="Calibri"/>
-                <a:ea typeface="Calibri"/>
-              </a:rPr>
-              <a:t>Un curso incluye varios proyectos evaluables</a:t>
-            </a:r>
-            <a:endParaRPr lang="es-ES" sz="950" b="0" u="none" strike="noStrike">
-              <a:solidFill>
-                <a:srgbClr val="FFFFFF"/>
-              </a:solidFill>
-              <a:effectLst/>
-              <a:uFillTx/>
-              <a:latin typeface="Arial"/>
-            </a:endParaRPr>
-          </a:p>
-        </p:txBody>
-      </p:sp>
-      <p:sp>
-        <p:nvSpPr>
-          <p:cNvPr id="37" name="Shape 27"/>
-          <p:cNvSpPr/>
-          <p:nvPr/>
-        </p:nvSpPr>
-        <p:spPr>
-          <a:xfrm>
-            <a:off x="384120" y="4023360"/>
-            <a:ext cx="8375040" cy="250920"/>
-          </a:xfrm>
-          <a:prstGeom prst="rect">
-            <a:avLst/>
-          </a:prstGeom>
-          <a:solidFill>
-            <a:srgbClr val="1E3354"/>
-          </a:solidFill>
-          <a:ln w="12700">
-            <a:solidFill>
-              <a:srgbClr val="1E3354"/>
-            </a:solidFill>
-            <a:round/>
-          </a:ln>
-        </p:spPr>
-        <p:style>
-          <a:lnRef idx="0"/>
-          <a:fillRef idx="0"/>
-          <a:effectRef idx="0"/>
-          <a:fontRef idx="minor"/>
-        </p:style>
-        <p:txBody>
-          <a:bodyPr lIns="90000" tIns="45000" rIns="90000" bIns="45000" anchor="t">
-            <a:noAutofit/>
-          </a:bodyPr>
-          <a:p>
-            <a:endParaRPr lang="es-ES" sz="1800" b="0" u="none" strike="noStrike">
-              <a:solidFill>
-                <a:srgbClr val="FFFFFF"/>
-              </a:solidFill>
-              <a:effectLst/>
-              <a:uFillTx/>
-              <a:latin typeface="Arial"/>
-            </a:endParaRPr>
-          </a:p>
-        </p:txBody>
-      </p:sp>
-      <p:sp>
-        <p:nvSpPr>
-          <p:cNvPr id="38" name="Text 28"/>
-          <p:cNvSpPr/>
-          <p:nvPr/>
-        </p:nvSpPr>
-        <p:spPr>
-          <a:xfrm>
-            <a:off x="475560" y="4032360"/>
-            <a:ext cx="2833920" cy="236880"/>
-          </a:xfrm>
-          <a:prstGeom prst="rect">
-            <a:avLst/>
-          </a:prstGeom>
-          <a:noFill/>
-          <a:ln w="0">
-            <a:noFill/>
-          </a:ln>
-        </p:spPr>
-        <p:style>
-          <a:lnRef idx="0"/>
-          <a:fillRef idx="0"/>
-          <a:effectRef idx="0"/>
-          <a:fontRef idx="minor"/>
-        </p:style>
-        <p:txBody>
-          <a:bodyPr lIns="90000" tIns="45000" rIns="90000" bIns="45000" anchor="ctr">
-            <a:noAutofit/>
-          </a:bodyPr>
-          <a:p>
-            <a:pPr defTabSz="914400">
-              <a:lnSpc>
-                <a:spcPct val="100000"/>
-              </a:lnSpc>
-              <a:tabLst>
-                <a:tab pos="0" algn="l"/>
-              </a:tabLst>
-            </a:pPr>
-            <a:r>
-              <a:rPr lang="en-US" sz="950" b="0" u="none" strike="noStrike">
-                <a:solidFill>
-                  <a:srgbClr val="F0F4F8"/>
-                </a:solidFill>
-                <a:effectLst/>
-                <a:uFillTx/>
-                <a:latin typeface="Calibri"/>
-                <a:ea typeface="Calibri"/>
-              </a:rPr>
-              <a:t>Roles → Profesores</a:t>
-            </a:r>
-            <a:endParaRPr lang="es-ES" sz="950" b="0" u="none" strike="noStrike">
-              <a:solidFill>
-                <a:srgbClr val="FFFFFF"/>
-              </a:solidFill>
-              <a:effectLst/>
-              <a:uFillTx/>
-              <a:latin typeface="Arial"/>
-            </a:endParaRPr>
-          </a:p>
-        </p:txBody>
-      </p:sp>
-      <p:sp>
-        <p:nvSpPr>
-          <p:cNvPr id="39" name="Shape 29"/>
-          <p:cNvSpPr/>
-          <p:nvPr/>
-        </p:nvSpPr>
-        <p:spPr>
-          <a:xfrm>
-            <a:off x="3401640" y="4069080"/>
-            <a:ext cx="657720" cy="173160"/>
-          </a:xfrm>
-          <a:prstGeom prst="roundRect">
-            <a:avLst>
-              <a:gd name="adj" fmla="val 26316"/>
-            </a:avLst>
-          </a:prstGeom>
-          <a:solidFill>
-            <a:srgbClr val="4EADD4"/>
-          </a:solidFill>
-          <a:ln w="12700">
-            <a:solidFill>
-              <a:srgbClr val="4EADD4"/>
-            </a:solidFill>
-            <a:round/>
-          </a:ln>
-        </p:spPr>
-        <p:style>
-          <a:lnRef idx="0"/>
-          <a:fillRef idx="0"/>
-          <a:effectRef idx="0"/>
-          <a:fontRef idx="minor"/>
-        </p:style>
-        <p:txBody>
-          <a:bodyPr lIns="90000" tIns="45000" rIns="90000" bIns="45000" anchor="t">
-            <a:noAutofit/>
-          </a:bodyPr>
-          <a:p>
-            <a:endParaRPr lang="es-ES" sz="1800" b="0" u="none" strike="noStrike">
-              <a:solidFill>
-                <a:srgbClr val="000000"/>
-              </a:solidFill>
-              <a:effectLst/>
-              <a:uFillTx/>
-              <a:latin typeface="Arial"/>
-            </a:endParaRPr>
-          </a:p>
-        </p:txBody>
-      </p:sp>
-      <p:sp>
-        <p:nvSpPr>
-          <p:cNvPr id="40" name="Text 30"/>
-          <p:cNvSpPr/>
-          <p:nvPr/>
-        </p:nvSpPr>
-        <p:spPr>
-          <a:xfrm>
-            <a:off x="3401640" y="4060080"/>
-            <a:ext cx="657720" cy="200520"/>
-          </a:xfrm>
-          <a:prstGeom prst="rect">
-            <a:avLst/>
-          </a:prstGeom>
-          <a:noFill/>
-          <a:ln w="0">
-            <a:noFill/>
-          </a:ln>
-        </p:spPr>
-        <p:style>
-          <a:lnRef idx="0"/>
-          <a:fillRef idx="0"/>
-          <a:effectRef idx="0"/>
-          <a:fontRef idx="minor"/>
-        </p:style>
-        <p:txBody>
-          <a:bodyPr lIns="90000" tIns="45000" rIns="90000" bIns="45000" anchor="ctr">
-            <a:noAutofit/>
-          </a:bodyPr>
-          <a:p>
-            <a:pPr algn="ctr" defTabSz="914400">
-              <a:lnSpc>
-                <a:spcPct val="100000"/>
-              </a:lnSpc>
-              <a:tabLst>
-                <a:tab pos="0" algn="l"/>
-              </a:tabLst>
-            </a:pPr>
-            <a:r>
-              <a:rPr lang="en-US" sz="800" b="1" u="none" strike="noStrike">
-                <a:solidFill>
-                  <a:srgbClr val="FFFFFF"/>
-                </a:solidFill>
-                <a:effectLst/>
-                <a:uFillTx/>
-                <a:latin typeface="Calibri"/>
-                <a:ea typeface="Calibri"/>
-              </a:rPr>
-              <a:t>1:N</a:t>
-            </a:r>
-            <a:endParaRPr lang="es-ES" sz="800" b="0" u="none" strike="noStrike">
-              <a:solidFill>
-                <a:srgbClr val="FFFFFF"/>
-              </a:solidFill>
-              <a:effectLst/>
-              <a:uFillTx/>
-              <a:latin typeface="Arial"/>
-            </a:endParaRPr>
-          </a:p>
-        </p:txBody>
-      </p:sp>
-      <p:sp>
-        <p:nvSpPr>
-          <p:cNvPr id="41" name="Text 31"/>
-          <p:cNvSpPr/>
-          <p:nvPr/>
-        </p:nvSpPr>
-        <p:spPr>
-          <a:xfrm>
-            <a:off x="4169520" y="4032360"/>
-            <a:ext cx="4525560" cy="236880"/>
-          </a:xfrm>
-          <a:prstGeom prst="rect">
-            <a:avLst/>
-          </a:prstGeom>
-          <a:noFill/>
-          <a:ln w="0">
-            <a:noFill/>
-          </a:ln>
-        </p:spPr>
-        <p:style>
-          <a:lnRef idx="0"/>
-          <a:fillRef idx="0"/>
-          <a:effectRef idx="0"/>
-          <a:fontRef idx="minor"/>
-        </p:style>
-        <p:txBody>
-          <a:bodyPr lIns="90000" tIns="45000" rIns="90000" bIns="45000" anchor="ctr">
-            <a:noAutofit/>
-          </a:bodyPr>
-          <a:p>
-            <a:pPr defTabSz="914400">
-              <a:lnSpc>
-                <a:spcPct val="100000"/>
-              </a:lnSpc>
-              <a:tabLst>
-                <a:tab pos="0" algn="l"/>
-              </a:tabLst>
-            </a:pPr>
-            <a:r>
-              <a:rPr lang="en-US" sz="950" b="0" u="none" strike="noStrike">
-                <a:solidFill>
-                  <a:srgbClr val="8DA9C4"/>
-                </a:solidFill>
-                <a:effectLst/>
-                <a:uFillTx/>
-                <a:latin typeface="Calibri"/>
-                <a:ea typeface="Calibri"/>
-              </a:rPr>
-              <a:t>Un rol clasifica a muchos profesores</a:t>
-            </a:r>
-            <a:endParaRPr lang="es-ES" sz="950" b="0" u="none" strike="noStrike">
-              <a:solidFill>
-                <a:srgbClr val="FFFFFF"/>
-              </a:solidFill>
-              <a:effectLst/>
-              <a:uFillTx/>
-              <a:latin typeface="Arial"/>
-            </a:endParaRPr>
-          </a:p>
-        </p:txBody>
-      </p:sp>
-      <p:sp>
-        <p:nvSpPr>
-          <p:cNvPr id="42" name="Shape 32"/>
-          <p:cNvSpPr/>
-          <p:nvPr/>
-        </p:nvSpPr>
-        <p:spPr>
-          <a:xfrm>
-            <a:off x="384120" y="4275000"/>
-            <a:ext cx="8375040" cy="250920"/>
-          </a:xfrm>
-          <a:prstGeom prst="rect">
-            <a:avLst/>
-          </a:prstGeom>
-          <a:solidFill>
-            <a:srgbClr val="223060"/>
-          </a:solidFill>
-          <a:ln w="12700">
-            <a:solidFill>
-              <a:srgbClr val="223060"/>
-            </a:solidFill>
-            <a:round/>
-          </a:ln>
-        </p:spPr>
-        <p:style>
-          <a:lnRef idx="0"/>
-          <a:fillRef idx="0"/>
-          <a:effectRef idx="0"/>
-          <a:fontRef idx="minor"/>
-        </p:style>
-        <p:txBody>
-          <a:bodyPr lIns="90000" tIns="45000" rIns="90000" bIns="45000" anchor="t">
-            <a:noAutofit/>
-          </a:bodyPr>
-          <a:p>
-            <a:endParaRPr lang="es-ES" sz="1800" b="0" u="none" strike="noStrike">
-              <a:solidFill>
-                <a:srgbClr val="FFFFFF"/>
-              </a:solidFill>
-              <a:effectLst/>
-              <a:uFillTx/>
-              <a:latin typeface="Arial"/>
-            </a:endParaRPr>
-          </a:p>
-        </p:txBody>
-      </p:sp>
-      <p:sp>
-        <p:nvSpPr>
-          <p:cNvPr id="43" name="Text 33"/>
-          <p:cNvSpPr/>
-          <p:nvPr/>
-        </p:nvSpPr>
-        <p:spPr>
-          <a:xfrm>
-            <a:off x="475560" y="4284000"/>
-            <a:ext cx="2833920" cy="236880"/>
-          </a:xfrm>
-          <a:prstGeom prst="rect">
-            <a:avLst/>
-          </a:prstGeom>
-          <a:noFill/>
-          <a:ln w="0">
-            <a:noFill/>
-          </a:ln>
-        </p:spPr>
-        <p:style>
-          <a:lnRef idx="0"/>
-          <a:fillRef idx="0"/>
-          <a:effectRef idx="0"/>
-          <a:fontRef idx="minor"/>
-        </p:style>
-        <p:txBody>
-          <a:bodyPr lIns="90000" tIns="45000" rIns="90000" bIns="45000" anchor="ctr">
-            <a:noAutofit/>
-          </a:bodyPr>
-          <a:p>
-            <a:pPr defTabSz="914400">
-              <a:lnSpc>
-                <a:spcPct val="100000"/>
-              </a:lnSpc>
-              <a:tabLst>
-                <a:tab pos="0" algn="l"/>
-              </a:tabLst>
-            </a:pPr>
-            <a:r>
-              <a:rPr lang="en-US" sz="950" b="0" u="none" strike="noStrike">
-                <a:solidFill>
-                  <a:srgbClr val="F0F4F8"/>
-                </a:solidFill>
-                <a:effectLst/>
-                <a:uFillTx/>
-                <a:latin typeface="Calibri"/>
-                <a:ea typeface="Calibri"/>
-              </a:rPr>
-              <a:t>Promociones → Alumnos</a:t>
-            </a:r>
-            <a:endParaRPr lang="es-ES" sz="950" b="0" u="none" strike="noStrike">
-              <a:solidFill>
-                <a:srgbClr val="FFFFFF"/>
-              </a:solidFill>
-              <a:effectLst/>
-              <a:uFillTx/>
-              <a:latin typeface="Arial"/>
-            </a:endParaRPr>
-          </a:p>
-        </p:txBody>
-      </p:sp>
-      <p:sp>
-        <p:nvSpPr>
-          <p:cNvPr id="44" name="Shape 34"/>
-          <p:cNvSpPr/>
-          <p:nvPr/>
-        </p:nvSpPr>
-        <p:spPr>
-          <a:xfrm>
-            <a:off x="3401640" y="4320720"/>
-            <a:ext cx="657720" cy="173160"/>
-          </a:xfrm>
-          <a:prstGeom prst="roundRect">
-            <a:avLst>
-              <a:gd name="adj" fmla="val 26316"/>
-            </a:avLst>
-          </a:prstGeom>
-          <a:solidFill>
-            <a:srgbClr val="4EADD4"/>
-          </a:solidFill>
-          <a:ln w="12700">
-            <a:solidFill>
-              <a:srgbClr val="4EADD4"/>
-            </a:solidFill>
-            <a:round/>
-          </a:ln>
-        </p:spPr>
-        <p:style>
-          <a:lnRef idx="0"/>
-          <a:fillRef idx="0"/>
-          <a:effectRef idx="0"/>
-          <a:fontRef idx="minor"/>
-        </p:style>
-        <p:txBody>
-          <a:bodyPr lIns="90000" tIns="45000" rIns="90000" bIns="45000" anchor="t">
-            <a:noAutofit/>
-          </a:bodyPr>
-          <a:p>
-            <a:endParaRPr lang="es-ES" sz="1800" b="0" u="none" strike="noStrike">
-              <a:solidFill>
-                <a:srgbClr val="000000"/>
-              </a:solidFill>
-              <a:effectLst/>
-              <a:uFillTx/>
-              <a:latin typeface="Arial"/>
-            </a:endParaRPr>
-          </a:p>
-        </p:txBody>
-      </p:sp>
-      <p:sp>
-        <p:nvSpPr>
-          <p:cNvPr id="45" name="Text 35"/>
-          <p:cNvSpPr/>
-          <p:nvPr/>
-        </p:nvSpPr>
-        <p:spPr>
-          <a:xfrm>
-            <a:off x="3401640" y="4311360"/>
-            <a:ext cx="657720" cy="200520"/>
-          </a:xfrm>
-          <a:prstGeom prst="rect">
-            <a:avLst/>
-          </a:prstGeom>
-          <a:noFill/>
-          <a:ln w="0">
-            <a:noFill/>
-          </a:ln>
-        </p:spPr>
-        <p:style>
-          <a:lnRef idx="0"/>
-          <a:fillRef idx="0"/>
-          <a:effectRef idx="0"/>
-          <a:fontRef idx="minor"/>
-        </p:style>
-        <p:txBody>
-          <a:bodyPr lIns="90000" tIns="45000" rIns="90000" bIns="45000" anchor="ctr">
-            <a:noAutofit/>
-          </a:bodyPr>
-          <a:p>
-            <a:pPr algn="ctr" defTabSz="914400">
-              <a:lnSpc>
-                <a:spcPct val="100000"/>
-              </a:lnSpc>
-              <a:tabLst>
-                <a:tab pos="0" algn="l"/>
-              </a:tabLst>
-            </a:pPr>
-            <a:r>
-              <a:rPr lang="en-US" sz="800" b="1" u="none" strike="noStrike">
-                <a:solidFill>
-                  <a:srgbClr val="FFFFFF"/>
-                </a:solidFill>
-                <a:effectLst/>
-                <a:uFillTx/>
-                <a:latin typeface="Calibri"/>
-                <a:ea typeface="Calibri"/>
-              </a:rPr>
-              <a:t>1:N</a:t>
-            </a:r>
-            <a:endParaRPr lang="es-ES" sz="800" b="0" u="none" strike="noStrike">
-              <a:solidFill>
-                <a:srgbClr val="FFFFFF"/>
-              </a:solidFill>
-              <a:effectLst/>
-              <a:uFillTx/>
-              <a:latin typeface="Arial"/>
-            </a:endParaRPr>
-          </a:p>
-        </p:txBody>
-      </p:sp>
-      <p:sp>
-        <p:nvSpPr>
-          <p:cNvPr id="46" name="Text 36"/>
-          <p:cNvSpPr/>
-          <p:nvPr/>
-        </p:nvSpPr>
-        <p:spPr>
-          <a:xfrm>
-            <a:off x="4169520" y="4284000"/>
-            <a:ext cx="4525560" cy="236880"/>
-          </a:xfrm>
-          <a:prstGeom prst="rect">
-            <a:avLst/>
-          </a:prstGeom>
-          <a:noFill/>
-          <a:ln w="0">
-            <a:noFill/>
-          </a:ln>
-        </p:spPr>
-        <p:style>
-          <a:lnRef idx="0"/>
-          <a:fillRef idx="0"/>
-          <a:effectRef idx="0"/>
-          <a:fontRef idx="minor"/>
-        </p:style>
-        <p:txBody>
-          <a:bodyPr lIns="90000" tIns="45000" rIns="90000" bIns="45000" anchor="ctr">
-            <a:noAutofit/>
-          </a:bodyPr>
-          <a:p>
-            <a:pPr defTabSz="914400">
-              <a:lnSpc>
-                <a:spcPct val="100000"/>
-              </a:lnSpc>
-              <a:tabLst>
-                <a:tab pos="0" algn="l"/>
-              </a:tabLst>
-            </a:pPr>
-            <a:r>
-              <a:rPr lang="en-US" sz="950" b="0" u="none" strike="noStrike">
-                <a:solidFill>
-                  <a:srgbClr val="8DA9C4"/>
-                </a:solidFill>
-                <a:effectLst/>
-                <a:uFillTx/>
-                <a:latin typeface="Calibri"/>
-                <a:ea typeface="Calibri"/>
-              </a:rPr>
-              <a:t>Una promoción inscribe a muchos alumnos</a:t>
-            </a:r>
-            <a:endParaRPr lang="es-ES" sz="950" b="0" u="none" strike="noStrike">
-              <a:solidFill>
-                <a:srgbClr val="FFFFFF"/>
-              </a:solidFill>
-              <a:effectLst/>
-              <a:uFillTx/>
-              <a:latin typeface="Arial"/>
-            </a:endParaRPr>
-          </a:p>
-        </p:txBody>
-      </p:sp>
-      <p:sp>
-        <p:nvSpPr>
-          <p:cNvPr id="47" name="Shape 37"/>
-          <p:cNvSpPr/>
-          <p:nvPr/>
-        </p:nvSpPr>
-        <p:spPr>
-          <a:xfrm>
-            <a:off x="384120" y="4526280"/>
-            <a:ext cx="8375040" cy="250920"/>
-          </a:xfrm>
-          <a:prstGeom prst="rect">
-            <a:avLst/>
-          </a:prstGeom>
-          <a:solidFill>
-            <a:srgbClr val="1E3354"/>
-          </a:solidFill>
-          <a:ln w="12700">
-            <a:solidFill>
-              <a:srgbClr val="1E3354"/>
-            </a:solidFill>
-            <a:round/>
-          </a:ln>
-        </p:spPr>
-        <p:style>
-          <a:lnRef idx="0"/>
-          <a:fillRef idx="0"/>
-          <a:effectRef idx="0"/>
-          <a:fontRef idx="minor"/>
-        </p:style>
-        <p:txBody>
-          <a:bodyPr lIns="90000" tIns="45000" rIns="90000" bIns="45000" anchor="t">
-            <a:noAutofit/>
-          </a:bodyPr>
-          <a:p>
-            <a:endParaRPr lang="es-ES" sz="1800" b="0" u="none" strike="noStrike">
-              <a:solidFill>
-                <a:srgbClr val="FFFFFF"/>
-              </a:solidFill>
-              <a:effectLst/>
-              <a:uFillTx/>
-              <a:latin typeface="Arial"/>
-            </a:endParaRPr>
-          </a:p>
-        </p:txBody>
-      </p:sp>
-      <p:sp>
-        <p:nvSpPr>
-          <p:cNvPr id="48" name="Text 38"/>
-          <p:cNvSpPr/>
-          <p:nvPr/>
-        </p:nvSpPr>
-        <p:spPr>
-          <a:xfrm>
-            <a:off x="475560" y="4535280"/>
-            <a:ext cx="2833920" cy="236880"/>
-          </a:xfrm>
-          <a:prstGeom prst="rect">
-            <a:avLst/>
-          </a:prstGeom>
-          <a:noFill/>
-          <a:ln w="0">
-            <a:noFill/>
-          </a:ln>
-        </p:spPr>
-        <p:style>
-          <a:lnRef idx="0"/>
-          <a:fillRef idx="0"/>
-          <a:effectRef idx="0"/>
-          <a:fontRef idx="minor"/>
-        </p:style>
-        <p:txBody>
-          <a:bodyPr lIns="90000" tIns="45000" rIns="90000" bIns="45000" anchor="ctr">
-            <a:noAutofit/>
-          </a:bodyPr>
-          <a:p>
-            <a:pPr defTabSz="914400">
-              <a:lnSpc>
-                <a:spcPct val="100000"/>
-              </a:lnSpc>
-              <a:tabLst>
-                <a:tab pos="0" algn="l"/>
-              </a:tabLst>
-            </a:pPr>
-            <a:r>
-              <a:rPr lang="en-US" sz="950" b="0" u="none" strike="noStrike">
-                <a:solidFill>
-                  <a:srgbClr val="F0F4F8"/>
-                </a:solidFill>
-                <a:effectLst/>
-                <a:uFillTx/>
-                <a:latin typeface="Calibri"/>
-                <a:ea typeface="Calibri"/>
-              </a:rPr>
-              <a:t>Alumnos + Proyectos → Notas</a:t>
-            </a:r>
-            <a:endParaRPr lang="es-ES" sz="950" b="0" u="none" strike="noStrike">
-              <a:solidFill>
-                <a:srgbClr val="FFFFFF"/>
-              </a:solidFill>
-              <a:effectLst/>
-              <a:uFillTx/>
-              <a:latin typeface="Arial"/>
-            </a:endParaRPr>
-          </a:p>
-        </p:txBody>
-      </p:sp>
-      <p:sp>
-        <p:nvSpPr>
-          <p:cNvPr id="49" name="Shape 39"/>
-          <p:cNvSpPr/>
-          <p:nvPr/>
-        </p:nvSpPr>
-        <p:spPr>
-          <a:xfrm>
-            <a:off x="3401640" y="4572000"/>
-            <a:ext cx="657720" cy="173160"/>
-          </a:xfrm>
-          <a:prstGeom prst="roundRect">
-            <a:avLst>
-              <a:gd name="adj" fmla="val 26316"/>
-            </a:avLst>
-          </a:prstGeom>
-          <a:solidFill>
-            <a:srgbClr val="4EADD4"/>
-          </a:solidFill>
-          <a:ln w="12700">
-            <a:solidFill>
-              <a:srgbClr val="4EADD4"/>
-            </a:solidFill>
-            <a:round/>
-          </a:ln>
-        </p:spPr>
-        <p:style>
-          <a:lnRef idx="0"/>
-          <a:fillRef idx="0"/>
-          <a:effectRef idx="0"/>
-          <a:fontRef idx="minor"/>
-        </p:style>
-        <p:txBody>
-          <a:bodyPr lIns="90000" tIns="45000" rIns="90000" bIns="45000" anchor="t">
-            <a:noAutofit/>
-          </a:bodyPr>
-          <a:p>
-            <a:endParaRPr lang="es-ES" sz="1800" b="0" u="none" strike="noStrike">
-              <a:solidFill>
-                <a:srgbClr val="000000"/>
-              </a:solidFill>
-              <a:effectLst/>
-              <a:uFillTx/>
-              <a:latin typeface="Arial"/>
-            </a:endParaRPr>
-          </a:p>
-        </p:txBody>
-      </p:sp>
-      <p:sp>
-        <p:nvSpPr>
-          <p:cNvPr id="50" name="Text 40"/>
-          <p:cNvSpPr/>
-          <p:nvPr/>
-        </p:nvSpPr>
-        <p:spPr>
-          <a:xfrm>
-            <a:off x="3401640" y="4563000"/>
-            <a:ext cx="657720" cy="200520"/>
-          </a:xfrm>
-          <a:prstGeom prst="rect">
-            <a:avLst/>
-          </a:prstGeom>
-          <a:noFill/>
-          <a:ln w="0">
-            <a:noFill/>
-          </a:ln>
-        </p:spPr>
-        <p:style>
-          <a:lnRef idx="0"/>
-          <a:fillRef idx="0"/>
-          <a:effectRef idx="0"/>
-          <a:fontRef idx="minor"/>
-        </p:style>
-        <p:txBody>
-          <a:bodyPr lIns="90000" tIns="45000" rIns="90000" bIns="45000" anchor="ctr">
-            <a:noAutofit/>
-          </a:bodyPr>
-          <a:p>
-            <a:pPr algn="ctr" defTabSz="914400">
-              <a:lnSpc>
-                <a:spcPct val="100000"/>
-              </a:lnSpc>
-              <a:tabLst>
-                <a:tab pos="0" algn="l"/>
-              </a:tabLst>
-            </a:pPr>
-            <a:r>
-              <a:rPr lang="en-US" sz="800" b="1" u="none" strike="noStrike">
-                <a:solidFill>
-                  <a:srgbClr val="FFFFFF"/>
-                </a:solidFill>
-                <a:effectLst/>
-                <a:uFillTx/>
-                <a:latin typeface="Calibri"/>
-                <a:ea typeface="Calibri"/>
-              </a:rPr>
-              <a:t>N:N→1</a:t>
-            </a:r>
-            <a:endParaRPr lang="es-ES" sz="800" b="0" u="none" strike="noStrike">
-              <a:solidFill>
-                <a:srgbClr val="FFFFFF"/>
-              </a:solidFill>
-              <a:effectLst/>
-              <a:uFillTx/>
-              <a:latin typeface="Arial"/>
-            </a:endParaRPr>
-          </a:p>
-        </p:txBody>
-      </p:sp>
-      <p:sp>
-        <p:nvSpPr>
-          <p:cNvPr id="51" name="Text 41"/>
-          <p:cNvSpPr/>
-          <p:nvPr/>
-        </p:nvSpPr>
-        <p:spPr>
-          <a:xfrm>
-            <a:off x="4169520" y="4535280"/>
-            <a:ext cx="4525560" cy="236880"/>
-          </a:xfrm>
-          <a:prstGeom prst="rect">
-            <a:avLst/>
-          </a:prstGeom>
-          <a:noFill/>
-          <a:ln w="0">
-            <a:noFill/>
-          </a:ln>
-        </p:spPr>
-        <p:style>
-          <a:lnRef idx="0"/>
-          <a:fillRef idx="0"/>
-          <a:effectRef idx="0"/>
-          <a:fontRef idx="minor"/>
-        </p:style>
-        <p:txBody>
-          <a:bodyPr lIns="90000" tIns="45000" rIns="90000" bIns="45000" anchor="ctr">
-            <a:noAutofit/>
-          </a:bodyPr>
-          <a:p>
-            <a:pPr defTabSz="914400">
-              <a:lnSpc>
-                <a:spcPct val="100000"/>
-              </a:lnSpc>
-              <a:tabLst>
-                <a:tab pos="0" algn="l"/>
-              </a:tabLst>
-            </a:pPr>
-            <a:r>
-              <a:rPr lang="en-US" sz="950" b="0" u="none" strike="noStrike">
-                <a:solidFill>
-                  <a:srgbClr val="8DA9C4"/>
-                </a:solidFill>
-                <a:effectLst/>
-                <a:uFillTx/>
-                <a:latin typeface="Calibri"/>
-                <a:ea typeface="Calibri"/>
-              </a:rPr>
-              <a:t>Cada nota pertenece a un alumno y proyecto</a:t>
-            </a:r>
-            <a:endParaRPr lang="es-ES" sz="950" b="0" u="none" strike="noStrike">
-              <a:solidFill>
-                <a:srgbClr val="FFFFFF"/>
-              </a:solidFill>
-              <a:effectLst/>
-              <a:uFillTx/>
-              <a:latin typeface="Arial"/>
-            </a:endParaRPr>
-          </a:p>
-        </p:txBody>
-      </p:sp>
-      <p:sp>
-        <p:nvSpPr>
-          <p:cNvPr id="52" name="Shape 42"/>
-          <p:cNvSpPr/>
-          <p:nvPr/>
-        </p:nvSpPr>
-        <p:spPr>
-          <a:xfrm>
-            <a:off x="384120" y="4777920"/>
-            <a:ext cx="8375040" cy="250920"/>
-          </a:xfrm>
-          <a:prstGeom prst="rect">
-            <a:avLst/>
-          </a:prstGeom>
-          <a:solidFill>
-            <a:srgbClr val="223060"/>
-          </a:solidFill>
-          <a:ln w="12700">
-            <a:solidFill>
-              <a:srgbClr val="223060"/>
-            </a:solidFill>
-            <a:round/>
-          </a:ln>
-        </p:spPr>
-        <p:style>
-          <a:lnRef idx="0"/>
-          <a:fillRef idx="0"/>
-          <a:effectRef idx="0"/>
-          <a:fontRef idx="minor"/>
-        </p:style>
-        <p:txBody>
-          <a:bodyPr lIns="90000" tIns="45000" rIns="90000" bIns="45000" anchor="t">
-            <a:noAutofit/>
-          </a:bodyPr>
-          <a:p>
-            <a:endParaRPr lang="es-ES" sz="1800" b="0" u="none" strike="noStrike">
-              <a:solidFill>
-                <a:srgbClr val="FFFFFF"/>
-              </a:solidFill>
-              <a:effectLst/>
-              <a:uFillTx/>
-              <a:latin typeface="Arial"/>
-            </a:endParaRPr>
-          </a:p>
-        </p:txBody>
-      </p:sp>
-      <p:sp>
-        <p:nvSpPr>
-          <p:cNvPr id="53" name="Text 43"/>
-          <p:cNvSpPr/>
-          <p:nvPr/>
-        </p:nvSpPr>
-        <p:spPr>
-          <a:xfrm>
-            <a:off x="475560" y="4786920"/>
-            <a:ext cx="2833920" cy="236880"/>
-          </a:xfrm>
-          <a:prstGeom prst="rect">
-            <a:avLst/>
-          </a:prstGeom>
-          <a:noFill/>
-          <a:ln w="0">
-            <a:noFill/>
-          </a:ln>
-        </p:spPr>
-        <p:style>
-          <a:lnRef idx="0"/>
-          <a:fillRef idx="0"/>
-          <a:effectRef idx="0"/>
-          <a:fontRef idx="minor"/>
-        </p:style>
-        <p:txBody>
-          <a:bodyPr lIns="90000" tIns="45000" rIns="90000" bIns="45000" anchor="ctr">
-            <a:noAutofit/>
-          </a:bodyPr>
-          <a:p>
-            <a:pPr defTabSz="914400">
-              <a:lnSpc>
-                <a:spcPct val="100000"/>
-              </a:lnSpc>
-              <a:tabLst>
-                <a:tab pos="0" algn="l"/>
-              </a:tabLst>
-            </a:pPr>
-            <a:r>
-              <a:rPr lang="en-US" sz="950" b="0" u="none" strike="noStrike">
-                <a:solidFill>
-                  <a:srgbClr val="F0F4F8"/>
-                </a:solidFill>
-                <a:effectLst/>
-                <a:uFillTx/>
-                <a:latin typeface="Calibri"/>
-                <a:ea typeface="Calibri"/>
-              </a:rPr>
-              <a:t>Profesores ↔ Promociones</a:t>
-            </a:r>
-            <a:endParaRPr lang="es-ES" sz="950" b="0" u="none" strike="noStrike">
-              <a:solidFill>
-                <a:srgbClr val="FFFFFF"/>
-              </a:solidFill>
-              <a:effectLst/>
-              <a:uFillTx/>
-              <a:latin typeface="Arial"/>
-            </a:endParaRPr>
-          </a:p>
-        </p:txBody>
-      </p:sp>
-      <p:sp>
-        <p:nvSpPr>
-          <p:cNvPr id="54" name="Shape 44"/>
-          <p:cNvSpPr/>
-          <p:nvPr/>
-        </p:nvSpPr>
-        <p:spPr>
-          <a:xfrm>
-            <a:off x="3401640" y="4823640"/>
-            <a:ext cx="657720" cy="173160"/>
-          </a:xfrm>
-          <a:prstGeom prst="roundRect">
-            <a:avLst>
-              <a:gd name="adj" fmla="val 26316"/>
-            </a:avLst>
-          </a:prstGeom>
-          <a:solidFill>
-            <a:srgbClr val="4EADD4"/>
-          </a:solidFill>
-          <a:ln w="12700">
-            <a:solidFill>
-              <a:srgbClr val="4EADD4"/>
-            </a:solidFill>
-            <a:round/>
-          </a:ln>
-        </p:spPr>
-        <p:style>
-          <a:lnRef idx="0"/>
-          <a:fillRef idx="0"/>
-          <a:effectRef idx="0"/>
-          <a:fontRef idx="minor"/>
-        </p:style>
-        <p:txBody>
-          <a:bodyPr lIns="90000" tIns="45000" rIns="90000" bIns="45000" anchor="t">
-            <a:noAutofit/>
-          </a:bodyPr>
-          <a:p>
-            <a:endParaRPr lang="es-ES" sz="1800" b="0" u="none" strike="noStrike">
-              <a:solidFill>
-                <a:srgbClr val="000000"/>
-              </a:solidFill>
-              <a:effectLst/>
-              <a:uFillTx/>
-              <a:latin typeface="Arial"/>
-            </a:endParaRPr>
-          </a:p>
-        </p:txBody>
-      </p:sp>
-      <p:sp>
-        <p:nvSpPr>
-          <p:cNvPr id="55" name="Text 45"/>
-          <p:cNvSpPr/>
-          <p:nvPr/>
-        </p:nvSpPr>
-        <p:spPr>
-          <a:xfrm>
-            <a:off x="3401640" y="4814280"/>
-            <a:ext cx="657720" cy="200520"/>
-          </a:xfrm>
-          <a:prstGeom prst="rect">
-            <a:avLst/>
-          </a:prstGeom>
-          <a:noFill/>
-          <a:ln w="0">
-            <a:noFill/>
-          </a:ln>
-        </p:spPr>
-        <p:style>
-          <a:lnRef idx="0"/>
-          <a:fillRef idx="0"/>
-          <a:effectRef idx="0"/>
-          <a:fontRef idx="minor"/>
-        </p:style>
-        <p:txBody>
-          <a:bodyPr lIns="90000" tIns="45000" rIns="90000" bIns="45000" anchor="ctr">
-            <a:noAutofit/>
-          </a:bodyPr>
-          <a:p>
-            <a:pPr algn="ctr" defTabSz="914400">
-              <a:lnSpc>
-                <a:spcPct val="100000"/>
-              </a:lnSpc>
-              <a:tabLst>
-                <a:tab pos="0" algn="l"/>
-              </a:tabLst>
-            </a:pPr>
-            <a:r>
-              <a:rPr lang="en-US" sz="800" b="1" u="none" strike="noStrike">
-                <a:solidFill>
-                  <a:srgbClr val="FFFFFF"/>
-                </a:solidFill>
-                <a:effectLst/>
-                <a:uFillTx/>
-                <a:latin typeface="Calibri"/>
-                <a:ea typeface="Calibri"/>
-              </a:rPr>
-              <a:t>N:M</a:t>
-            </a:r>
-            <a:endParaRPr lang="es-ES" sz="800" b="0" u="none" strike="noStrike">
-              <a:solidFill>
-                <a:srgbClr val="FFFFFF"/>
-              </a:solidFill>
-              <a:effectLst/>
-              <a:uFillTx/>
-              <a:latin typeface="Arial"/>
-            </a:endParaRPr>
-          </a:p>
-        </p:txBody>
-      </p:sp>
-      <p:sp>
-        <p:nvSpPr>
-          <p:cNvPr id="56" name="Text 46"/>
-          <p:cNvSpPr/>
-          <p:nvPr/>
-        </p:nvSpPr>
-        <p:spPr>
-          <a:xfrm>
-            <a:off x="4169520" y="4786920"/>
-            <a:ext cx="4525560" cy="236880"/>
-          </a:xfrm>
-          <a:prstGeom prst="rect">
-            <a:avLst/>
-          </a:prstGeom>
-          <a:noFill/>
-          <a:ln w="0">
-            <a:noFill/>
-          </a:ln>
-        </p:spPr>
-        <p:style>
-          <a:lnRef idx="0"/>
-          <a:fillRef idx="0"/>
-          <a:effectRef idx="0"/>
-          <a:fontRef idx="minor"/>
-        </p:style>
-        <p:txBody>
-          <a:bodyPr lIns="90000" tIns="45000" rIns="90000" bIns="45000" anchor="ctr">
-            <a:noAutofit/>
-          </a:bodyPr>
-          <a:p>
-            <a:pPr defTabSz="914400">
-              <a:lnSpc>
-                <a:spcPct val="100000"/>
-              </a:lnSpc>
-              <a:tabLst>
-                <a:tab pos="0" algn="l"/>
-              </a:tabLst>
-            </a:pPr>
-            <a:r>
-              <a:rPr lang="en-US" sz="950" b="0" u="none" strike="noStrike">
-                <a:solidFill>
-                  <a:srgbClr val="8DA9C4"/>
-                </a:solidFill>
-                <a:effectLst/>
-                <a:uFillTx/>
-                <a:latin typeface="Calibri"/>
-                <a:ea typeface="Calibri"/>
-              </a:rPr>
-              <a:t>Tabla puente 'imparte' en el modelo lógico</a:t>
-            </a:r>
-            <a:endParaRPr lang="es-ES" sz="950" b="0" u="none" strike="noStrike">
-              <a:solidFill>
-                <a:srgbClr val="FFFFFF"/>
-              </a:solidFill>
-              <a:effectLst/>
-              <a:uFillTx/>
-              <a:latin typeface="Arial"/>
-            </a:endParaRPr>
-          </a:p>
-        </p:txBody>
-      </p:sp>
+      <p:pic>
+        <p:nvPicPr>
+          <p:cNvPr id="3" name="Imagen 2">
+            <a:extLst>
+              <a:ext uri="{FF2B5EF4-FFF2-40B4-BE49-F238E27FC236}">
+                <a16:creationId xmlns:a16="http://schemas.microsoft.com/office/drawing/2014/main" id="{E2418AE7-1758-AFCF-FC3D-26C89F11FA9C}"/>
+              </a:ext>
+            </a:extLst>
+          </p:cNvPr>
+          <p:cNvPicPr>
+            <a:picLocks noChangeAspect="1"/>
+          </p:cNvPicPr>
+          <p:nvPr/>
+        </p:nvPicPr>
+        <p:blipFill>
+          <a:blip r:embed="rId3">
+            <a:extLst>
+              <a:ext uri="{28A0092B-C50C-407E-A947-70E740481C1C}">
+                <a14:useLocalDpi xmlns:a14="http://schemas.microsoft.com/office/drawing/2010/main" val="0"/>
+              </a:ext>
+            </a:extLst>
+          </a:blip>
+          <a:stretch>
+            <a:fillRect/>
+          </a:stretch>
+        </p:blipFill>
+        <p:spPr>
+          <a:xfrm>
+            <a:off x="2072523" y="1096215"/>
+            <a:ext cx="4998953" cy="3847307"/>
+          </a:xfrm>
+          <a:prstGeom prst="rect">
+            <a:avLst/>
+          </a:prstGeom>
+        </p:spPr>
+      </p:pic>
     </p:spTree>
   </p:cSld>
-  <mc:AlternateContent>
-    <mc:Choice Requires="p14">
-      <p:transition spd="slow" p14:dur="2000"/>
-    </mc:Choice>
-    <mc:Fallback>
-      <p:transition spd="slow"/>
-    </mc:Fallback>
-  </mc:AlternateContent>
+  <p:clrMapOvr>
+    <a:masterClrMapping/>
+  </p:clrMapOvr>
 </p:sld>
 </file>
 
-<file path=ppt/slides/slide2.xml><?xml version="1.0" encoding="utf-8"?>
-<p:sld xmlns:a="http://schemas.openxmlformats.org/drawingml/2006/main" xmlns:p="http://schemas.openxmlformats.org/presentationml/2006/main" xmlns:r="http://schemas.openxmlformats.org/officeDocument/2006/relationships" xmlns:p14="http://schemas.microsoft.com/office/powerpoint/2010/main" xmlns:p15="http://schemas.microsoft.com/office/powerpoint/2012/main" xmlns:mc="http://schemas.openxmlformats.org/markup-compatibility/2006">
+<file path=ppt/slides/slide3.xml><?xml version="1.0" encoding="utf-8"?>
+<p:sld xmlns:a="http://schemas.openxmlformats.org/drawingml/2006/main" xmlns:r="http://schemas.openxmlformats.org/officeDocument/2006/relationships" xmlns:p="http://schemas.openxmlformats.org/presentationml/2006/main">
   <p:cSld>
     <p:bg>
       <p:bgPr>
         <a:solidFill>
           <a:srgbClr val="F0F4F8"/>
         </a:solidFill>
+        <a:effectLst/>
       </p:bgPr>
     </p:bg>
     <p:spTree>
@@ -4205,15 +2243,22 @@
           </a:ln>
         </p:spPr>
         <p:style>
-          <a:lnRef idx="0"/>
-          <a:fillRef idx="0"/>
-          <a:effectRef idx="0"/>
+          <a:lnRef idx="0">
+            <a:scrgbClr r="0" g="0" b="0"/>
+          </a:lnRef>
+          <a:fillRef idx="0">
+            <a:scrgbClr r="0" g="0" b="0"/>
+          </a:fillRef>
+          <a:effectRef idx="0">
+            <a:scrgbClr r="0" g="0" b="0"/>
+          </a:effectRef>
           <a:fontRef idx="minor"/>
         </p:style>
         <p:txBody>
           <a:bodyPr lIns="90000" tIns="45000" rIns="90000" bIns="45000" anchor="t">
             <a:noAutofit/>
           </a:bodyPr>
+          <a:lstStyle/>
           <a:p>
             <a:endParaRPr lang="es-ES" sz="1800" b="0" u="none" strike="noStrike">
               <a:solidFill>
@@ -4246,15 +2291,22 @@
           </a:ln>
         </p:spPr>
         <p:style>
-          <a:lnRef idx="0"/>
-          <a:fillRef idx="0"/>
-          <a:effectRef idx="0"/>
+          <a:lnRef idx="0">
+            <a:scrgbClr r="0" g="0" b="0"/>
+          </a:lnRef>
+          <a:fillRef idx="0">
+            <a:scrgbClr r="0" g="0" b="0"/>
+          </a:fillRef>
+          <a:effectRef idx="0">
+            <a:scrgbClr r="0" g="0" b="0"/>
+          </a:effectRef>
           <a:fontRef idx="minor"/>
         </p:style>
         <p:txBody>
           <a:bodyPr lIns="90000" tIns="45000" rIns="90000" bIns="45000" anchor="ctr">
             <a:noAutofit/>
           </a:bodyPr>
+          <a:lstStyle/>
           <a:p>
             <a:pPr defTabSz="914400">
               <a:lnSpc>
@@ -4265,7 +2317,7 @@
               </a:tabLst>
             </a:pPr>
             <a:r>
-              <a:rPr lang="en-US" sz="900" b="0" u="none" spc="201" strike="noStrike">
+              <a:rPr lang="en-US" sz="900" b="0" u="none" strike="noStrike" spc="201" dirty="0">
                 <a:solidFill>
                   <a:srgbClr val="8DA9C4"/>
                 </a:solidFill>
@@ -4276,7 +2328,7 @@
               </a:rPr>
               <a:t>PROYECTO BBDD · BOOTCAMP</a:t>
             </a:r>
-            <a:endParaRPr lang="es-ES" sz="900" b="0" u="none" strike="noStrike">
+            <a:endParaRPr lang="es-ES" sz="900" b="0" u="none" strike="noStrike" dirty="0">
               <a:solidFill>
                 <a:srgbClr val="000000"/>
               </a:solidFill>
@@ -4307,15 +2359,22 @@
           </a:ln>
         </p:spPr>
         <p:style>
-          <a:lnRef idx="0"/>
-          <a:fillRef idx="0"/>
-          <a:effectRef idx="0"/>
+          <a:lnRef idx="0">
+            <a:scrgbClr r="0" g="0" b="0"/>
+          </a:lnRef>
+          <a:fillRef idx="0">
+            <a:scrgbClr r="0" g="0" b="0"/>
+          </a:fillRef>
+          <a:effectRef idx="0">
+            <a:scrgbClr r="0" g="0" b="0"/>
+          </a:effectRef>
           <a:fontRef idx="minor"/>
         </p:style>
         <p:txBody>
           <a:bodyPr lIns="90000" tIns="45000" rIns="90000" bIns="45000" anchor="ctr">
             <a:noAutofit/>
           </a:bodyPr>
+          <a:lstStyle/>
           <a:p>
             <a:pPr defTabSz="914400">
               <a:lnSpc>
@@ -4326,7 +2385,7 @@
               </a:tabLst>
             </a:pPr>
             <a:r>
-              <a:rPr lang="en-US" sz="3600" b="1" u="none" strike="noStrike">
+              <a:rPr lang="en-US" sz="3600" b="1" u="none" strike="noStrike" dirty="0">
                 <a:solidFill>
                   <a:srgbClr val="1C2B4A"/>
                 </a:solidFill>
@@ -4335,9 +2394,21 @@
                 <a:latin typeface="Calibri"/>
                 <a:ea typeface="Calibri"/>
               </a:rPr>
-              <a:t>Modelo Lógico</a:t>
-            </a:r>
-            <a:endParaRPr lang="es-ES" sz="3600" b="0" u="none" strike="noStrike">
+              <a:t>Modelo </a:t>
+            </a:r>
+            <a:r>
+              <a:rPr lang="en-US" sz="3600" b="1" u="none" strike="noStrike" dirty="0" err="1">
+                <a:solidFill>
+                  <a:srgbClr val="1C2B4A"/>
+                </a:solidFill>
+                <a:effectLst/>
+                <a:uFillTx/>
+                <a:latin typeface="Calibri"/>
+                <a:ea typeface="Calibri"/>
+              </a:rPr>
+              <a:t>Lógico</a:t>
+            </a:r>
+            <a:endParaRPr lang="es-ES" sz="3600" b="0" u="none" strike="noStrike" dirty="0">
               <a:solidFill>
                 <a:srgbClr val="000000"/>
               </a:solidFill>
@@ -4356,7 +2427,7 @@
         </p:nvSpPr>
         <p:spPr>
           <a:xfrm>
-            <a:off x="384120" y="1152000"/>
+            <a:off x="384120" y="1092528"/>
             <a:ext cx="8411760" cy="438120"/>
           </a:xfrm>
           <a:prstGeom prst="rect">
@@ -4368,15 +2439,22 @@
           </a:ln>
         </p:spPr>
         <p:style>
-          <a:lnRef idx="0"/>
-          <a:fillRef idx="0"/>
-          <a:effectRef idx="0"/>
+          <a:lnRef idx="0">
+            <a:scrgbClr r="0" g="0" b="0"/>
+          </a:lnRef>
+          <a:fillRef idx="0">
+            <a:scrgbClr r="0" g="0" b="0"/>
+          </a:fillRef>
+          <a:effectRef idx="0">
+            <a:scrgbClr r="0" g="0" b="0"/>
+          </a:effectRef>
           <a:fontRef idx="minor"/>
         </p:style>
         <p:txBody>
           <a:bodyPr lIns="90000" tIns="45000" rIns="90000" bIns="45000" anchor="ctr">
             <a:noAutofit/>
           </a:bodyPr>
+          <a:lstStyle/>
           <a:p>
             <a:pPr defTabSz="914400">
               <a:lnSpc>
@@ -4387,7 +2465,7 @@
               </a:tabLst>
             </a:pPr>
             <a:r>
-              <a:rPr lang="en-US" sz="1100" b="0" u="none" strike="noStrike">
+              <a:rPr lang="en-US" sz="1100" b="0" u="none" strike="noStrike" dirty="0" err="1">
                 <a:solidFill>
                   <a:srgbClr val="4A5568"/>
                 </a:solidFill>
@@ -4396,9 +2474,333 @@
                 <a:latin typeface="Calibri"/>
                 <a:ea typeface="Calibri"/>
               </a:rPr>
-              <a:t>Convierte el modelo E/R en algo implementable en SQL: tablas con columnas, claves primarias (PK) y foráneas (FK). Las relaciones N:M se sustituyen por una tabla puente.</a:t>
-            </a:r>
-            <a:endParaRPr lang="es-ES" sz="1100" b="0" u="none" strike="noStrike">
+              <a:t>Convierte</a:t>
+            </a:r>
+            <a:r>
+              <a:rPr lang="en-US" sz="1100" b="0" u="none" strike="noStrike" dirty="0">
+                <a:solidFill>
+                  <a:srgbClr val="4A5568"/>
+                </a:solidFill>
+                <a:effectLst/>
+                <a:uFillTx/>
+                <a:latin typeface="Calibri"/>
+                <a:ea typeface="Calibri"/>
+              </a:rPr>
+              <a:t> </a:t>
+            </a:r>
+            <a:r>
+              <a:rPr lang="en-US" sz="1100" b="0" u="none" strike="noStrike" dirty="0" err="1">
+                <a:solidFill>
+                  <a:srgbClr val="4A5568"/>
+                </a:solidFill>
+                <a:effectLst/>
+                <a:uFillTx/>
+                <a:latin typeface="Calibri"/>
+                <a:ea typeface="Calibri"/>
+              </a:rPr>
+              <a:t>el</a:t>
+            </a:r>
+            <a:r>
+              <a:rPr lang="en-US" sz="1100" b="0" u="none" strike="noStrike" dirty="0">
+                <a:solidFill>
+                  <a:srgbClr val="4A5568"/>
+                </a:solidFill>
+                <a:effectLst/>
+                <a:uFillTx/>
+                <a:latin typeface="Calibri"/>
+                <a:ea typeface="Calibri"/>
+              </a:rPr>
+              <a:t> </a:t>
+            </a:r>
+            <a:r>
+              <a:rPr lang="en-US" sz="1100" b="0" u="none" strike="noStrike" dirty="0" err="1">
+                <a:solidFill>
+                  <a:srgbClr val="4A5568"/>
+                </a:solidFill>
+                <a:effectLst/>
+                <a:uFillTx/>
+                <a:latin typeface="Calibri"/>
+                <a:ea typeface="Calibri"/>
+              </a:rPr>
+              <a:t>modelo</a:t>
+            </a:r>
+            <a:r>
+              <a:rPr lang="en-US" sz="1100" b="0" u="none" strike="noStrike" dirty="0">
+                <a:solidFill>
+                  <a:srgbClr val="4A5568"/>
+                </a:solidFill>
+                <a:effectLst/>
+                <a:uFillTx/>
+                <a:latin typeface="Calibri"/>
+                <a:ea typeface="Calibri"/>
+              </a:rPr>
+              <a:t> E/R </a:t>
+            </a:r>
+            <a:r>
+              <a:rPr lang="en-US" sz="1100" b="0" u="none" strike="noStrike" dirty="0" err="1">
+                <a:solidFill>
+                  <a:srgbClr val="4A5568"/>
+                </a:solidFill>
+                <a:effectLst/>
+                <a:uFillTx/>
+                <a:latin typeface="Calibri"/>
+                <a:ea typeface="Calibri"/>
+              </a:rPr>
+              <a:t>en</a:t>
+            </a:r>
+            <a:r>
+              <a:rPr lang="en-US" sz="1100" b="0" u="none" strike="noStrike" dirty="0">
+                <a:solidFill>
+                  <a:srgbClr val="4A5568"/>
+                </a:solidFill>
+                <a:effectLst/>
+                <a:uFillTx/>
+                <a:latin typeface="Calibri"/>
+                <a:ea typeface="Calibri"/>
+              </a:rPr>
+              <a:t> algo implementable </a:t>
+            </a:r>
+            <a:r>
+              <a:rPr lang="en-US" sz="1100" b="0" u="none" strike="noStrike" dirty="0" err="1">
+                <a:solidFill>
+                  <a:srgbClr val="4A5568"/>
+                </a:solidFill>
+                <a:effectLst/>
+                <a:uFillTx/>
+                <a:latin typeface="Calibri"/>
+                <a:ea typeface="Calibri"/>
+              </a:rPr>
+              <a:t>en</a:t>
+            </a:r>
+            <a:r>
+              <a:rPr lang="en-US" sz="1100" b="0" u="none" strike="noStrike" dirty="0">
+                <a:solidFill>
+                  <a:srgbClr val="4A5568"/>
+                </a:solidFill>
+                <a:effectLst/>
+                <a:uFillTx/>
+                <a:latin typeface="Calibri"/>
+                <a:ea typeface="Calibri"/>
+              </a:rPr>
+              <a:t> SQL: </a:t>
+            </a:r>
+            <a:r>
+              <a:rPr lang="en-US" sz="1100" b="0" u="none" strike="noStrike" dirty="0" err="1">
+                <a:solidFill>
+                  <a:srgbClr val="4A5568"/>
+                </a:solidFill>
+                <a:effectLst/>
+                <a:uFillTx/>
+                <a:latin typeface="Calibri"/>
+                <a:ea typeface="Calibri"/>
+              </a:rPr>
+              <a:t>tablas</a:t>
+            </a:r>
+            <a:r>
+              <a:rPr lang="en-US" sz="1100" b="0" u="none" strike="noStrike" dirty="0">
+                <a:solidFill>
+                  <a:srgbClr val="4A5568"/>
+                </a:solidFill>
+                <a:effectLst/>
+                <a:uFillTx/>
+                <a:latin typeface="Calibri"/>
+                <a:ea typeface="Calibri"/>
+              </a:rPr>
+              <a:t> con columnas, claves </a:t>
+            </a:r>
+            <a:r>
+              <a:rPr lang="en-US" sz="1100" b="0" u="none" strike="noStrike" dirty="0" err="1">
+                <a:solidFill>
+                  <a:srgbClr val="4A5568"/>
+                </a:solidFill>
+                <a:effectLst/>
+                <a:uFillTx/>
+                <a:latin typeface="Calibri"/>
+                <a:ea typeface="Calibri"/>
+              </a:rPr>
+              <a:t>primarias</a:t>
+            </a:r>
+            <a:r>
+              <a:rPr lang="en-US" sz="1100" b="0" u="none" strike="noStrike" dirty="0">
+                <a:solidFill>
+                  <a:srgbClr val="4A5568"/>
+                </a:solidFill>
+                <a:effectLst/>
+                <a:uFillTx/>
+                <a:latin typeface="Calibri"/>
+                <a:ea typeface="Calibri"/>
+              </a:rPr>
+              <a:t> (PK) y </a:t>
+            </a:r>
+            <a:r>
+              <a:rPr lang="en-US" sz="1100" b="0" u="none" strike="noStrike" dirty="0" err="1">
+                <a:solidFill>
+                  <a:srgbClr val="4A5568"/>
+                </a:solidFill>
+                <a:effectLst/>
+                <a:uFillTx/>
+                <a:latin typeface="Calibri"/>
+                <a:ea typeface="Calibri"/>
+              </a:rPr>
+              <a:t>foráneas</a:t>
+            </a:r>
+            <a:r>
+              <a:rPr lang="en-US" sz="1100" b="0" u="none" strike="noStrike" dirty="0">
+                <a:solidFill>
+                  <a:srgbClr val="4A5568"/>
+                </a:solidFill>
+                <a:effectLst/>
+                <a:uFillTx/>
+                <a:latin typeface="Calibri"/>
+                <a:ea typeface="Calibri"/>
+              </a:rPr>
+              <a:t> (FK). Las </a:t>
+            </a:r>
+            <a:r>
+              <a:rPr lang="en-US" sz="1100" b="0" u="none" strike="noStrike" dirty="0" err="1">
+                <a:solidFill>
+                  <a:srgbClr val="4A5568"/>
+                </a:solidFill>
+                <a:effectLst/>
+                <a:uFillTx/>
+                <a:latin typeface="Calibri"/>
+                <a:ea typeface="Calibri"/>
+              </a:rPr>
+              <a:t>relaciones</a:t>
+            </a:r>
+            <a:r>
+              <a:rPr lang="en-US" sz="1100" b="0" u="none" strike="noStrike" dirty="0">
+                <a:solidFill>
+                  <a:srgbClr val="4A5568"/>
+                </a:solidFill>
+                <a:effectLst/>
+                <a:uFillTx/>
+                <a:latin typeface="Calibri"/>
+                <a:ea typeface="Calibri"/>
+              </a:rPr>
+              <a:t> N:M se </a:t>
+            </a:r>
+            <a:r>
+              <a:rPr lang="en-US" sz="1100" b="0" u="none" strike="noStrike" dirty="0" err="1">
+                <a:solidFill>
+                  <a:srgbClr val="4A5568"/>
+                </a:solidFill>
+                <a:effectLst/>
+                <a:uFillTx/>
+                <a:latin typeface="Calibri"/>
+                <a:ea typeface="Calibri"/>
+              </a:rPr>
+              <a:t>sustituyen</a:t>
+            </a:r>
+            <a:r>
+              <a:rPr lang="en-US" sz="1100" b="0" u="none" strike="noStrike" dirty="0">
+                <a:solidFill>
+                  <a:srgbClr val="4A5568"/>
+                </a:solidFill>
+                <a:effectLst/>
+                <a:uFillTx/>
+                <a:latin typeface="Calibri"/>
+                <a:ea typeface="Calibri"/>
+              </a:rPr>
+              <a:t> </a:t>
+            </a:r>
+            <a:r>
+              <a:rPr lang="en-US" sz="1100" b="0" u="none" strike="noStrike" dirty="0" err="1">
+                <a:solidFill>
+                  <a:srgbClr val="4A5568"/>
+                </a:solidFill>
+                <a:effectLst/>
+                <a:uFillTx/>
+                <a:latin typeface="Calibri"/>
+                <a:ea typeface="Calibri"/>
+              </a:rPr>
+              <a:t>por</a:t>
+            </a:r>
+            <a:r>
+              <a:rPr lang="en-US" sz="1100" b="0" u="none" strike="noStrike" dirty="0">
+                <a:solidFill>
+                  <a:srgbClr val="4A5568"/>
+                </a:solidFill>
+                <a:effectLst/>
+                <a:uFillTx/>
+                <a:latin typeface="Calibri"/>
+                <a:ea typeface="Calibri"/>
+              </a:rPr>
+              <a:t> </a:t>
+            </a:r>
+            <a:r>
+              <a:rPr lang="en-US" sz="1100" b="0" u="none" strike="noStrike" dirty="0" err="1">
+                <a:solidFill>
+                  <a:srgbClr val="4A5568"/>
+                </a:solidFill>
+                <a:effectLst/>
+                <a:uFillTx/>
+                <a:latin typeface="Calibri"/>
+                <a:ea typeface="Calibri"/>
+              </a:rPr>
+              <a:t>una</a:t>
+            </a:r>
+            <a:r>
+              <a:rPr lang="en-US" sz="1100" b="0" u="none" strike="noStrike" dirty="0">
+                <a:solidFill>
+                  <a:srgbClr val="4A5568"/>
+                </a:solidFill>
+                <a:effectLst/>
+                <a:uFillTx/>
+                <a:latin typeface="Calibri"/>
+                <a:ea typeface="Calibri"/>
+              </a:rPr>
+              <a:t> </a:t>
+            </a:r>
+            <a:r>
+              <a:rPr lang="en-US" sz="1100" b="0" u="none" strike="noStrike" dirty="0" err="1">
+                <a:solidFill>
+                  <a:srgbClr val="4A5568"/>
+                </a:solidFill>
+                <a:effectLst/>
+                <a:uFillTx/>
+                <a:latin typeface="Calibri"/>
+                <a:ea typeface="Calibri"/>
+              </a:rPr>
+              <a:t>tabla</a:t>
+            </a:r>
+            <a:r>
+              <a:rPr lang="en-US" sz="1100" b="0" u="none" strike="noStrike" dirty="0">
+                <a:solidFill>
+                  <a:srgbClr val="4A5568"/>
+                </a:solidFill>
+                <a:effectLst/>
+                <a:uFillTx/>
+                <a:latin typeface="Calibri"/>
+                <a:ea typeface="Calibri"/>
+              </a:rPr>
+              <a:t> </a:t>
+            </a:r>
+            <a:r>
+              <a:rPr lang="en-US" sz="1100" b="0" u="none" strike="noStrike" dirty="0" err="1">
+                <a:solidFill>
+                  <a:srgbClr val="4A5568"/>
+                </a:solidFill>
+                <a:effectLst/>
+                <a:uFillTx/>
+                <a:latin typeface="Calibri"/>
+                <a:ea typeface="Calibri"/>
+              </a:rPr>
+              <a:t>puente</a:t>
+            </a:r>
+            <a:r>
+              <a:rPr lang="en-US" sz="1100" b="0" u="none" strike="noStrike" dirty="0">
+                <a:solidFill>
+                  <a:srgbClr val="4A5568"/>
+                </a:solidFill>
+                <a:effectLst/>
+                <a:uFillTx/>
+                <a:latin typeface="Calibri"/>
+                <a:ea typeface="Calibri"/>
+              </a:rPr>
+              <a:t>.</a:t>
+            </a:r>
+            <a:endParaRPr lang="es-ES" sz="1100" b="0" u="none" strike="noStrike" dirty="0">
               <a:solidFill>
                 <a:srgbClr val="000000"/>
               </a:solidFill>
@@ -4417,8 +2819,8 @@
         </p:nvSpPr>
         <p:spPr>
           <a:xfrm>
-            <a:off x="384120" y="1691640"/>
-            <a:ext cx="2651040" cy="495000"/>
+            <a:off x="384120" y="1632167"/>
+            <a:ext cx="2651040" cy="612216"/>
           </a:xfrm>
           <a:prstGeom prst="rect">
             <a:avLst/>
@@ -4433,7 +2835,7 @@
             <a:round/>
           </a:ln>
           <a:effectLst>
-            <a:outerShdw algn="bl" blurRad="50760" dir="8100000" dist="12218" kx="0" ky="0" rotWithShape="0" sx="100000" sy="100000">
+            <a:outerShdw blurRad="50760" dist="12218" dir="8100000" algn="bl" rotWithShape="0">
               <a:srgbClr val="000000">
                 <a:alpha val="8000"/>
               </a:srgbClr>
@@ -4441,15 +2843,22 @@
           </a:effectLst>
         </p:spPr>
         <p:style>
-          <a:lnRef idx="0"/>
-          <a:fillRef idx="0"/>
-          <a:effectRef idx="0"/>
+          <a:lnRef idx="0">
+            <a:scrgbClr r="0" g="0" b="0"/>
+          </a:lnRef>
+          <a:fillRef idx="0">
+            <a:scrgbClr r="0" g="0" b="0"/>
+          </a:fillRef>
+          <a:effectRef idx="0">
+            <a:scrgbClr r="0" g="0" b="0"/>
+          </a:effectRef>
           <a:fontRef idx="minor"/>
         </p:style>
         <p:txBody>
           <a:bodyPr lIns="90000" tIns="45000" rIns="90000" bIns="45000" anchor="t">
             <a:noAutofit/>
           </a:bodyPr>
+          <a:lstStyle/>
           <a:p>
             <a:endParaRPr lang="es-ES" sz="1800" b="0" u="none" strike="noStrike">
               <a:solidFill>
@@ -4470,7 +2879,7 @@
         </p:nvSpPr>
         <p:spPr>
           <a:xfrm>
-            <a:off x="384120" y="1691640"/>
+            <a:off x="384120" y="1632168"/>
             <a:ext cx="2651040" cy="246240"/>
           </a:xfrm>
           <a:prstGeom prst="rect">
@@ -4487,15 +2896,22 @@
           </a:ln>
         </p:spPr>
         <p:style>
-          <a:lnRef idx="0"/>
-          <a:fillRef idx="0"/>
-          <a:effectRef idx="0"/>
+          <a:lnRef idx="0">
+            <a:scrgbClr r="0" g="0" b="0"/>
+          </a:lnRef>
+          <a:fillRef idx="0">
+            <a:scrgbClr r="0" g="0" b="0"/>
+          </a:fillRef>
+          <a:effectRef idx="0">
+            <a:scrgbClr r="0" g="0" b="0"/>
+          </a:effectRef>
           <a:fontRef idx="minor"/>
         </p:style>
         <p:txBody>
           <a:bodyPr lIns="90000" tIns="45000" rIns="90000" bIns="45000" anchor="t">
             <a:noAutofit/>
           </a:bodyPr>
+          <a:lstStyle/>
           <a:p>
             <a:endParaRPr lang="es-ES" sz="1800" b="0" u="none" strike="noStrike">
               <a:solidFill>
@@ -4516,7 +2932,7 @@
         </p:nvSpPr>
         <p:spPr>
           <a:xfrm>
-            <a:off x="475560" y="1691640"/>
+            <a:off x="475560" y="1632168"/>
             <a:ext cx="2468160" cy="246240"/>
           </a:xfrm>
           <a:prstGeom prst="rect">
@@ -4528,15 +2944,22 @@
           </a:ln>
         </p:spPr>
         <p:style>
-          <a:lnRef idx="0"/>
-          <a:fillRef idx="0"/>
-          <a:effectRef idx="0"/>
+          <a:lnRef idx="0">
+            <a:scrgbClr r="0" g="0" b="0"/>
+          </a:lnRef>
+          <a:fillRef idx="0">
+            <a:scrgbClr r="0" g="0" b="0"/>
+          </a:fillRef>
+          <a:effectRef idx="0">
+            <a:scrgbClr r="0" g="0" b="0"/>
+          </a:effectRef>
           <a:fontRef idx="minor"/>
         </p:style>
         <p:txBody>
           <a:bodyPr lIns="90000" tIns="45000" rIns="90000" bIns="45000" anchor="ctr">
             <a:noAutofit/>
           </a:bodyPr>
+          <a:lstStyle/>
           <a:p>
             <a:pPr defTabSz="914400">
               <a:lnSpc>
@@ -4577,7 +3000,7 @@
         </p:nvSpPr>
         <p:spPr>
           <a:xfrm>
-            <a:off x="475560" y="1956960"/>
+            <a:off x="475560" y="1897488"/>
             <a:ext cx="2468160" cy="147240"/>
           </a:xfrm>
           <a:prstGeom prst="rect">
@@ -4589,15 +3012,22 @@
           </a:ln>
         </p:spPr>
         <p:style>
-          <a:lnRef idx="0"/>
-          <a:fillRef idx="0"/>
-          <a:effectRef idx="0"/>
+          <a:lnRef idx="0">
+            <a:scrgbClr r="0" g="0" b="0"/>
+          </a:lnRef>
+          <a:fillRef idx="0">
+            <a:scrgbClr r="0" g="0" b="0"/>
+          </a:fillRef>
+          <a:effectRef idx="0">
+            <a:scrgbClr r="0" g="0" b="0"/>
+          </a:effectRef>
           <a:fontRef idx="minor"/>
         </p:style>
         <p:txBody>
           <a:bodyPr lIns="90000" tIns="45000" rIns="90000" bIns="45000" anchor="ctr">
             <a:noAutofit/>
           </a:bodyPr>
+          <a:lstStyle/>
           <a:p>
             <a:pPr defTabSz="914400">
               <a:lnSpc>
@@ -4608,7 +3038,7 @@
               </a:tabLst>
             </a:pPr>
             <a:r>
-              <a:rPr lang="en-US" sz="850" b="0" u="none" strike="noStrike">
+              <a:rPr lang="en-US" sz="850" b="0" u="none" strike="noStrike" dirty="0">
                 <a:solidFill>
                   <a:srgbClr val="1C2B4A"/>
                 </a:solidFill>
@@ -4617,9 +3047,33 @@
                 <a:latin typeface="Calibri"/>
                 <a:ea typeface="Calibri"/>
               </a:rPr>
-              <a:t>🔑 id_sede  PK  SERIAL</a:t>
-            </a:r>
-            <a:endParaRPr lang="es-ES" sz="850" b="0" u="none" strike="noStrike">
+              <a:t>🔑 </a:t>
+            </a:r>
+            <a:r>
+              <a:rPr lang="en-US" sz="850" b="0" u="none" strike="noStrike" dirty="0" err="1">
+                <a:solidFill>
+                  <a:srgbClr val="1C2B4A"/>
+                </a:solidFill>
+                <a:effectLst/>
+                <a:uFillTx/>
+                <a:latin typeface="Calibri"/>
+                <a:ea typeface="Calibri"/>
+              </a:rPr>
+              <a:t>id_sede</a:t>
+            </a:r>
+            <a:r>
+              <a:rPr lang="en-US" sz="850" b="0" u="none" strike="noStrike" dirty="0">
+                <a:solidFill>
+                  <a:srgbClr val="1C2B4A"/>
+                </a:solidFill>
+                <a:effectLst/>
+                <a:uFillTx/>
+                <a:latin typeface="Calibri"/>
+                <a:ea typeface="Calibri"/>
+              </a:rPr>
+              <a:t>  PK  SERIAL</a:t>
+            </a:r>
+            <a:endParaRPr lang="es-ES" sz="850" b="0" u="none" strike="noStrike" dirty="0">
               <a:solidFill>
                 <a:srgbClr val="000000"/>
               </a:solidFill>
@@ -4638,7 +3092,7 @@
         </p:nvSpPr>
         <p:spPr>
           <a:xfrm>
-            <a:off x="475560" y="2123280"/>
+            <a:off x="475560" y="2063808"/>
             <a:ext cx="2468160" cy="129240"/>
           </a:xfrm>
           <a:prstGeom prst="rect">
@@ -4650,15 +3104,22 @@
           </a:ln>
         </p:spPr>
         <p:style>
-          <a:lnRef idx="0"/>
-          <a:fillRef idx="0"/>
-          <a:effectRef idx="0"/>
+          <a:lnRef idx="0">
+            <a:scrgbClr r="0" g="0" b="0"/>
+          </a:lnRef>
+          <a:fillRef idx="0">
+            <a:scrgbClr r="0" g="0" b="0"/>
+          </a:fillRef>
+          <a:effectRef idx="0">
+            <a:scrgbClr r="0" g="0" b="0"/>
+          </a:effectRef>
           <a:fontRef idx="minor"/>
         </p:style>
         <p:txBody>
           <a:bodyPr lIns="90000" tIns="45000" rIns="90000" bIns="45000" anchor="ctr">
             <a:noAutofit/>
           </a:bodyPr>
+          <a:lstStyle/>
           <a:p>
             <a:pPr defTabSz="914400">
               <a:lnSpc>
@@ -4699,8 +3160,8 @@
         </p:nvSpPr>
         <p:spPr>
           <a:xfrm>
-            <a:off x="384120" y="2237400"/>
-            <a:ext cx="2651040" cy="495000"/>
+            <a:off x="384120" y="2327081"/>
+            <a:ext cx="2651040" cy="623944"/>
           </a:xfrm>
           <a:prstGeom prst="rect">
             <a:avLst/>
@@ -4715,7 +3176,7 @@
             <a:round/>
           </a:ln>
           <a:effectLst>
-            <a:outerShdw algn="bl" blurRad="50760" dir="8100000" dist="12218" kx="0" ky="0" rotWithShape="0" sx="100000" sy="100000">
+            <a:outerShdw blurRad="50760" dist="12218" dir="8100000" algn="bl" rotWithShape="0">
               <a:srgbClr val="000000">
                 <a:alpha val="8000"/>
               </a:srgbClr>
@@ -4723,15 +3184,22 @@
           </a:effectLst>
         </p:spPr>
         <p:style>
-          <a:lnRef idx="0"/>
-          <a:fillRef idx="0"/>
-          <a:effectRef idx="0"/>
+          <a:lnRef idx="0">
+            <a:scrgbClr r="0" g="0" b="0"/>
+          </a:lnRef>
+          <a:fillRef idx="0">
+            <a:scrgbClr r="0" g="0" b="0"/>
+          </a:fillRef>
+          <a:effectRef idx="0">
+            <a:scrgbClr r="0" g="0" b="0"/>
+          </a:effectRef>
           <a:fontRef idx="minor"/>
         </p:style>
         <p:txBody>
           <a:bodyPr lIns="90000" tIns="45000" rIns="90000" bIns="45000" anchor="t">
             <a:noAutofit/>
           </a:bodyPr>
+          <a:lstStyle/>
           <a:p>
             <a:endParaRPr lang="es-ES" sz="1800" b="0" u="none" strike="noStrike">
               <a:solidFill>
@@ -4752,7 +3220,7 @@
         </p:nvSpPr>
         <p:spPr>
           <a:xfrm>
-            <a:off x="384120" y="2237400"/>
+            <a:off x="384120" y="2327082"/>
             <a:ext cx="2651040" cy="246240"/>
           </a:xfrm>
           <a:prstGeom prst="rect">
@@ -4769,15 +3237,22 @@
           </a:ln>
         </p:spPr>
         <p:style>
-          <a:lnRef idx="0"/>
-          <a:fillRef idx="0"/>
-          <a:effectRef idx="0"/>
+          <a:lnRef idx="0">
+            <a:scrgbClr r="0" g="0" b="0"/>
+          </a:lnRef>
+          <a:fillRef idx="0">
+            <a:scrgbClr r="0" g="0" b="0"/>
+          </a:fillRef>
+          <a:effectRef idx="0">
+            <a:scrgbClr r="0" g="0" b="0"/>
+          </a:effectRef>
           <a:fontRef idx="minor"/>
         </p:style>
         <p:txBody>
           <a:bodyPr lIns="90000" tIns="45000" rIns="90000" bIns="45000" anchor="t">
             <a:noAutofit/>
           </a:bodyPr>
+          <a:lstStyle/>
           <a:p>
             <a:endParaRPr lang="es-ES" sz="1800" b="0" u="none" strike="noStrike">
               <a:solidFill>
@@ -4798,7 +3273,7 @@
         </p:nvSpPr>
         <p:spPr>
           <a:xfrm>
-            <a:off x="475560" y="2237400"/>
+            <a:off x="475560" y="2327082"/>
             <a:ext cx="2468160" cy="246240"/>
           </a:xfrm>
           <a:prstGeom prst="rect">
@@ -4810,15 +3285,22 @@
           </a:ln>
         </p:spPr>
         <p:style>
-          <a:lnRef idx="0"/>
-          <a:fillRef idx="0"/>
-          <a:effectRef idx="0"/>
+          <a:lnRef idx="0">
+            <a:scrgbClr r="0" g="0" b="0"/>
+          </a:lnRef>
+          <a:fillRef idx="0">
+            <a:scrgbClr r="0" g="0" b="0"/>
+          </a:fillRef>
+          <a:effectRef idx="0">
+            <a:scrgbClr r="0" g="0" b="0"/>
+          </a:effectRef>
           <a:fontRef idx="minor"/>
         </p:style>
         <p:txBody>
           <a:bodyPr lIns="90000" tIns="45000" rIns="90000" bIns="45000" anchor="ctr">
             <a:noAutofit/>
           </a:bodyPr>
+          <a:lstStyle/>
           <a:p>
             <a:pPr defTabSz="914400">
               <a:lnSpc>
@@ -4859,7 +3341,7 @@
         </p:nvSpPr>
         <p:spPr>
           <a:xfrm>
-            <a:off x="475560" y="2502720"/>
+            <a:off x="475560" y="2592402"/>
             <a:ext cx="2468160" cy="147240"/>
           </a:xfrm>
           <a:prstGeom prst="rect">
@@ -4871,15 +3353,22 @@
           </a:ln>
         </p:spPr>
         <p:style>
-          <a:lnRef idx="0"/>
-          <a:fillRef idx="0"/>
-          <a:effectRef idx="0"/>
+          <a:lnRef idx="0">
+            <a:scrgbClr r="0" g="0" b="0"/>
+          </a:lnRef>
+          <a:fillRef idx="0">
+            <a:scrgbClr r="0" g="0" b="0"/>
+          </a:fillRef>
+          <a:effectRef idx="0">
+            <a:scrgbClr r="0" g="0" b="0"/>
+          </a:effectRef>
           <a:fontRef idx="minor"/>
         </p:style>
         <p:txBody>
           <a:bodyPr lIns="90000" tIns="45000" rIns="90000" bIns="45000" anchor="ctr">
             <a:noAutofit/>
           </a:bodyPr>
+          <a:lstStyle/>
           <a:p>
             <a:pPr defTabSz="914400">
               <a:lnSpc>
@@ -4920,7 +3409,7 @@
         </p:nvSpPr>
         <p:spPr>
           <a:xfrm>
-            <a:off x="475560" y="2669040"/>
+            <a:off x="475560" y="2758722"/>
             <a:ext cx="2468160" cy="129240"/>
           </a:xfrm>
           <a:prstGeom prst="rect">
@@ -4932,15 +3421,22 @@
           </a:ln>
         </p:spPr>
         <p:style>
-          <a:lnRef idx="0"/>
-          <a:fillRef idx="0"/>
-          <a:effectRef idx="0"/>
+          <a:lnRef idx="0">
+            <a:scrgbClr r="0" g="0" b="0"/>
+          </a:lnRef>
+          <a:fillRef idx="0">
+            <a:scrgbClr r="0" g="0" b="0"/>
+          </a:fillRef>
+          <a:effectRef idx="0">
+            <a:scrgbClr r="0" g="0" b="0"/>
+          </a:effectRef>
           <a:fontRef idx="minor"/>
         </p:style>
         <p:txBody>
           <a:bodyPr lIns="90000" tIns="45000" rIns="90000" bIns="45000" anchor="ctr">
             <a:noAutofit/>
           </a:bodyPr>
+          <a:lstStyle/>
           <a:p>
             <a:pPr defTabSz="914400">
               <a:lnSpc>
@@ -4951,7 +3447,7 @@
               </a:tabLst>
             </a:pPr>
             <a:r>
-              <a:rPr lang="en-US" sz="800" b="0" u="none" strike="noStrike">
+              <a:rPr lang="en-US" sz="800" b="0" u="none" strike="noStrike" dirty="0">
                 <a:solidFill>
                   <a:srgbClr val="4A5568"/>
                 </a:solidFill>
@@ -4960,9 +3456,33 @@
                 <a:latin typeface="Calibri"/>
                 <a:ea typeface="Calibri"/>
               </a:rPr>
-              <a:t>  nombre VARCHAR</a:t>
-            </a:r>
-            <a:endParaRPr lang="es-ES" sz="800" b="0" u="none" strike="noStrike">
+              <a:t>  </a:t>
+            </a:r>
+            <a:r>
+              <a:rPr lang="en-US" sz="800" b="0" u="none" strike="noStrike" dirty="0" err="1">
+                <a:solidFill>
+                  <a:srgbClr val="4A5568"/>
+                </a:solidFill>
+                <a:effectLst/>
+                <a:uFillTx/>
+                <a:latin typeface="Calibri"/>
+                <a:ea typeface="Calibri"/>
+              </a:rPr>
+              <a:t>nombre</a:t>
+            </a:r>
+            <a:r>
+              <a:rPr lang="en-US" sz="800" b="0" u="none" strike="noStrike" dirty="0">
+                <a:solidFill>
+                  <a:srgbClr val="4A5568"/>
+                </a:solidFill>
+                <a:effectLst/>
+                <a:uFillTx/>
+                <a:latin typeface="Calibri"/>
+                <a:ea typeface="Calibri"/>
+              </a:rPr>
+              <a:t> VARCHAR</a:t>
+            </a:r>
+            <a:endParaRPr lang="es-ES" sz="800" b="0" u="none" strike="noStrike" dirty="0">
               <a:solidFill>
                 <a:srgbClr val="000000"/>
               </a:solidFill>
@@ -4981,8 +3501,8 @@
         </p:nvSpPr>
         <p:spPr>
           <a:xfrm>
-            <a:off x="384120" y="2783520"/>
-            <a:ext cx="2651040" cy="624600"/>
+            <a:off x="384120" y="3033723"/>
+            <a:ext cx="2651040" cy="781920"/>
           </a:xfrm>
           <a:prstGeom prst="rect">
             <a:avLst/>
@@ -4997,7 +3517,7 @@
             <a:round/>
           </a:ln>
           <a:effectLst>
-            <a:outerShdw algn="bl" blurRad="50760" dir="8100000" dist="12218" kx="0" ky="0" rotWithShape="0" sx="100000" sy="100000">
+            <a:outerShdw blurRad="50760" dist="12218" dir="8100000" algn="bl" rotWithShape="0">
               <a:srgbClr val="000000">
                 <a:alpha val="8000"/>
               </a:srgbClr>
@@ -5005,15 +3525,22 @@
           </a:effectLst>
         </p:spPr>
         <p:style>
-          <a:lnRef idx="0"/>
-          <a:fillRef idx="0"/>
-          <a:effectRef idx="0"/>
+          <a:lnRef idx="0">
+            <a:scrgbClr r="0" g="0" b="0"/>
+          </a:lnRef>
+          <a:fillRef idx="0">
+            <a:scrgbClr r="0" g="0" b="0"/>
+          </a:fillRef>
+          <a:effectRef idx="0">
+            <a:scrgbClr r="0" g="0" b="0"/>
+          </a:effectRef>
           <a:fontRef idx="minor"/>
         </p:style>
         <p:txBody>
           <a:bodyPr lIns="90000" tIns="45000" rIns="90000" bIns="45000" anchor="t">
             <a:noAutofit/>
           </a:bodyPr>
+          <a:lstStyle/>
           <a:p>
             <a:endParaRPr lang="es-ES" sz="1800" b="0" u="none" strike="noStrike">
               <a:solidFill>
@@ -5034,7 +3561,7 @@
         </p:nvSpPr>
         <p:spPr>
           <a:xfrm>
-            <a:off x="384120" y="2783520"/>
+            <a:off x="384120" y="3033723"/>
             <a:ext cx="2651040" cy="246240"/>
           </a:xfrm>
           <a:prstGeom prst="rect">
@@ -5051,15 +3578,22 @@
           </a:ln>
         </p:spPr>
         <p:style>
-          <a:lnRef idx="0"/>
-          <a:fillRef idx="0"/>
-          <a:effectRef idx="0"/>
+          <a:lnRef idx="0">
+            <a:scrgbClr r="0" g="0" b="0"/>
+          </a:lnRef>
+          <a:fillRef idx="0">
+            <a:scrgbClr r="0" g="0" b="0"/>
+          </a:fillRef>
+          <a:effectRef idx="0">
+            <a:scrgbClr r="0" g="0" b="0"/>
+          </a:effectRef>
           <a:fontRef idx="minor"/>
         </p:style>
         <p:txBody>
           <a:bodyPr lIns="90000" tIns="45000" rIns="90000" bIns="45000" anchor="t">
             <a:noAutofit/>
           </a:bodyPr>
+          <a:lstStyle/>
           <a:p>
             <a:endParaRPr lang="es-ES" sz="1800" b="0" u="none" strike="noStrike">
               <a:solidFill>
@@ -5080,7 +3614,7 @@
         </p:nvSpPr>
         <p:spPr>
           <a:xfrm>
-            <a:off x="475560" y="2783520"/>
+            <a:off x="475560" y="3033723"/>
             <a:ext cx="2468160" cy="246240"/>
           </a:xfrm>
           <a:prstGeom prst="rect">
@@ -5092,15 +3626,22 @@
           </a:ln>
         </p:spPr>
         <p:style>
-          <a:lnRef idx="0"/>
-          <a:fillRef idx="0"/>
-          <a:effectRef idx="0"/>
+          <a:lnRef idx="0">
+            <a:scrgbClr r="0" g="0" b="0"/>
+          </a:lnRef>
+          <a:fillRef idx="0">
+            <a:scrgbClr r="0" g="0" b="0"/>
+          </a:fillRef>
+          <a:effectRef idx="0">
+            <a:scrgbClr r="0" g="0" b="0"/>
+          </a:effectRef>
           <a:fontRef idx="minor"/>
         </p:style>
         <p:txBody>
           <a:bodyPr lIns="90000" tIns="45000" rIns="90000" bIns="45000" anchor="ctr">
             <a:noAutofit/>
           </a:bodyPr>
+          <a:lstStyle/>
           <a:p>
             <a:pPr defTabSz="914400">
               <a:lnSpc>
@@ -5141,7 +3682,7 @@
         </p:nvSpPr>
         <p:spPr>
           <a:xfrm>
-            <a:off x="475560" y="3048480"/>
+            <a:off x="475560" y="3298683"/>
             <a:ext cx="2468160" cy="147240"/>
           </a:xfrm>
           <a:prstGeom prst="rect">
@@ -5153,15 +3694,22 @@
           </a:ln>
         </p:spPr>
         <p:style>
-          <a:lnRef idx="0"/>
-          <a:fillRef idx="0"/>
-          <a:effectRef idx="0"/>
+          <a:lnRef idx="0">
+            <a:scrgbClr r="0" g="0" b="0"/>
+          </a:lnRef>
+          <a:fillRef idx="0">
+            <a:scrgbClr r="0" g="0" b="0"/>
+          </a:fillRef>
+          <a:effectRef idx="0">
+            <a:scrgbClr r="0" g="0" b="0"/>
+          </a:effectRef>
           <a:fontRef idx="minor"/>
         </p:style>
         <p:txBody>
           <a:bodyPr lIns="90000" tIns="45000" rIns="90000" bIns="45000" anchor="ctr">
             <a:noAutofit/>
           </a:bodyPr>
+          <a:lstStyle/>
           <a:p>
             <a:pPr defTabSz="914400">
               <a:lnSpc>
@@ -5202,7 +3750,7 @@
         </p:nvSpPr>
         <p:spPr>
           <a:xfrm>
-            <a:off x="475560" y="3215160"/>
+            <a:off x="475560" y="3465363"/>
             <a:ext cx="2468160" cy="129240"/>
           </a:xfrm>
           <a:prstGeom prst="rect">
@@ -5214,15 +3762,22 @@
           </a:ln>
         </p:spPr>
         <p:style>
-          <a:lnRef idx="0"/>
-          <a:fillRef idx="0"/>
-          <a:effectRef idx="0"/>
+          <a:lnRef idx="0">
+            <a:scrgbClr r="0" g="0" b="0"/>
+          </a:lnRef>
+          <a:fillRef idx="0">
+            <a:scrgbClr r="0" g="0" b="0"/>
+          </a:fillRef>
+          <a:effectRef idx="0">
+            <a:scrgbClr r="0" g="0" b="0"/>
+          </a:effectRef>
           <a:fontRef idx="minor"/>
         </p:style>
         <p:txBody>
           <a:bodyPr lIns="90000" tIns="45000" rIns="90000" bIns="45000" anchor="ctr">
             <a:noAutofit/>
           </a:bodyPr>
+          <a:lstStyle/>
           <a:p>
             <a:pPr defTabSz="914400">
               <a:lnSpc>
@@ -5263,7 +3818,7 @@
         </p:nvSpPr>
         <p:spPr>
           <a:xfrm>
-            <a:off x="475560" y="3344760"/>
+            <a:off x="475560" y="3594963"/>
             <a:ext cx="2468160" cy="129240"/>
           </a:xfrm>
           <a:prstGeom prst="rect">
@@ -5275,15 +3830,22 @@
           </a:ln>
         </p:spPr>
         <p:style>
-          <a:lnRef idx="0"/>
-          <a:fillRef idx="0"/>
-          <a:effectRef idx="0"/>
+          <a:lnRef idx="0">
+            <a:scrgbClr r="0" g="0" b="0"/>
+          </a:lnRef>
+          <a:fillRef idx="0">
+            <a:scrgbClr r="0" g="0" b="0"/>
+          </a:fillRef>
+          <a:effectRef idx="0">
+            <a:scrgbClr r="0" g="0" b="0"/>
+          </a:effectRef>
           <a:fontRef idx="minor"/>
         </p:style>
         <p:txBody>
           <a:bodyPr lIns="90000" tIns="45000" rIns="90000" bIns="45000" anchor="ctr">
             <a:noAutofit/>
           </a:bodyPr>
+          <a:lstStyle/>
           <a:p>
             <a:pPr defTabSz="914400">
               <a:lnSpc>
@@ -5294,7 +3856,7 @@
               </a:tabLst>
             </a:pPr>
             <a:r>
-              <a:rPr lang="en-US" sz="800" b="0" u="none" strike="noStrike">
+              <a:rPr lang="en-US" sz="800" b="0" u="none" strike="noStrike" dirty="0">
                 <a:solidFill>
                   <a:srgbClr val="4A5568"/>
                 </a:solidFill>
@@ -5303,9 +3865,33 @@
                 <a:latin typeface="Calibri"/>
                 <a:ea typeface="Calibri"/>
               </a:rPr>
-              <a:t>  nombre VARCHAR</a:t>
-            </a:r>
-            <a:endParaRPr lang="es-ES" sz="800" b="0" u="none" strike="noStrike">
+              <a:t>  </a:t>
+            </a:r>
+            <a:r>
+              <a:rPr lang="en-US" sz="800" b="0" u="none" strike="noStrike" dirty="0" err="1">
+                <a:solidFill>
+                  <a:srgbClr val="4A5568"/>
+                </a:solidFill>
+                <a:effectLst/>
+                <a:uFillTx/>
+                <a:latin typeface="Calibri"/>
+                <a:ea typeface="Calibri"/>
+              </a:rPr>
+              <a:t>nombre</a:t>
+            </a:r>
+            <a:r>
+              <a:rPr lang="en-US" sz="800" b="0" u="none" strike="noStrike" dirty="0">
+                <a:solidFill>
+                  <a:srgbClr val="4A5568"/>
+                </a:solidFill>
+                <a:effectLst/>
+                <a:uFillTx/>
+                <a:latin typeface="Calibri"/>
+                <a:ea typeface="Calibri"/>
+              </a:rPr>
+              <a:t> VARCHAR</a:t>
+            </a:r>
+            <a:endParaRPr lang="es-ES" sz="800" b="0" u="none" strike="noStrike" dirty="0">
               <a:solidFill>
                 <a:srgbClr val="000000"/>
               </a:solidFill>
@@ -5324,8 +3910,8 @@
         </p:nvSpPr>
         <p:spPr>
           <a:xfrm>
-            <a:off x="384120" y="3459240"/>
-            <a:ext cx="2651040" cy="624600"/>
+            <a:off x="384120" y="3904848"/>
+            <a:ext cx="2651040" cy="792000"/>
           </a:xfrm>
           <a:prstGeom prst="rect">
             <a:avLst/>
@@ -5340,7 +3926,7 @@
             <a:round/>
           </a:ln>
           <a:effectLst>
-            <a:outerShdw algn="bl" blurRad="50760" dir="8100000" dist="12218" kx="0" ky="0" rotWithShape="0" sx="100000" sy="100000">
+            <a:outerShdw blurRad="50760" dist="12218" dir="8100000" algn="bl" rotWithShape="0">
               <a:srgbClr val="000000">
                 <a:alpha val="8000"/>
               </a:srgbClr>
@@ -5348,15 +3934,22 @@
           </a:effectLst>
         </p:spPr>
         <p:style>
-          <a:lnRef idx="0"/>
-          <a:fillRef idx="0"/>
-          <a:effectRef idx="0"/>
+          <a:lnRef idx="0">
+            <a:scrgbClr r="0" g="0" b="0"/>
+          </a:lnRef>
+          <a:fillRef idx="0">
+            <a:scrgbClr r="0" g="0" b="0"/>
+          </a:fillRef>
+          <a:effectRef idx="0">
+            <a:scrgbClr r="0" g="0" b="0"/>
+          </a:effectRef>
           <a:fontRef idx="minor"/>
         </p:style>
         <p:txBody>
           <a:bodyPr lIns="90000" tIns="45000" rIns="90000" bIns="45000" anchor="t">
             <a:noAutofit/>
           </a:bodyPr>
+          <a:lstStyle/>
           <a:p>
             <a:endParaRPr lang="es-ES" sz="1800" b="0" u="none" strike="noStrike">
               <a:solidFill>
@@ -5377,7 +3970,7 @@
         </p:nvSpPr>
         <p:spPr>
           <a:xfrm>
-            <a:off x="384120" y="3459240"/>
+            <a:off x="384120" y="3904848"/>
             <a:ext cx="2651040" cy="246240"/>
           </a:xfrm>
           <a:prstGeom prst="rect">
@@ -5394,15 +3987,22 @@
           </a:ln>
         </p:spPr>
         <p:style>
-          <a:lnRef idx="0"/>
-          <a:fillRef idx="0"/>
-          <a:effectRef idx="0"/>
+          <a:lnRef idx="0">
+            <a:scrgbClr r="0" g="0" b="0"/>
+          </a:lnRef>
+          <a:fillRef idx="0">
+            <a:scrgbClr r="0" g="0" b="0"/>
+          </a:fillRef>
+          <a:effectRef idx="0">
+            <a:scrgbClr r="0" g="0" b="0"/>
+          </a:effectRef>
           <a:fontRef idx="minor"/>
         </p:style>
         <p:txBody>
           <a:bodyPr lIns="90000" tIns="45000" rIns="90000" bIns="45000" anchor="t">
             <a:noAutofit/>
           </a:bodyPr>
+          <a:lstStyle/>
           <a:p>
             <a:endParaRPr lang="es-ES" sz="1800" b="0" u="none" strike="noStrike">
               <a:solidFill>
@@ -5423,7 +4023,7 @@
         </p:nvSpPr>
         <p:spPr>
           <a:xfrm>
-            <a:off x="475560" y="3459240"/>
+            <a:off x="475560" y="3904848"/>
             <a:ext cx="2468160" cy="246240"/>
           </a:xfrm>
           <a:prstGeom prst="rect">
@@ -5435,15 +4035,22 @@
           </a:ln>
         </p:spPr>
         <p:style>
-          <a:lnRef idx="0"/>
-          <a:fillRef idx="0"/>
-          <a:effectRef idx="0"/>
+          <a:lnRef idx="0">
+            <a:scrgbClr r="0" g="0" b="0"/>
+          </a:lnRef>
+          <a:fillRef idx="0">
+            <a:scrgbClr r="0" g="0" b="0"/>
+          </a:fillRef>
+          <a:effectRef idx="0">
+            <a:scrgbClr r="0" g="0" b="0"/>
+          </a:effectRef>
           <a:fontRef idx="minor"/>
         </p:style>
         <p:txBody>
           <a:bodyPr lIns="90000" tIns="45000" rIns="90000" bIns="45000" anchor="ctr">
             <a:noAutofit/>
           </a:bodyPr>
+          <a:lstStyle/>
           <a:p>
             <a:pPr defTabSz="914400">
               <a:lnSpc>
@@ -5484,7 +4091,7 @@
         </p:nvSpPr>
         <p:spPr>
           <a:xfrm>
-            <a:off x="475560" y="3724200"/>
+            <a:off x="475560" y="4169808"/>
             <a:ext cx="2468160" cy="147240"/>
           </a:xfrm>
           <a:prstGeom prst="rect">
@@ -5496,15 +4103,22 @@
           </a:ln>
         </p:spPr>
         <p:style>
-          <a:lnRef idx="0"/>
-          <a:fillRef idx="0"/>
-          <a:effectRef idx="0"/>
+          <a:lnRef idx="0">
+            <a:scrgbClr r="0" g="0" b="0"/>
+          </a:lnRef>
+          <a:fillRef idx="0">
+            <a:scrgbClr r="0" g="0" b="0"/>
+          </a:fillRef>
+          <a:effectRef idx="0">
+            <a:scrgbClr r="0" g="0" b="0"/>
+          </a:effectRef>
           <a:fontRef idx="minor"/>
         </p:style>
         <p:txBody>
           <a:bodyPr lIns="90000" tIns="45000" rIns="90000" bIns="45000" anchor="ctr">
             <a:noAutofit/>
           </a:bodyPr>
+          <a:lstStyle/>
           <a:p>
             <a:pPr defTabSz="914400">
               <a:lnSpc>
@@ -5545,7 +4159,7 @@
         </p:nvSpPr>
         <p:spPr>
           <a:xfrm>
-            <a:off x="475560" y="3890880"/>
+            <a:off x="475560" y="4336488"/>
             <a:ext cx="2468160" cy="129240"/>
           </a:xfrm>
           <a:prstGeom prst="rect">
@@ -5557,15 +4171,22 @@
           </a:ln>
         </p:spPr>
         <p:style>
-          <a:lnRef idx="0"/>
-          <a:fillRef idx="0"/>
-          <a:effectRef idx="0"/>
+          <a:lnRef idx="0">
+            <a:scrgbClr r="0" g="0" b="0"/>
+          </a:lnRef>
+          <a:fillRef idx="0">
+            <a:scrgbClr r="0" g="0" b="0"/>
+          </a:fillRef>
+          <a:effectRef idx="0">
+            <a:scrgbClr r="0" g="0" b="0"/>
+          </a:effectRef>
           <a:fontRef idx="minor"/>
         </p:style>
         <p:txBody>
           <a:bodyPr lIns="90000" tIns="45000" rIns="90000" bIns="45000" anchor="ctr">
             <a:noAutofit/>
           </a:bodyPr>
+          <a:lstStyle/>
           <a:p>
             <a:pPr defTabSz="914400">
               <a:lnSpc>
@@ -5606,7 +4227,7 @@
         </p:nvSpPr>
         <p:spPr>
           <a:xfrm>
-            <a:off x="475560" y="4020480"/>
+            <a:off x="475560" y="4466088"/>
             <a:ext cx="2468160" cy="129240"/>
           </a:xfrm>
           <a:prstGeom prst="rect">
@@ -5618,15 +4239,22 @@
           </a:ln>
         </p:spPr>
         <p:style>
-          <a:lnRef idx="0"/>
-          <a:fillRef idx="0"/>
-          <a:effectRef idx="0"/>
+          <a:lnRef idx="0">
+            <a:scrgbClr r="0" g="0" b="0"/>
+          </a:lnRef>
+          <a:fillRef idx="0">
+            <a:scrgbClr r="0" g="0" b="0"/>
+          </a:fillRef>
+          <a:effectRef idx="0">
+            <a:scrgbClr r="0" g="0" b="0"/>
+          </a:effectRef>
           <a:fontRef idx="minor"/>
         </p:style>
         <p:txBody>
           <a:bodyPr lIns="90000" tIns="45000" rIns="90000" bIns="45000" anchor="ctr">
             <a:noAutofit/>
           </a:bodyPr>
+          <a:lstStyle/>
           <a:p>
             <a:pPr defTabSz="914400">
               <a:lnSpc>
@@ -5667,8 +4295,8 @@
         </p:nvSpPr>
         <p:spPr>
           <a:xfrm>
-            <a:off x="3246120" y="1691640"/>
-            <a:ext cx="2651040" cy="624600"/>
+            <a:off x="3246120" y="1632168"/>
+            <a:ext cx="2651040" cy="754560"/>
           </a:xfrm>
           <a:prstGeom prst="rect">
             <a:avLst/>
@@ -5683,7 +4311,7 @@
             <a:round/>
           </a:ln>
           <a:effectLst>
-            <a:outerShdw algn="bl" blurRad="50760" dir="8100000" dist="12218" kx="0" ky="0" rotWithShape="0" sx="100000" sy="100000">
+            <a:outerShdw blurRad="50760" dist="12218" dir="8100000" algn="bl" rotWithShape="0">
               <a:srgbClr val="000000">
                 <a:alpha val="8000"/>
               </a:srgbClr>
@@ -5691,15 +4319,22 @@
           </a:effectLst>
         </p:spPr>
         <p:style>
-          <a:lnRef idx="0"/>
-          <a:fillRef idx="0"/>
-          <a:effectRef idx="0"/>
+          <a:lnRef idx="0">
+            <a:scrgbClr r="0" g="0" b="0"/>
+          </a:lnRef>
+          <a:fillRef idx="0">
+            <a:scrgbClr r="0" g="0" b="0"/>
+          </a:fillRef>
+          <a:effectRef idx="0">
+            <a:scrgbClr r="0" g="0" b="0"/>
+          </a:effectRef>
           <a:fontRef idx="minor"/>
         </p:style>
         <p:txBody>
           <a:bodyPr lIns="90000" tIns="45000" rIns="90000" bIns="45000" anchor="t">
             <a:noAutofit/>
           </a:bodyPr>
+          <a:lstStyle/>
           <a:p>
             <a:endParaRPr lang="es-ES" sz="1800" b="0" u="none" strike="noStrike">
               <a:solidFill>
@@ -5720,7 +4355,7 @@
         </p:nvSpPr>
         <p:spPr>
           <a:xfrm>
-            <a:off x="3246120" y="1691640"/>
+            <a:off x="3246120" y="1632168"/>
             <a:ext cx="2651040" cy="246240"/>
           </a:xfrm>
           <a:prstGeom prst="rect">
@@ -5737,15 +4372,22 @@
           </a:ln>
         </p:spPr>
         <p:style>
-          <a:lnRef idx="0"/>
-          <a:fillRef idx="0"/>
-          <a:effectRef idx="0"/>
+          <a:lnRef idx="0">
+            <a:scrgbClr r="0" g="0" b="0"/>
+          </a:lnRef>
+          <a:fillRef idx="0">
+            <a:scrgbClr r="0" g="0" b="0"/>
+          </a:fillRef>
+          <a:effectRef idx="0">
+            <a:scrgbClr r="0" g="0" b="0"/>
+          </a:effectRef>
           <a:fontRef idx="minor"/>
         </p:style>
         <p:txBody>
           <a:bodyPr lIns="90000" tIns="45000" rIns="90000" bIns="45000" anchor="t">
             <a:noAutofit/>
           </a:bodyPr>
+          <a:lstStyle/>
           <a:p>
             <a:endParaRPr lang="es-ES" sz="1800" b="0" u="none" strike="noStrike">
               <a:solidFill>
@@ -5766,7 +4408,7 @@
         </p:nvSpPr>
         <p:spPr>
           <a:xfrm>
-            <a:off x="3337560" y="1691640"/>
+            <a:off x="3337560" y="1632168"/>
             <a:ext cx="2468160" cy="246240"/>
           </a:xfrm>
           <a:prstGeom prst="rect">
@@ -5778,15 +4420,22 @@
           </a:ln>
         </p:spPr>
         <p:style>
-          <a:lnRef idx="0"/>
-          <a:fillRef idx="0"/>
-          <a:effectRef idx="0"/>
+          <a:lnRef idx="0">
+            <a:scrgbClr r="0" g="0" b="0"/>
+          </a:lnRef>
+          <a:fillRef idx="0">
+            <a:scrgbClr r="0" g="0" b="0"/>
+          </a:fillRef>
+          <a:effectRef idx="0">
+            <a:scrgbClr r="0" g="0" b="0"/>
+          </a:effectRef>
           <a:fontRef idx="minor"/>
         </p:style>
         <p:txBody>
           <a:bodyPr lIns="90000" tIns="45000" rIns="90000" bIns="45000" anchor="ctr">
             <a:noAutofit/>
           </a:bodyPr>
+          <a:lstStyle/>
           <a:p>
             <a:pPr defTabSz="914400">
               <a:lnSpc>
@@ -5827,7 +4476,7 @@
         </p:nvSpPr>
         <p:spPr>
           <a:xfrm>
-            <a:off x="3337560" y="1956960"/>
+            <a:off x="3337560" y="1897488"/>
             <a:ext cx="2468160" cy="147240"/>
           </a:xfrm>
           <a:prstGeom prst="rect">
@@ -5839,15 +4488,22 @@
           </a:ln>
         </p:spPr>
         <p:style>
-          <a:lnRef idx="0"/>
-          <a:fillRef idx="0"/>
-          <a:effectRef idx="0"/>
+          <a:lnRef idx="0">
+            <a:scrgbClr r="0" g="0" b="0"/>
+          </a:lnRef>
+          <a:fillRef idx="0">
+            <a:scrgbClr r="0" g="0" b="0"/>
+          </a:fillRef>
+          <a:effectRef idx="0">
+            <a:scrgbClr r="0" g="0" b="0"/>
+          </a:effectRef>
           <a:fontRef idx="minor"/>
         </p:style>
         <p:txBody>
           <a:bodyPr lIns="90000" tIns="45000" rIns="90000" bIns="45000" anchor="ctr">
             <a:noAutofit/>
           </a:bodyPr>
+          <a:lstStyle/>
           <a:p>
             <a:pPr defTabSz="914400">
               <a:lnSpc>
@@ -5888,7 +4544,7 @@
         </p:nvSpPr>
         <p:spPr>
           <a:xfrm>
-            <a:off x="3337560" y="2123280"/>
+            <a:off x="3337560" y="2063808"/>
             <a:ext cx="2468160" cy="129240"/>
           </a:xfrm>
           <a:prstGeom prst="rect">
@@ -5900,15 +4556,22 @@
           </a:ln>
         </p:spPr>
         <p:style>
-          <a:lnRef idx="0"/>
-          <a:fillRef idx="0"/>
-          <a:effectRef idx="0"/>
+          <a:lnRef idx="0">
+            <a:scrgbClr r="0" g="0" b="0"/>
+          </a:lnRef>
+          <a:fillRef idx="0">
+            <a:scrgbClr r="0" g="0" b="0"/>
+          </a:fillRef>
+          <a:effectRef idx="0">
+            <a:scrgbClr r="0" g="0" b="0"/>
+          </a:effectRef>
           <a:fontRef idx="minor"/>
         </p:style>
         <p:txBody>
           <a:bodyPr lIns="90000" tIns="45000" rIns="90000" bIns="45000" anchor="ctr">
             <a:noAutofit/>
           </a:bodyPr>
+          <a:lstStyle/>
           <a:p>
             <a:pPr defTabSz="914400">
               <a:lnSpc>
@@ -5949,7 +4612,7 @@
         </p:nvSpPr>
         <p:spPr>
           <a:xfrm>
-            <a:off x="3337560" y="2253240"/>
+            <a:off x="3337560" y="2193768"/>
             <a:ext cx="2468160" cy="129240"/>
           </a:xfrm>
           <a:prstGeom prst="rect">
@@ -5961,15 +4624,22 @@
           </a:ln>
         </p:spPr>
         <p:style>
-          <a:lnRef idx="0"/>
-          <a:fillRef idx="0"/>
-          <a:effectRef idx="0"/>
+          <a:lnRef idx="0">
+            <a:scrgbClr r="0" g="0" b="0"/>
+          </a:lnRef>
+          <a:fillRef idx="0">
+            <a:scrgbClr r="0" g="0" b="0"/>
+          </a:fillRef>
+          <a:effectRef idx="0">
+            <a:scrgbClr r="0" g="0" b="0"/>
+          </a:effectRef>
           <a:fontRef idx="minor"/>
         </p:style>
         <p:txBody>
           <a:bodyPr lIns="90000" tIns="45000" rIns="90000" bIns="45000" anchor="ctr">
             <a:noAutofit/>
           </a:bodyPr>
+          <a:lstStyle/>
           <a:p>
             <a:pPr defTabSz="914400">
               <a:lnSpc>
@@ -6010,8 +4680,8 @@
         </p:nvSpPr>
         <p:spPr>
           <a:xfrm>
-            <a:off x="3246120" y="2367360"/>
-            <a:ext cx="2651040" cy="1014120"/>
+            <a:off x="3246120" y="2539786"/>
+            <a:ext cx="2651040" cy="1172160"/>
           </a:xfrm>
           <a:prstGeom prst="rect">
             <a:avLst/>
@@ -6026,7 +4696,7 @@
             <a:round/>
           </a:ln>
           <a:effectLst>
-            <a:outerShdw algn="bl" blurRad="50760" dir="8100000" dist="12218" kx="0" ky="0" rotWithShape="0" sx="100000" sy="100000">
+            <a:outerShdw blurRad="50760" dist="12218" dir="8100000" algn="bl" rotWithShape="0">
               <a:srgbClr val="000000">
                 <a:alpha val="8000"/>
               </a:srgbClr>
@@ -6034,15 +4704,22 @@
           </a:effectLst>
         </p:spPr>
         <p:style>
-          <a:lnRef idx="0"/>
-          <a:fillRef idx="0"/>
-          <a:effectRef idx="0"/>
+          <a:lnRef idx="0">
+            <a:scrgbClr r="0" g="0" b="0"/>
+          </a:lnRef>
+          <a:fillRef idx="0">
+            <a:scrgbClr r="0" g="0" b="0"/>
+          </a:fillRef>
+          <a:effectRef idx="0">
+            <a:scrgbClr r="0" g="0" b="0"/>
+          </a:effectRef>
           <a:fontRef idx="minor"/>
         </p:style>
         <p:txBody>
           <a:bodyPr lIns="90000" tIns="45000" rIns="90000" bIns="45000" anchor="t">
             <a:noAutofit/>
           </a:bodyPr>
+          <a:lstStyle/>
           <a:p>
             <a:endParaRPr lang="es-ES" sz="1800" b="0" u="none" strike="noStrike">
               <a:solidFill>
@@ -6063,7 +4740,7 @@
         </p:nvSpPr>
         <p:spPr>
           <a:xfrm>
-            <a:off x="3246120" y="2367360"/>
+            <a:off x="3246120" y="2539786"/>
             <a:ext cx="2651040" cy="246240"/>
           </a:xfrm>
           <a:prstGeom prst="rect">
@@ -6080,15 +4757,22 @@
           </a:ln>
         </p:spPr>
         <p:style>
-          <a:lnRef idx="0"/>
-          <a:fillRef idx="0"/>
-          <a:effectRef idx="0"/>
+          <a:lnRef idx="0">
+            <a:scrgbClr r="0" g="0" b="0"/>
+          </a:lnRef>
+          <a:fillRef idx="0">
+            <a:scrgbClr r="0" g="0" b="0"/>
+          </a:fillRef>
+          <a:effectRef idx="0">
+            <a:scrgbClr r="0" g="0" b="0"/>
+          </a:effectRef>
           <a:fontRef idx="minor"/>
         </p:style>
         <p:txBody>
           <a:bodyPr lIns="90000" tIns="45000" rIns="90000" bIns="45000" anchor="t">
             <a:noAutofit/>
           </a:bodyPr>
+          <a:lstStyle/>
           <a:p>
             <a:endParaRPr lang="es-ES" sz="1800" b="0" u="none" strike="noStrike">
               <a:solidFill>
@@ -6109,7 +4793,7 @@
         </p:nvSpPr>
         <p:spPr>
           <a:xfrm>
-            <a:off x="3337560" y="2367360"/>
+            <a:off x="3337560" y="2539786"/>
             <a:ext cx="2468160" cy="246240"/>
           </a:xfrm>
           <a:prstGeom prst="rect">
@@ -6121,15 +4805,22 @@
           </a:ln>
         </p:spPr>
         <p:style>
-          <a:lnRef idx="0"/>
-          <a:fillRef idx="0"/>
-          <a:effectRef idx="0"/>
+          <a:lnRef idx="0">
+            <a:scrgbClr r="0" g="0" b="0"/>
+          </a:lnRef>
+          <a:fillRef idx="0">
+            <a:scrgbClr r="0" g="0" b="0"/>
+          </a:fillRef>
+          <a:effectRef idx="0">
+            <a:scrgbClr r="0" g="0" b="0"/>
+          </a:effectRef>
           <a:fontRef idx="minor"/>
         </p:style>
         <p:txBody>
           <a:bodyPr lIns="90000" tIns="45000" rIns="90000" bIns="45000" anchor="ctr">
             <a:noAutofit/>
           </a:bodyPr>
+          <a:lstStyle/>
           <a:p>
             <a:pPr defTabSz="914400">
               <a:lnSpc>
@@ -6170,7 +4861,7 @@
         </p:nvSpPr>
         <p:spPr>
           <a:xfrm>
-            <a:off x="3337560" y="2632680"/>
+            <a:off x="3337560" y="2805106"/>
             <a:ext cx="2468160" cy="147240"/>
           </a:xfrm>
           <a:prstGeom prst="rect">
@@ -6182,15 +4873,22 @@
           </a:ln>
         </p:spPr>
         <p:style>
-          <a:lnRef idx="0"/>
-          <a:fillRef idx="0"/>
-          <a:effectRef idx="0"/>
+          <a:lnRef idx="0">
+            <a:scrgbClr r="0" g="0" b="0"/>
+          </a:lnRef>
+          <a:fillRef idx="0">
+            <a:scrgbClr r="0" g="0" b="0"/>
+          </a:fillRef>
+          <a:effectRef idx="0">
+            <a:scrgbClr r="0" g="0" b="0"/>
+          </a:effectRef>
           <a:fontRef idx="minor"/>
         </p:style>
         <p:txBody>
           <a:bodyPr lIns="90000" tIns="45000" rIns="90000" bIns="45000" anchor="ctr">
             <a:noAutofit/>
           </a:bodyPr>
+          <a:lstStyle/>
           <a:p>
             <a:pPr defTabSz="914400">
               <a:lnSpc>
@@ -6231,7 +4929,7 @@
         </p:nvSpPr>
         <p:spPr>
           <a:xfrm>
-            <a:off x="3337560" y="2799000"/>
+            <a:off x="3337560" y="2971426"/>
             <a:ext cx="2468160" cy="129240"/>
           </a:xfrm>
           <a:prstGeom prst="rect">
@@ -6243,15 +4941,22 @@
           </a:ln>
         </p:spPr>
         <p:style>
-          <a:lnRef idx="0"/>
-          <a:fillRef idx="0"/>
-          <a:effectRef idx="0"/>
+          <a:lnRef idx="0">
+            <a:scrgbClr r="0" g="0" b="0"/>
+          </a:lnRef>
+          <a:fillRef idx="0">
+            <a:scrgbClr r="0" g="0" b="0"/>
+          </a:fillRef>
+          <a:effectRef idx="0">
+            <a:scrgbClr r="0" g="0" b="0"/>
+          </a:effectRef>
           <a:fontRef idx="minor"/>
         </p:style>
         <p:txBody>
           <a:bodyPr lIns="90000" tIns="45000" rIns="90000" bIns="45000" anchor="ctr">
             <a:noAutofit/>
           </a:bodyPr>
+          <a:lstStyle/>
           <a:p>
             <a:pPr defTabSz="914400">
               <a:lnSpc>
@@ -6292,7 +4997,7 @@
         </p:nvSpPr>
         <p:spPr>
           <a:xfrm>
-            <a:off x="3337560" y="2928960"/>
+            <a:off x="3337560" y="3101386"/>
             <a:ext cx="2468160" cy="129240"/>
           </a:xfrm>
           <a:prstGeom prst="rect">
@@ -6304,15 +5009,22 @@
           </a:ln>
         </p:spPr>
         <p:style>
-          <a:lnRef idx="0"/>
-          <a:fillRef idx="0"/>
-          <a:effectRef idx="0"/>
+          <a:lnRef idx="0">
+            <a:scrgbClr r="0" g="0" b="0"/>
+          </a:lnRef>
+          <a:fillRef idx="0">
+            <a:scrgbClr r="0" g="0" b="0"/>
+          </a:fillRef>
+          <a:effectRef idx="0">
+            <a:scrgbClr r="0" g="0" b="0"/>
+          </a:effectRef>
           <a:fontRef idx="minor"/>
         </p:style>
         <p:txBody>
           <a:bodyPr lIns="90000" tIns="45000" rIns="90000" bIns="45000" anchor="ctr">
             <a:noAutofit/>
           </a:bodyPr>
+          <a:lstStyle/>
           <a:p>
             <a:pPr defTabSz="914400">
               <a:lnSpc>
@@ -6353,7 +5065,7 @@
         </p:nvSpPr>
         <p:spPr>
           <a:xfrm>
-            <a:off x="3337560" y="3058560"/>
+            <a:off x="3337560" y="3230986"/>
             <a:ext cx="2468160" cy="129240"/>
           </a:xfrm>
           <a:prstGeom prst="rect">
@@ -6365,15 +5077,22 @@
           </a:ln>
         </p:spPr>
         <p:style>
-          <a:lnRef idx="0"/>
-          <a:fillRef idx="0"/>
-          <a:effectRef idx="0"/>
+          <a:lnRef idx="0">
+            <a:scrgbClr r="0" g="0" b="0"/>
+          </a:lnRef>
+          <a:fillRef idx="0">
+            <a:scrgbClr r="0" g="0" b="0"/>
+          </a:fillRef>
+          <a:effectRef idx="0">
+            <a:scrgbClr r="0" g="0" b="0"/>
+          </a:effectRef>
           <a:fontRef idx="minor"/>
         </p:style>
         <p:txBody>
           <a:bodyPr lIns="90000" tIns="45000" rIns="90000" bIns="45000" anchor="ctr">
             <a:noAutofit/>
           </a:bodyPr>
+          <a:lstStyle/>
           <a:p>
             <a:pPr defTabSz="914400">
               <a:lnSpc>
@@ -6414,7 +5133,7 @@
         </p:nvSpPr>
         <p:spPr>
           <a:xfrm>
-            <a:off x="3337560" y="3188520"/>
+            <a:off x="3337560" y="3360946"/>
             <a:ext cx="2468160" cy="129240"/>
           </a:xfrm>
           <a:prstGeom prst="rect">
@@ -6426,15 +5145,22 @@
           </a:ln>
         </p:spPr>
         <p:style>
-          <a:lnRef idx="0"/>
-          <a:fillRef idx="0"/>
-          <a:effectRef idx="0"/>
+          <a:lnRef idx="0">
+            <a:scrgbClr r="0" g="0" b="0"/>
+          </a:lnRef>
+          <a:fillRef idx="0">
+            <a:scrgbClr r="0" g="0" b="0"/>
+          </a:fillRef>
+          <a:effectRef idx="0">
+            <a:scrgbClr r="0" g="0" b="0"/>
+          </a:effectRef>
           <a:fontRef idx="minor"/>
         </p:style>
         <p:txBody>
           <a:bodyPr lIns="90000" tIns="45000" rIns="90000" bIns="45000" anchor="ctr">
             <a:noAutofit/>
           </a:bodyPr>
+          <a:lstStyle/>
           <a:p>
             <a:pPr defTabSz="914400">
               <a:lnSpc>
@@ -6475,7 +5201,7 @@
         </p:nvSpPr>
         <p:spPr>
           <a:xfrm>
-            <a:off x="3337560" y="3318480"/>
+            <a:off x="3337560" y="3490906"/>
             <a:ext cx="2468160" cy="129240"/>
           </a:xfrm>
           <a:prstGeom prst="rect">
@@ -6487,15 +5213,22 @@
           </a:ln>
         </p:spPr>
         <p:style>
-          <a:lnRef idx="0"/>
-          <a:fillRef idx="0"/>
-          <a:effectRef idx="0"/>
+          <a:lnRef idx="0">
+            <a:scrgbClr r="0" g="0" b="0"/>
+          </a:lnRef>
+          <a:fillRef idx="0">
+            <a:scrgbClr r="0" g="0" b="0"/>
+          </a:fillRef>
+          <a:effectRef idx="0">
+            <a:scrgbClr r="0" g="0" b="0"/>
+          </a:effectRef>
           <a:fontRef idx="minor"/>
         </p:style>
         <p:txBody>
           <a:bodyPr lIns="90000" tIns="45000" rIns="90000" bIns="45000" anchor="ctr">
             <a:noAutofit/>
           </a:bodyPr>
+          <a:lstStyle/>
           <a:p>
             <a:pPr defTabSz="914400">
               <a:lnSpc>
@@ -6506,7 +5239,7 @@
               </a:tabLst>
             </a:pPr>
             <a:r>
-              <a:rPr lang="en-US" sz="800" b="0" u="none" strike="noStrike">
+              <a:rPr lang="en-US" sz="800" b="0" u="none" strike="noStrike" dirty="0">
                 <a:solidFill>
                   <a:srgbClr val="2D6A9F"/>
                 </a:solidFill>
@@ -6515,9 +5248,33 @@
                 <a:latin typeface="Calibri"/>
                 <a:ea typeface="Calibri"/>
               </a:rPr>
-              <a:t>🔗 id_curso FK</a:t>
-            </a:r>
-            <a:endParaRPr lang="es-ES" sz="800" b="0" u="none" strike="noStrike">
+              <a:t>🔗 </a:t>
+            </a:r>
+            <a:r>
+              <a:rPr lang="en-US" sz="800" b="0" u="none" strike="noStrike" dirty="0" err="1">
+                <a:solidFill>
+                  <a:srgbClr val="2D6A9F"/>
+                </a:solidFill>
+                <a:effectLst/>
+                <a:uFillTx/>
+                <a:latin typeface="Calibri"/>
+                <a:ea typeface="Calibri"/>
+              </a:rPr>
+              <a:t>id_curso</a:t>
+            </a:r>
+            <a:r>
+              <a:rPr lang="en-US" sz="800" b="0" u="none" strike="noStrike" dirty="0">
+                <a:solidFill>
+                  <a:srgbClr val="2D6A9F"/>
+                </a:solidFill>
+                <a:effectLst/>
+                <a:uFillTx/>
+                <a:latin typeface="Calibri"/>
+                <a:ea typeface="Calibri"/>
+              </a:rPr>
+              <a:t> FK</a:t>
+            </a:r>
+            <a:endParaRPr lang="es-ES" sz="800" b="0" u="none" strike="noStrike" dirty="0">
               <a:solidFill>
                 <a:srgbClr val="000000"/>
               </a:solidFill>
@@ -6536,8 +5293,8 @@
         </p:nvSpPr>
         <p:spPr>
           <a:xfrm>
-            <a:off x="6108120" y="1691640"/>
-            <a:ext cx="2651040" cy="754560"/>
+            <a:off x="3246120" y="3900853"/>
+            <a:ext cx="2651040" cy="871380"/>
           </a:xfrm>
           <a:prstGeom prst="rect">
             <a:avLst/>
@@ -6552,7 +5309,7 @@
             <a:round/>
           </a:ln>
           <a:effectLst>
-            <a:outerShdw algn="bl" blurRad="50760" dir="8100000" dist="12218" kx="0" ky="0" rotWithShape="0" sx="100000" sy="100000">
+            <a:outerShdw blurRad="50760" dist="12218" dir="8100000" algn="bl" rotWithShape="0">
               <a:srgbClr val="000000">
                 <a:alpha val="8000"/>
               </a:srgbClr>
@@ -6560,15 +5317,22 @@
           </a:effectLst>
         </p:spPr>
         <p:style>
-          <a:lnRef idx="0"/>
-          <a:fillRef idx="0"/>
-          <a:effectRef idx="0"/>
+          <a:lnRef idx="0">
+            <a:scrgbClr r="0" g="0" b="0"/>
+          </a:lnRef>
+          <a:fillRef idx="0">
+            <a:scrgbClr r="0" g="0" b="0"/>
+          </a:fillRef>
+          <a:effectRef idx="0">
+            <a:scrgbClr r="0" g="0" b="0"/>
+          </a:effectRef>
           <a:fontRef idx="minor"/>
         </p:style>
         <p:txBody>
           <a:bodyPr lIns="90000" tIns="45000" rIns="90000" bIns="45000" anchor="t">
             <a:noAutofit/>
           </a:bodyPr>
+          <a:lstStyle/>
           <a:p>
             <a:endParaRPr lang="es-ES" sz="1800" b="0" u="none" strike="noStrike">
               <a:solidFill>
@@ -6589,7 +5353,7 @@
         </p:nvSpPr>
         <p:spPr>
           <a:xfrm>
-            <a:off x="6108120" y="1691640"/>
+            <a:off x="3246120" y="3900853"/>
             <a:ext cx="2651040" cy="246240"/>
           </a:xfrm>
           <a:prstGeom prst="rect">
@@ -6606,15 +5370,22 @@
           </a:ln>
         </p:spPr>
         <p:style>
-          <a:lnRef idx="0"/>
-          <a:fillRef idx="0"/>
-          <a:effectRef idx="0"/>
+          <a:lnRef idx="0">
+            <a:scrgbClr r="0" g="0" b="0"/>
+          </a:lnRef>
+          <a:fillRef idx="0">
+            <a:scrgbClr r="0" g="0" b="0"/>
+          </a:fillRef>
+          <a:effectRef idx="0">
+            <a:scrgbClr r="0" g="0" b="0"/>
+          </a:effectRef>
           <a:fontRef idx="minor"/>
         </p:style>
         <p:txBody>
           <a:bodyPr lIns="90000" tIns="45000" rIns="90000" bIns="45000" anchor="t">
             <a:noAutofit/>
           </a:bodyPr>
+          <a:lstStyle/>
           <a:p>
             <a:endParaRPr lang="es-ES" sz="1800" b="0" u="none" strike="noStrike">
               <a:solidFill>
@@ -6635,7 +5406,7 @@
         </p:nvSpPr>
         <p:spPr>
           <a:xfrm>
-            <a:off x="6199560" y="1691640"/>
+            <a:off x="3337560" y="3900853"/>
             <a:ext cx="2468160" cy="246240"/>
           </a:xfrm>
           <a:prstGeom prst="rect">
@@ -6647,15 +5418,22 @@
           </a:ln>
         </p:spPr>
         <p:style>
-          <a:lnRef idx="0"/>
-          <a:fillRef idx="0"/>
-          <a:effectRef idx="0"/>
+          <a:lnRef idx="0">
+            <a:scrgbClr r="0" g="0" b="0"/>
+          </a:lnRef>
+          <a:fillRef idx="0">
+            <a:scrgbClr r="0" g="0" b="0"/>
+          </a:fillRef>
+          <a:effectRef idx="0">
+            <a:scrgbClr r="0" g="0" b="0"/>
+          </a:effectRef>
           <a:fontRef idx="minor"/>
         </p:style>
         <p:txBody>
           <a:bodyPr lIns="90000" tIns="45000" rIns="90000" bIns="45000" anchor="ctr">
             <a:noAutofit/>
           </a:bodyPr>
+          <a:lstStyle/>
           <a:p>
             <a:pPr defTabSz="914400">
               <a:lnSpc>
@@ -6696,7 +5474,7 @@
         </p:nvSpPr>
         <p:spPr>
           <a:xfrm>
-            <a:off x="6199560" y="1956960"/>
+            <a:off x="3337560" y="4166173"/>
             <a:ext cx="2468160" cy="147240"/>
           </a:xfrm>
           <a:prstGeom prst="rect">
@@ -6708,15 +5486,22 @@
           </a:ln>
         </p:spPr>
         <p:style>
-          <a:lnRef idx="0"/>
-          <a:fillRef idx="0"/>
-          <a:effectRef idx="0"/>
+          <a:lnRef idx="0">
+            <a:scrgbClr r="0" g="0" b="0"/>
+          </a:lnRef>
+          <a:fillRef idx="0">
+            <a:scrgbClr r="0" g="0" b="0"/>
+          </a:fillRef>
+          <a:effectRef idx="0">
+            <a:scrgbClr r="0" g="0" b="0"/>
+          </a:effectRef>
           <a:fontRef idx="minor"/>
         </p:style>
         <p:txBody>
           <a:bodyPr lIns="90000" tIns="45000" rIns="90000" bIns="45000" anchor="ctr">
             <a:noAutofit/>
           </a:bodyPr>
+          <a:lstStyle/>
           <a:p>
             <a:pPr defTabSz="914400">
               <a:lnSpc>
@@ -6757,7 +5542,7 @@
         </p:nvSpPr>
         <p:spPr>
           <a:xfrm>
-            <a:off x="6199560" y="2123280"/>
+            <a:off x="3337560" y="4332493"/>
             <a:ext cx="2468160" cy="129240"/>
           </a:xfrm>
           <a:prstGeom prst="rect">
@@ -6769,15 +5554,22 @@
           </a:ln>
         </p:spPr>
         <p:style>
-          <a:lnRef idx="0"/>
-          <a:fillRef idx="0"/>
-          <a:effectRef idx="0"/>
+          <a:lnRef idx="0">
+            <a:scrgbClr r="0" g="0" b="0"/>
+          </a:lnRef>
+          <a:fillRef idx="0">
+            <a:scrgbClr r="0" g="0" b="0"/>
+          </a:fillRef>
+          <a:effectRef idx="0">
+            <a:scrgbClr r="0" g="0" b="0"/>
+          </a:effectRef>
           <a:fontRef idx="minor"/>
         </p:style>
         <p:txBody>
           <a:bodyPr lIns="90000" tIns="45000" rIns="90000" bIns="45000" anchor="ctr">
             <a:noAutofit/>
           </a:bodyPr>
+          <a:lstStyle/>
           <a:p>
             <a:pPr defTabSz="914400">
               <a:lnSpc>
@@ -6818,7 +5610,7 @@
         </p:nvSpPr>
         <p:spPr>
           <a:xfrm>
-            <a:off x="6199560" y="2253240"/>
+            <a:off x="3337560" y="4462453"/>
             <a:ext cx="2468160" cy="129240"/>
           </a:xfrm>
           <a:prstGeom prst="rect">
@@ -6830,15 +5622,22 @@
           </a:ln>
         </p:spPr>
         <p:style>
-          <a:lnRef idx="0"/>
-          <a:fillRef idx="0"/>
-          <a:effectRef idx="0"/>
+          <a:lnRef idx="0">
+            <a:scrgbClr r="0" g="0" b="0"/>
+          </a:lnRef>
+          <a:fillRef idx="0">
+            <a:scrgbClr r="0" g="0" b="0"/>
+          </a:fillRef>
+          <a:effectRef idx="0">
+            <a:scrgbClr r="0" g="0" b="0"/>
+          </a:effectRef>
           <a:fontRef idx="minor"/>
         </p:style>
         <p:txBody>
           <a:bodyPr lIns="90000" tIns="45000" rIns="90000" bIns="45000" anchor="ctr">
             <a:noAutofit/>
           </a:bodyPr>
+          <a:lstStyle/>
           <a:p>
             <a:pPr defTabSz="914400">
               <a:lnSpc>
@@ -6879,7 +5678,7 @@
         </p:nvSpPr>
         <p:spPr>
           <a:xfrm>
-            <a:off x="6199560" y="2382840"/>
+            <a:off x="3337560" y="4592053"/>
             <a:ext cx="2468160" cy="129240"/>
           </a:xfrm>
           <a:prstGeom prst="rect">
@@ -6891,15 +5690,22 @@
           </a:ln>
         </p:spPr>
         <p:style>
-          <a:lnRef idx="0"/>
-          <a:fillRef idx="0"/>
-          <a:effectRef idx="0"/>
+          <a:lnRef idx="0">
+            <a:scrgbClr r="0" g="0" b="0"/>
+          </a:lnRef>
+          <a:fillRef idx="0">
+            <a:scrgbClr r="0" g="0" b="0"/>
+          </a:fillRef>
+          <a:effectRef idx="0">
+            <a:scrgbClr r="0" g="0" b="0"/>
+          </a:effectRef>
           <a:fontRef idx="minor"/>
         </p:style>
         <p:txBody>
           <a:bodyPr lIns="90000" tIns="45000" rIns="90000" bIns="45000" anchor="ctr">
             <a:noAutofit/>
           </a:bodyPr>
+          <a:lstStyle/>
           <a:p>
             <a:pPr defTabSz="914400">
               <a:lnSpc>
@@ -6940,8 +5746,8 @@
         </p:nvSpPr>
         <p:spPr>
           <a:xfrm>
-            <a:off x="6108120" y="2497320"/>
-            <a:ext cx="2651040" cy="624600"/>
+            <a:off x="6108120" y="1632492"/>
+            <a:ext cx="2651040" cy="754236"/>
           </a:xfrm>
           <a:prstGeom prst="rect">
             <a:avLst/>
@@ -6956,7 +5762,7 @@
             <a:round/>
           </a:ln>
           <a:effectLst>
-            <a:outerShdw algn="bl" blurRad="50760" dir="8100000" dist="12218" kx="0" ky="0" rotWithShape="0" sx="100000" sy="100000">
+            <a:outerShdw blurRad="50760" dist="12218" dir="8100000" algn="bl" rotWithShape="0">
               <a:srgbClr val="000000">
                 <a:alpha val="8000"/>
               </a:srgbClr>
@@ -6964,15 +5770,22 @@
           </a:effectLst>
         </p:spPr>
         <p:style>
-          <a:lnRef idx="0"/>
-          <a:fillRef idx="0"/>
-          <a:effectRef idx="0"/>
+          <a:lnRef idx="0">
+            <a:scrgbClr r="0" g="0" b="0"/>
+          </a:lnRef>
+          <a:fillRef idx="0">
+            <a:scrgbClr r="0" g="0" b="0"/>
+          </a:fillRef>
+          <a:effectRef idx="0">
+            <a:scrgbClr r="0" g="0" b="0"/>
+          </a:effectRef>
           <a:fontRef idx="minor"/>
         </p:style>
         <p:txBody>
           <a:bodyPr lIns="90000" tIns="45000" rIns="90000" bIns="45000" anchor="t">
             <a:noAutofit/>
           </a:bodyPr>
+          <a:lstStyle/>
           <a:p>
             <a:endParaRPr lang="es-ES" sz="1800" b="0" u="none" strike="noStrike">
               <a:solidFill>
@@ -6993,7 +5806,7 @@
         </p:nvSpPr>
         <p:spPr>
           <a:xfrm>
-            <a:off x="6108120" y="2497320"/>
+            <a:off x="6108120" y="1632492"/>
             <a:ext cx="2651040" cy="246240"/>
           </a:xfrm>
           <a:prstGeom prst="rect">
@@ -7010,15 +5823,22 @@
           </a:ln>
         </p:spPr>
         <p:style>
-          <a:lnRef idx="0"/>
-          <a:fillRef idx="0"/>
-          <a:effectRef idx="0"/>
+          <a:lnRef idx="0">
+            <a:scrgbClr r="0" g="0" b="0"/>
+          </a:lnRef>
+          <a:fillRef idx="0">
+            <a:scrgbClr r="0" g="0" b="0"/>
+          </a:fillRef>
+          <a:effectRef idx="0">
+            <a:scrgbClr r="0" g="0" b="0"/>
+          </a:effectRef>
           <a:fontRef idx="minor"/>
         </p:style>
         <p:txBody>
           <a:bodyPr lIns="90000" tIns="45000" rIns="90000" bIns="45000" anchor="t">
             <a:noAutofit/>
           </a:bodyPr>
+          <a:lstStyle/>
           <a:p>
             <a:endParaRPr lang="es-ES" sz="1800" b="0" u="none" strike="noStrike">
               <a:solidFill>
@@ -7039,7 +5859,7 @@
         </p:nvSpPr>
         <p:spPr>
           <a:xfrm>
-            <a:off x="6199560" y="2497320"/>
+            <a:off x="6199560" y="1632492"/>
             <a:ext cx="2468160" cy="246240"/>
           </a:xfrm>
           <a:prstGeom prst="rect">
@@ -7051,15 +5871,22 @@
           </a:ln>
         </p:spPr>
         <p:style>
-          <a:lnRef idx="0"/>
-          <a:fillRef idx="0"/>
-          <a:effectRef idx="0"/>
+          <a:lnRef idx="0">
+            <a:scrgbClr r="0" g="0" b="0"/>
+          </a:lnRef>
+          <a:fillRef idx="0">
+            <a:scrgbClr r="0" g="0" b="0"/>
+          </a:fillRef>
+          <a:effectRef idx="0">
+            <a:scrgbClr r="0" g="0" b="0"/>
+          </a:effectRef>
           <a:fontRef idx="minor"/>
         </p:style>
         <p:txBody>
           <a:bodyPr lIns="90000" tIns="45000" rIns="90000" bIns="45000" anchor="ctr">
             <a:noAutofit/>
           </a:bodyPr>
+          <a:lstStyle/>
           <a:p>
             <a:pPr defTabSz="914400">
               <a:lnSpc>
@@ -7100,7 +5927,7 @@
         </p:nvSpPr>
         <p:spPr>
           <a:xfrm>
-            <a:off x="6199560" y="2762280"/>
+            <a:off x="6199560" y="1897452"/>
             <a:ext cx="2468160" cy="147240"/>
           </a:xfrm>
           <a:prstGeom prst="rect">
@@ -7112,15 +5939,22 @@
           </a:ln>
         </p:spPr>
         <p:style>
-          <a:lnRef idx="0"/>
-          <a:fillRef idx="0"/>
-          <a:effectRef idx="0"/>
+          <a:lnRef idx="0">
+            <a:scrgbClr r="0" g="0" b="0"/>
+          </a:lnRef>
+          <a:fillRef idx="0">
+            <a:scrgbClr r="0" g="0" b="0"/>
+          </a:fillRef>
+          <a:effectRef idx="0">
+            <a:scrgbClr r="0" g="0" b="0"/>
+          </a:effectRef>
           <a:fontRef idx="minor"/>
         </p:style>
         <p:txBody>
           <a:bodyPr lIns="90000" tIns="45000" rIns="90000" bIns="45000" anchor="ctr">
             <a:noAutofit/>
           </a:bodyPr>
+          <a:lstStyle/>
           <a:p>
             <a:pPr defTabSz="914400">
               <a:lnSpc>
@@ -7161,7 +5995,7 @@
         </p:nvSpPr>
         <p:spPr>
           <a:xfrm>
-            <a:off x="6199560" y="2928960"/>
+            <a:off x="6199560" y="2064132"/>
             <a:ext cx="2468160" cy="129240"/>
           </a:xfrm>
           <a:prstGeom prst="rect">
@@ -7173,15 +6007,22 @@
           </a:ln>
         </p:spPr>
         <p:style>
-          <a:lnRef idx="0"/>
-          <a:fillRef idx="0"/>
-          <a:effectRef idx="0"/>
+          <a:lnRef idx="0">
+            <a:scrgbClr r="0" g="0" b="0"/>
+          </a:lnRef>
+          <a:fillRef idx="0">
+            <a:scrgbClr r="0" g="0" b="0"/>
+          </a:fillRef>
+          <a:effectRef idx="0">
+            <a:scrgbClr r="0" g="0" b="0"/>
+          </a:effectRef>
           <a:fontRef idx="minor"/>
         </p:style>
         <p:txBody>
           <a:bodyPr lIns="90000" tIns="45000" rIns="90000" bIns="45000" anchor="ctr">
             <a:noAutofit/>
           </a:bodyPr>
+          <a:lstStyle/>
           <a:p>
             <a:pPr defTabSz="914400">
               <a:lnSpc>
@@ -7222,7 +6063,7 @@
         </p:nvSpPr>
         <p:spPr>
           <a:xfrm>
-            <a:off x="6199560" y="3058560"/>
+            <a:off x="6199560" y="2193732"/>
             <a:ext cx="2468160" cy="129240"/>
           </a:xfrm>
           <a:prstGeom prst="rect">
@@ -7234,15 +6075,22 @@
           </a:ln>
         </p:spPr>
         <p:style>
-          <a:lnRef idx="0"/>
-          <a:fillRef idx="0"/>
-          <a:effectRef idx="0"/>
+          <a:lnRef idx="0">
+            <a:scrgbClr r="0" g="0" b="0"/>
+          </a:lnRef>
+          <a:fillRef idx="0">
+            <a:scrgbClr r="0" g="0" b="0"/>
+          </a:fillRef>
+          <a:effectRef idx="0">
+            <a:scrgbClr r="0" g="0" b="0"/>
+          </a:effectRef>
           <a:fontRef idx="minor"/>
         </p:style>
         <p:txBody>
           <a:bodyPr lIns="90000" tIns="45000" rIns="90000" bIns="45000" anchor="ctr">
             <a:noAutofit/>
           </a:bodyPr>
+          <a:lstStyle/>
           <a:p>
             <a:pPr defTabSz="914400">
               <a:lnSpc>
@@ -7283,8 +6131,8 @@
         </p:nvSpPr>
         <p:spPr>
           <a:xfrm>
-            <a:off x="6108120" y="3173040"/>
-            <a:ext cx="2651040" cy="754560"/>
+            <a:off x="6108120" y="2542990"/>
+            <a:ext cx="2651040" cy="891603"/>
           </a:xfrm>
           <a:prstGeom prst="rect">
             <a:avLst/>
@@ -7299,7 +6147,7 @@
             <a:round/>
           </a:ln>
           <a:effectLst>
-            <a:outerShdw algn="bl" blurRad="50760" dir="8100000" dist="12218" kx="0" ky="0" rotWithShape="0" sx="100000" sy="100000">
+            <a:outerShdw blurRad="50760" dist="12218" dir="8100000" algn="bl" rotWithShape="0">
               <a:srgbClr val="000000">
                 <a:alpha val="8000"/>
               </a:srgbClr>
@@ -7307,15 +6155,22 @@
           </a:effectLst>
         </p:spPr>
         <p:style>
-          <a:lnRef idx="0"/>
-          <a:fillRef idx="0"/>
-          <a:effectRef idx="0"/>
+          <a:lnRef idx="0">
+            <a:scrgbClr r="0" g="0" b="0"/>
+          </a:lnRef>
+          <a:fillRef idx="0">
+            <a:scrgbClr r="0" g="0" b="0"/>
+          </a:fillRef>
+          <a:effectRef idx="0">
+            <a:scrgbClr r="0" g="0" b="0"/>
+          </a:effectRef>
           <a:fontRef idx="minor"/>
         </p:style>
         <p:txBody>
           <a:bodyPr lIns="90000" tIns="45000" rIns="90000" bIns="45000" anchor="t">
             <a:noAutofit/>
           </a:bodyPr>
+          <a:lstStyle/>
           <a:p>
             <a:endParaRPr lang="es-ES" sz="1800" b="0" u="none" strike="noStrike">
               <a:solidFill>
@@ -7336,7 +6191,7 @@
         </p:nvSpPr>
         <p:spPr>
           <a:xfrm>
-            <a:off x="6108120" y="3173040"/>
+            <a:off x="6108120" y="2542991"/>
             <a:ext cx="2651040" cy="246240"/>
           </a:xfrm>
           <a:prstGeom prst="rect">
@@ -7353,15 +6208,22 @@
           </a:ln>
         </p:spPr>
         <p:style>
-          <a:lnRef idx="0"/>
-          <a:fillRef idx="0"/>
-          <a:effectRef idx="0"/>
+          <a:lnRef idx="0">
+            <a:scrgbClr r="0" g="0" b="0"/>
+          </a:lnRef>
+          <a:fillRef idx="0">
+            <a:scrgbClr r="0" g="0" b="0"/>
+          </a:fillRef>
+          <a:effectRef idx="0">
+            <a:scrgbClr r="0" g="0" b="0"/>
+          </a:effectRef>
           <a:fontRef idx="minor"/>
         </p:style>
         <p:txBody>
           <a:bodyPr lIns="90000" tIns="45000" rIns="90000" bIns="45000" anchor="t">
             <a:noAutofit/>
           </a:bodyPr>
+          <a:lstStyle/>
           <a:p>
             <a:endParaRPr lang="es-ES" sz="1800" b="0" u="none" strike="noStrike">
               <a:solidFill>
@@ -7382,7 +6244,7 @@
         </p:nvSpPr>
         <p:spPr>
           <a:xfrm>
-            <a:off x="6199560" y="3173040"/>
+            <a:off x="6199560" y="2542991"/>
             <a:ext cx="2468160" cy="246240"/>
           </a:xfrm>
           <a:prstGeom prst="rect">
@@ -7394,15 +6256,22 @@
           </a:ln>
         </p:spPr>
         <p:style>
-          <a:lnRef idx="0"/>
-          <a:fillRef idx="0"/>
-          <a:effectRef idx="0"/>
+          <a:lnRef idx="0">
+            <a:scrgbClr r="0" g="0" b="0"/>
+          </a:lnRef>
+          <a:fillRef idx="0">
+            <a:scrgbClr r="0" g="0" b="0"/>
+          </a:fillRef>
+          <a:effectRef idx="0">
+            <a:scrgbClr r="0" g="0" b="0"/>
+          </a:effectRef>
           <a:fontRef idx="minor"/>
         </p:style>
         <p:txBody>
           <a:bodyPr lIns="90000" tIns="45000" rIns="90000" bIns="45000" anchor="ctr">
             <a:noAutofit/>
           </a:bodyPr>
+          <a:lstStyle/>
           <a:p>
             <a:pPr defTabSz="914400">
               <a:lnSpc>
@@ -7443,7 +6312,7 @@
         </p:nvSpPr>
         <p:spPr>
           <a:xfrm>
-            <a:off x="6199560" y="3438000"/>
+            <a:off x="6199560" y="2807951"/>
             <a:ext cx="2468160" cy="147240"/>
           </a:xfrm>
           <a:prstGeom prst="rect">
@@ -7455,15 +6324,22 @@
           </a:ln>
         </p:spPr>
         <p:style>
-          <a:lnRef idx="0"/>
-          <a:fillRef idx="0"/>
-          <a:effectRef idx="0"/>
+          <a:lnRef idx="0">
+            <a:scrgbClr r="0" g="0" b="0"/>
+          </a:lnRef>
+          <a:fillRef idx="0">
+            <a:scrgbClr r="0" g="0" b="0"/>
+          </a:fillRef>
+          <a:effectRef idx="0">
+            <a:scrgbClr r="0" g="0" b="0"/>
+          </a:effectRef>
           <a:fontRef idx="minor"/>
         </p:style>
         <p:txBody>
           <a:bodyPr lIns="90000" tIns="45000" rIns="90000" bIns="45000" anchor="ctr">
             <a:noAutofit/>
           </a:bodyPr>
+          <a:lstStyle/>
           <a:p>
             <a:pPr defTabSz="914400">
               <a:lnSpc>
@@ -7504,7 +6380,7 @@
         </p:nvSpPr>
         <p:spPr>
           <a:xfrm>
-            <a:off x="6199560" y="3604680"/>
+            <a:off x="6199560" y="2974631"/>
             <a:ext cx="2468160" cy="129240"/>
           </a:xfrm>
           <a:prstGeom prst="rect">
@@ -7516,15 +6392,22 @@
           </a:ln>
         </p:spPr>
         <p:style>
-          <a:lnRef idx="0"/>
-          <a:fillRef idx="0"/>
-          <a:effectRef idx="0"/>
+          <a:lnRef idx="0">
+            <a:scrgbClr r="0" g="0" b="0"/>
+          </a:lnRef>
+          <a:fillRef idx="0">
+            <a:scrgbClr r="0" g="0" b="0"/>
+          </a:fillRef>
+          <a:effectRef idx="0">
+            <a:scrgbClr r="0" g="0" b="0"/>
+          </a:effectRef>
           <a:fontRef idx="minor"/>
         </p:style>
         <p:txBody>
           <a:bodyPr lIns="90000" tIns="45000" rIns="90000" bIns="45000" anchor="ctr">
             <a:noAutofit/>
           </a:bodyPr>
+          <a:lstStyle/>
           <a:p>
             <a:pPr defTabSz="914400">
               <a:lnSpc>
@@ -7565,7 +6448,7 @@
         </p:nvSpPr>
         <p:spPr>
           <a:xfrm>
-            <a:off x="6199560" y="3734280"/>
+            <a:off x="6199560" y="3104231"/>
             <a:ext cx="2468160" cy="129240"/>
           </a:xfrm>
           <a:prstGeom prst="rect">
@@ -7577,15 +6460,22 @@
           </a:ln>
         </p:spPr>
         <p:style>
-          <a:lnRef idx="0"/>
-          <a:fillRef idx="0"/>
-          <a:effectRef idx="0"/>
+          <a:lnRef idx="0">
+            <a:scrgbClr r="0" g="0" b="0"/>
+          </a:lnRef>
+          <a:fillRef idx="0">
+            <a:scrgbClr r="0" g="0" b="0"/>
+          </a:fillRef>
+          <a:effectRef idx="0">
+            <a:scrgbClr r="0" g="0" b="0"/>
+          </a:effectRef>
           <a:fontRef idx="minor"/>
         </p:style>
         <p:txBody>
           <a:bodyPr lIns="90000" tIns="45000" rIns="90000" bIns="45000" anchor="ctr">
             <a:noAutofit/>
           </a:bodyPr>
+          <a:lstStyle/>
           <a:p>
             <a:pPr defTabSz="914400">
               <a:lnSpc>
@@ -7626,7 +6516,7 @@
         </p:nvSpPr>
         <p:spPr>
           <a:xfrm>
-            <a:off x="6199560" y="3864240"/>
+            <a:off x="6199560" y="3234191"/>
             <a:ext cx="2468160" cy="129240"/>
           </a:xfrm>
           <a:prstGeom prst="rect">
@@ -7638,15 +6528,22 @@
           </a:ln>
         </p:spPr>
         <p:style>
-          <a:lnRef idx="0"/>
-          <a:fillRef idx="0"/>
-          <a:effectRef idx="0"/>
+          <a:lnRef idx="0">
+            <a:scrgbClr r="0" g="0" b="0"/>
+          </a:lnRef>
+          <a:fillRef idx="0">
+            <a:scrgbClr r="0" g="0" b="0"/>
+          </a:fillRef>
+          <a:effectRef idx="0">
+            <a:scrgbClr r="0" g="0" b="0"/>
+          </a:effectRef>
           <a:fontRef idx="minor"/>
         </p:style>
         <p:txBody>
           <a:bodyPr lIns="90000" tIns="45000" rIns="90000" bIns="45000" anchor="ctr">
             <a:noAutofit/>
           </a:bodyPr>
+          <a:lstStyle/>
           <a:p>
             <a:pPr defTabSz="914400">
               <a:lnSpc>
@@ -7687,8 +6584,8 @@
         </p:nvSpPr>
         <p:spPr>
           <a:xfrm>
-            <a:off x="6108120" y="3978720"/>
-            <a:ext cx="2651040" cy="624600"/>
+            <a:off x="6108120" y="3900852"/>
+            <a:ext cx="2651040" cy="747796"/>
           </a:xfrm>
           <a:prstGeom prst="rect">
             <a:avLst/>
@@ -7703,7 +6600,7 @@
             <a:round/>
           </a:ln>
           <a:effectLst>
-            <a:outerShdw algn="bl" blurRad="50760" dir="8100000" dist="12218" kx="0" ky="0" rotWithShape="0" sx="100000" sy="100000">
+            <a:outerShdw blurRad="50760" dist="12218" dir="8100000" algn="bl" rotWithShape="0">
               <a:srgbClr val="000000">
                 <a:alpha val="8000"/>
               </a:srgbClr>
@@ -7711,15 +6608,22 @@
           </a:effectLst>
         </p:spPr>
         <p:style>
-          <a:lnRef idx="0"/>
-          <a:fillRef idx="0"/>
-          <a:effectRef idx="0"/>
+          <a:lnRef idx="0">
+            <a:scrgbClr r="0" g="0" b="0"/>
+          </a:lnRef>
+          <a:fillRef idx="0">
+            <a:scrgbClr r="0" g="0" b="0"/>
+          </a:fillRef>
+          <a:effectRef idx="0">
+            <a:scrgbClr r="0" g="0" b="0"/>
+          </a:effectRef>
           <a:fontRef idx="minor"/>
         </p:style>
         <p:txBody>
           <a:bodyPr lIns="90000" tIns="45000" rIns="90000" bIns="45000" anchor="t">
             <a:noAutofit/>
           </a:bodyPr>
+          <a:lstStyle/>
           <a:p>
             <a:endParaRPr lang="es-ES" sz="1800" b="0" u="none" strike="noStrike">
               <a:solidFill>
@@ -7740,7 +6644,7 @@
         </p:nvSpPr>
         <p:spPr>
           <a:xfrm>
-            <a:off x="6108120" y="3978720"/>
+            <a:off x="6108120" y="3900853"/>
             <a:ext cx="2651040" cy="246240"/>
           </a:xfrm>
           <a:prstGeom prst="rect">
@@ -7757,15 +6661,22 @@
           </a:ln>
         </p:spPr>
         <p:style>
-          <a:lnRef idx="0"/>
-          <a:fillRef idx="0"/>
-          <a:effectRef idx="0"/>
+          <a:lnRef idx="0">
+            <a:scrgbClr r="0" g="0" b="0"/>
+          </a:lnRef>
+          <a:fillRef idx="0">
+            <a:scrgbClr r="0" g="0" b="0"/>
+          </a:fillRef>
+          <a:effectRef idx="0">
+            <a:scrgbClr r="0" g="0" b="0"/>
+          </a:effectRef>
           <a:fontRef idx="minor"/>
         </p:style>
         <p:txBody>
           <a:bodyPr lIns="90000" tIns="45000" rIns="90000" bIns="45000" anchor="t">
             <a:noAutofit/>
           </a:bodyPr>
+          <a:lstStyle/>
           <a:p>
             <a:endParaRPr lang="es-ES" sz="1800" b="0" u="none" strike="noStrike">
               <a:solidFill>
@@ -7786,7 +6697,7 @@
         </p:nvSpPr>
         <p:spPr>
           <a:xfrm>
-            <a:off x="6199560" y="3978720"/>
+            <a:off x="6199560" y="3900853"/>
             <a:ext cx="2468160" cy="246240"/>
           </a:xfrm>
           <a:prstGeom prst="rect">
@@ -7798,15 +6709,22 @@
           </a:ln>
         </p:spPr>
         <p:style>
-          <a:lnRef idx="0"/>
-          <a:fillRef idx="0"/>
-          <a:effectRef idx="0"/>
+          <a:lnRef idx="0">
+            <a:scrgbClr r="0" g="0" b="0"/>
+          </a:lnRef>
+          <a:fillRef idx="0">
+            <a:scrgbClr r="0" g="0" b="0"/>
+          </a:fillRef>
+          <a:effectRef idx="0">
+            <a:scrgbClr r="0" g="0" b="0"/>
+          </a:effectRef>
           <a:fontRef idx="minor"/>
         </p:style>
         <p:txBody>
           <a:bodyPr lIns="90000" tIns="45000" rIns="90000" bIns="45000" anchor="ctr">
             <a:noAutofit/>
           </a:bodyPr>
+          <a:lstStyle/>
           <a:p>
             <a:pPr defTabSz="914400">
               <a:lnSpc>
@@ -7847,7 +6765,7 @@
         </p:nvSpPr>
         <p:spPr>
           <a:xfrm>
-            <a:off x="6199560" y="4243680"/>
+            <a:off x="6199560" y="4165813"/>
             <a:ext cx="2468160" cy="147240"/>
           </a:xfrm>
           <a:prstGeom prst="rect">
@@ -7859,15 +6777,22 @@
           </a:ln>
         </p:spPr>
         <p:style>
-          <a:lnRef idx="0"/>
-          <a:fillRef idx="0"/>
-          <a:effectRef idx="0"/>
+          <a:lnRef idx="0">
+            <a:scrgbClr r="0" g="0" b="0"/>
+          </a:lnRef>
+          <a:fillRef idx="0">
+            <a:scrgbClr r="0" g="0" b="0"/>
+          </a:fillRef>
+          <a:effectRef idx="0">
+            <a:scrgbClr r="0" g="0" b="0"/>
+          </a:effectRef>
           <a:fontRef idx="minor"/>
         </p:style>
         <p:txBody>
           <a:bodyPr lIns="90000" tIns="45000" rIns="90000" bIns="45000" anchor="ctr">
             <a:noAutofit/>
           </a:bodyPr>
+          <a:lstStyle/>
           <a:p>
             <a:pPr defTabSz="914400">
               <a:lnSpc>
@@ -7908,7 +6833,7 @@
         </p:nvSpPr>
         <p:spPr>
           <a:xfrm>
-            <a:off x="6199560" y="4410000"/>
+            <a:off x="6199560" y="4332133"/>
             <a:ext cx="2468160" cy="129240"/>
           </a:xfrm>
           <a:prstGeom prst="rect">
@@ -7920,15 +6845,22 @@
           </a:ln>
         </p:spPr>
         <p:style>
-          <a:lnRef idx="0"/>
-          <a:fillRef idx="0"/>
-          <a:effectRef idx="0"/>
+          <a:lnRef idx="0">
+            <a:scrgbClr r="0" g="0" b="0"/>
+          </a:lnRef>
+          <a:fillRef idx="0">
+            <a:scrgbClr r="0" g="0" b="0"/>
+          </a:fillRef>
+          <a:effectRef idx="0">
+            <a:scrgbClr r="0" g="0" b="0"/>
+          </a:effectRef>
           <a:fontRef idx="minor"/>
         </p:style>
         <p:txBody>
           <a:bodyPr lIns="90000" tIns="45000" rIns="90000" bIns="45000" anchor="ctr">
             <a:noAutofit/>
           </a:bodyPr>
+          <a:lstStyle/>
           <a:p>
             <a:pPr defTabSz="914400">
               <a:lnSpc>
@@ -7969,7 +6901,7 @@
         </p:nvSpPr>
         <p:spPr>
           <a:xfrm>
-            <a:off x="6199560" y="4539960"/>
+            <a:off x="6199560" y="4462093"/>
             <a:ext cx="2468160" cy="129240"/>
           </a:xfrm>
           <a:prstGeom prst="rect">
@@ -7981,15 +6913,22 @@
           </a:ln>
         </p:spPr>
         <p:style>
-          <a:lnRef idx="0"/>
-          <a:fillRef idx="0"/>
-          <a:effectRef idx="0"/>
+          <a:lnRef idx="0">
+            <a:scrgbClr r="0" g="0" b="0"/>
+          </a:lnRef>
+          <a:fillRef idx="0">
+            <a:scrgbClr r="0" g="0" b="0"/>
+          </a:fillRef>
+          <a:effectRef idx="0">
+            <a:scrgbClr r="0" g="0" b="0"/>
+          </a:effectRef>
           <a:fontRef idx="minor"/>
         </p:style>
         <p:txBody>
           <a:bodyPr lIns="90000" tIns="45000" rIns="90000" bIns="45000" anchor="ctr">
             <a:noAutofit/>
           </a:bodyPr>
+          <a:lstStyle/>
           <a:p>
             <a:pPr defTabSz="914400">
               <a:lnSpc>
@@ -8042,15 +6981,22 @@
           </a:ln>
         </p:spPr>
         <p:style>
-          <a:lnRef idx="0"/>
-          <a:fillRef idx="0"/>
-          <a:effectRef idx="0"/>
+          <a:lnRef idx="0">
+            <a:scrgbClr r="0" g="0" b="0"/>
+          </a:lnRef>
+          <a:fillRef idx="0">
+            <a:scrgbClr r="0" g="0" b="0"/>
+          </a:fillRef>
+          <a:effectRef idx="0">
+            <a:scrgbClr r="0" g="0" b="0"/>
+          </a:effectRef>
           <a:fontRef idx="minor"/>
         </p:style>
         <p:txBody>
           <a:bodyPr lIns="90000" tIns="45000" rIns="90000" bIns="45000" anchor="ctr">
             <a:noAutofit/>
           </a:bodyPr>
+          <a:lstStyle/>
           <a:p>
             <a:pPr defTabSz="914400">
               <a:lnSpc>
@@ -8085,25 +7031,21 @@
       </p:sp>
     </p:spTree>
   </p:cSld>
-  <mc:AlternateContent>
-    <mc:Choice Requires="p14">
-      <p:transition spd="slow" p14:dur="2000"/>
-    </mc:Choice>
-    <mc:Fallback>
-      <p:transition spd="slow"/>
-    </mc:Fallback>
-  </mc:AlternateContent>
+  <p:clrMapOvr>
+    <a:masterClrMapping/>
+  </p:clrMapOvr>
 </p:sld>
 </file>
 
-<file path=ppt/slides/slide3.xml><?xml version="1.0" encoding="utf-8"?>
-<p:sld xmlns:a="http://schemas.openxmlformats.org/drawingml/2006/main" xmlns:p="http://schemas.openxmlformats.org/presentationml/2006/main" xmlns:r="http://schemas.openxmlformats.org/officeDocument/2006/relationships" xmlns:p14="http://schemas.microsoft.com/office/powerpoint/2010/main" xmlns:p15="http://schemas.microsoft.com/office/powerpoint/2012/main" xmlns:mc="http://schemas.openxmlformats.org/markup-compatibility/2006">
+<file path=ppt/slides/slide4.xml><?xml version="1.0" encoding="utf-8"?>
+<p:sld xmlns:a="http://schemas.openxmlformats.org/drawingml/2006/main" xmlns:r="http://schemas.openxmlformats.org/officeDocument/2006/relationships" xmlns:p="http://schemas.openxmlformats.org/presentationml/2006/main">
   <p:cSld>
     <p:bg>
       <p:bgPr>
         <a:solidFill>
           <a:srgbClr val="1C2B4A"/>
         </a:solidFill>
+        <a:effectLst/>
       </p:bgPr>
     </p:bg>
     <p:spTree>
@@ -8145,15 +7087,22 @@
           </a:ln>
         </p:spPr>
         <p:style>
-          <a:lnRef idx="0"/>
-          <a:fillRef idx="0"/>
-          <a:effectRef idx="0"/>
+          <a:lnRef idx="0">
+            <a:scrgbClr r="0" g="0" b="0"/>
+          </a:lnRef>
+          <a:fillRef idx="0">
+            <a:scrgbClr r="0" g="0" b="0"/>
+          </a:fillRef>
+          <a:effectRef idx="0">
+            <a:scrgbClr r="0" g="0" b="0"/>
+          </a:effectRef>
           <a:fontRef idx="minor"/>
         </p:style>
         <p:txBody>
           <a:bodyPr lIns="90000" tIns="45000" rIns="90000" bIns="45000" anchor="t">
             <a:noAutofit/>
           </a:bodyPr>
+          <a:lstStyle/>
           <a:p>
             <a:endParaRPr lang="es-ES" sz="1800" b="0" u="none" strike="noStrike">
               <a:solidFill>
@@ -8186,15 +7135,22 @@
           </a:ln>
         </p:spPr>
         <p:style>
-          <a:lnRef idx="0"/>
-          <a:fillRef idx="0"/>
-          <a:effectRef idx="0"/>
+          <a:lnRef idx="0">
+            <a:scrgbClr r="0" g="0" b="0"/>
+          </a:lnRef>
+          <a:fillRef idx="0">
+            <a:scrgbClr r="0" g="0" b="0"/>
+          </a:fillRef>
+          <a:effectRef idx="0">
+            <a:scrgbClr r="0" g="0" b="0"/>
+          </a:effectRef>
           <a:fontRef idx="minor"/>
         </p:style>
         <p:txBody>
           <a:bodyPr lIns="90000" tIns="45000" rIns="90000" bIns="45000" anchor="ctr">
             <a:noAutofit/>
           </a:bodyPr>
+          <a:lstStyle/>
           <a:p>
             <a:pPr defTabSz="914400">
               <a:lnSpc>
@@ -8205,7 +7161,7 @@
               </a:tabLst>
             </a:pPr>
             <a:r>
-              <a:rPr lang="en-US" sz="900" b="0" u="none" spc="201" strike="noStrike">
+              <a:rPr lang="en-US" sz="900" b="0" u="none" strike="noStrike" spc="201">
                 <a:solidFill>
                   <a:srgbClr val="8DA9C4"/>
                 </a:solidFill>
@@ -8235,8 +7191,8 @@
         </p:nvSpPr>
         <p:spPr>
           <a:xfrm>
-            <a:off x="384120" y="511920"/>
-            <a:ext cx="5485680" cy="593640"/>
+            <a:off x="384120" y="482184"/>
+            <a:ext cx="2693617" cy="915434"/>
           </a:xfrm>
           <a:prstGeom prst="rect">
             <a:avLst/>
@@ -8247,15 +7203,22 @@
           </a:ln>
         </p:spPr>
         <p:style>
-          <a:lnRef idx="0"/>
-          <a:fillRef idx="0"/>
-          <a:effectRef idx="0"/>
+          <a:lnRef idx="0">
+            <a:scrgbClr r="0" g="0" b="0"/>
+          </a:lnRef>
+          <a:fillRef idx="0">
+            <a:scrgbClr r="0" g="0" b="0"/>
+          </a:fillRef>
+          <a:effectRef idx="0">
+            <a:scrgbClr r="0" g="0" b="0"/>
+          </a:effectRef>
           <a:fontRef idx="minor"/>
         </p:style>
         <p:txBody>
           <a:bodyPr lIns="90000" tIns="45000" rIns="90000" bIns="45000" anchor="ctr">
             <a:noAutofit/>
           </a:bodyPr>
+          <a:lstStyle/>
           <a:p>
             <a:pPr defTabSz="914400">
               <a:lnSpc>
@@ -8266,7 +7229,7 @@
               </a:tabLst>
             </a:pPr>
             <a:r>
-              <a:rPr lang="en-US" sz="3200" b="1" u="none" strike="noStrike">
+              <a:rPr lang="en-US" sz="3200" b="1" u="none" strike="noStrike" dirty="0" err="1">
                 <a:solidFill>
                   <a:srgbClr val="FFFFFF"/>
                 </a:solidFill>
@@ -8275,9 +7238,21 @@
                 <a:latin typeface="Calibri"/>
                 <a:ea typeface="Calibri"/>
               </a:rPr>
-              <a:t>Diagrama de Base de Datos</a:t>
-            </a:r>
-            <a:endParaRPr lang="es-ES" sz="3200" b="0" u="none" strike="noStrike">
+              <a:t>Diagrama</a:t>
+            </a:r>
+            <a:r>
+              <a:rPr lang="en-US" sz="3200" b="1" u="none" strike="noStrike" dirty="0">
+                <a:solidFill>
+                  <a:srgbClr val="FFFFFF"/>
+                </a:solidFill>
+                <a:effectLst/>
+                <a:uFillTx/>
+                <a:latin typeface="Calibri"/>
+                <a:ea typeface="Calibri"/>
+              </a:rPr>
+              <a:t> de Base de Datos</a:t>
+            </a:r>
+            <a:endParaRPr lang="es-ES" sz="3200" b="0" u="none" strike="noStrike" dirty="0">
               <a:solidFill>
                 <a:srgbClr val="FFFFFF"/>
               </a:solidFill>
@@ -8296,8 +7271,8 @@
         </p:nvSpPr>
         <p:spPr>
           <a:xfrm>
-            <a:off x="384120" y="1115640"/>
-            <a:ext cx="8411760" cy="319320"/>
+            <a:off x="384121" y="1390697"/>
+            <a:ext cx="2463158" cy="698297"/>
           </a:xfrm>
           <a:prstGeom prst="rect">
             <a:avLst/>
@@ -8308,15 +7283,22 @@
           </a:ln>
         </p:spPr>
         <p:style>
-          <a:lnRef idx="0"/>
-          <a:fillRef idx="0"/>
-          <a:effectRef idx="0"/>
+          <a:lnRef idx="0">
+            <a:scrgbClr r="0" g="0" b="0"/>
+          </a:lnRef>
+          <a:fillRef idx="0">
+            <a:scrgbClr r="0" g="0" b="0"/>
+          </a:fillRef>
+          <a:effectRef idx="0">
+            <a:scrgbClr r="0" g="0" b="0"/>
+          </a:effectRef>
           <a:fontRef idx="minor"/>
         </p:style>
         <p:txBody>
           <a:bodyPr lIns="90000" tIns="45000" rIns="90000" bIns="45000" anchor="ctr">
             <a:noAutofit/>
           </a:bodyPr>
+          <a:lstStyle/>
           <a:p>
             <a:pPr defTabSz="914400">
               <a:lnSpc>
@@ -8327,7 +7309,7 @@
               </a:tabLst>
             </a:pPr>
             <a:r>
-              <a:rPr lang="en-US" sz="1200" b="0" u="none" strike="noStrike">
+              <a:rPr lang="en-US" sz="1200" b="0" u="none" strike="noStrike" dirty="0" err="1">
                 <a:solidFill>
                   <a:srgbClr val="4EADD4"/>
                 </a:solidFill>
@@ -8336,9 +7318,177 @@
                 <a:latin typeface="Calibri"/>
                 <a:ea typeface="Calibri"/>
               </a:rPr>
-              <a:t>Implementación en PostgreSQL — modelo lógico completo con relaciones y tipos de dato</a:t>
-            </a:r>
-            <a:endParaRPr lang="es-ES" sz="1200" b="0" u="none" strike="noStrike">
+              <a:t>Implementación</a:t>
+            </a:r>
+            <a:r>
+              <a:rPr lang="en-US" sz="1200" b="0" u="none" strike="noStrike" dirty="0">
+                <a:solidFill>
+                  <a:srgbClr val="4EADD4"/>
+                </a:solidFill>
+                <a:effectLst/>
+                <a:uFillTx/>
+                <a:latin typeface="Calibri"/>
+                <a:ea typeface="Calibri"/>
+              </a:rPr>
+              <a:t> </a:t>
+            </a:r>
+            <a:r>
+              <a:rPr lang="en-US" sz="1200" b="0" u="none" strike="noStrike" dirty="0" err="1">
+                <a:solidFill>
+                  <a:srgbClr val="4EADD4"/>
+                </a:solidFill>
+                <a:effectLst/>
+                <a:uFillTx/>
+                <a:latin typeface="Calibri"/>
+                <a:ea typeface="Calibri"/>
+              </a:rPr>
+              <a:t>en</a:t>
+            </a:r>
+            <a:r>
+              <a:rPr lang="en-US" sz="1200" b="0" u="none" strike="noStrike" dirty="0">
+                <a:solidFill>
+                  <a:srgbClr val="4EADD4"/>
+                </a:solidFill>
+                <a:effectLst/>
+                <a:uFillTx/>
+                <a:latin typeface="Calibri"/>
+                <a:ea typeface="Calibri"/>
+              </a:rPr>
+              <a:t> PostgreSQL — </a:t>
+            </a:r>
+            <a:r>
+              <a:rPr lang="en-US" sz="1200" b="0" u="none" strike="noStrike" dirty="0" err="1">
+                <a:solidFill>
+                  <a:srgbClr val="4EADD4"/>
+                </a:solidFill>
+                <a:effectLst/>
+                <a:uFillTx/>
+                <a:latin typeface="Calibri"/>
+                <a:ea typeface="Calibri"/>
+              </a:rPr>
+              <a:t>modelo</a:t>
+            </a:r>
+            <a:r>
+              <a:rPr lang="en-US" sz="1200" b="0" u="none" strike="noStrike" dirty="0">
+                <a:solidFill>
+                  <a:srgbClr val="4EADD4"/>
+                </a:solidFill>
+                <a:effectLst/>
+                <a:uFillTx/>
+                <a:latin typeface="Calibri"/>
+                <a:ea typeface="Calibri"/>
+              </a:rPr>
+              <a:t> </a:t>
+            </a:r>
+            <a:r>
+              <a:rPr lang="en-US" sz="1200" b="0" u="none" strike="noStrike" dirty="0" err="1">
+                <a:solidFill>
+                  <a:srgbClr val="4EADD4"/>
+                </a:solidFill>
+                <a:effectLst/>
+                <a:uFillTx/>
+                <a:latin typeface="Calibri"/>
+                <a:ea typeface="Calibri"/>
+              </a:rPr>
+              <a:t>lógico</a:t>
+            </a:r>
+            <a:r>
+              <a:rPr lang="en-US" sz="1200" b="0" u="none" strike="noStrike" dirty="0">
+                <a:solidFill>
+                  <a:srgbClr val="4EADD4"/>
+                </a:solidFill>
+                <a:effectLst/>
+                <a:uFillTx/>
+                <a:latin typeface="Calibri"/>
+                <a:ea typeface="Calibri"/>
+              </a:rPr>
+              <a:t> </a:t>
+            </a:r>
+            <a:r>
+              <a:rPr lang="en-US" sz="1200" b="0" u="none" strike="noStrike" dirty="0" err="1">
+                <a:solidFill>
+                  <a:srgbClr val="4EADD4"/>
+                </a:solidFill>
+                <a:effectLst/>
+                <a:uFillTx/>
+                <a:latin typeface="Calibri"/>
+                <a:ea typeface="Calibri"/>
+              </a:rPr>
+              <a:t>completo</a:t>
+            </a:r>
+            <a:r>
+              <a:rPr lang="en-US" sz="1200" b="0" u="none" strike="noStrike" dirty="0">
+                <a:solidFill>
+                  <a:srgbClr val="4EADD4"/>
+                </a:solidFill>
+                <a:effectLst/>
+                <a:uFillTx/>
+                <a:latin typeface="Calibri"/>
+                <a:ea typeface="Calibri"/>
+              </a:rPr>
+              <a:t> con </a:t>
+            </a:r>
+            <a:r>
+              <a:rPr lang="en-US" sz="1200" b="0" u="none" strike="noStrike" dirty="0" err="1">
+                <a:solidFill>
+                  <a:srgbClr val="4EADD4"/>
+                </a:solidFill>
+                <a:effectLst/>
+                <a:uFillTx/>
+                <a:latin typeface="Calibri"/>
+                <a:ea typeface="Calibri"/>
+              </a:rPr>
+              <a:t>relaciones</a:t>
+            </a:r>
+            <a:r>
+              <a:rPr lang="en-US" sz="1200" b="0" u="none" strike="noStrike" dirty="0">
+                <a:solidFill>
+                  <a:srgbClr val="4EADD4"/>
+                </a:solidFill>
+                <a:effectLst/>
+                <a:uFillTx/>
+                <a:latin typeface="Calibri"/>
+                <a:ea typeface="Calibri"/>
+              </a:rPr>
+              <a:t> y </a:t>
+            </a:r>
+            <a:r>
+              <a:rPr lang="en-US" sz="1200" b="0" u="none" strike="noStrike" dirty="0" err="1">
+                <a:solidFill>
+                  <a:srgbClr val="4EADD4"/>
+                </a:solidFill>
+                <a:effectLst/>
+                <a:uFillTx/>
+                <a:latin typeface="Calibri"/>
+                <a:ea typeface="Calibri"/>
+              </a:rPr>
+              <a:t>tipos</a:t>
+            </a:r>
+            <a:r>
+              <a:rPr lang="en-US" sz="1200" b="0" u="none" strike="noStrike" dirty="0">
+                <a:solidFill>
+                  <a:srgbClr val="4EADD4"/>
+                </a:solidFill>
+                <a:effectLst/>
+                <a:uFillTx/>
+                <a:latin typeface="Calibri"/>
+                <a:ea typeface="Calibri"/>
+              </a:rPr>
+              <a:t> de </a:t>
+            </a:r>
+            <a:r>
+              <a:rPr lang="en-US" sz="1200" b="0" u="none" strike="noStrike" dirty="0" err="1">
+                <a:solidFill>
+                  <a:srgbClr val="4EADD4"/>
+                </a:solidFill>
+                <a:effectLst/>
+                <a:uFillTx/>
+                <a:latin typeface="Calibri"/>
+                <a:ea typeface="Calibri"/>
+              </a:rPr>
+              <a:t>dato</a:t>
+            </a:r>
+            <a:endParaRPr lang="es-ES" sz="1200" b="0" u="none" strike="noStrike" dirty="0">
               <a:solidFill>
                 <a:srgbClr val="FFFFFF"/>
               </a:solidFill>
@@ -8351,43 +7501,150 @@
       </p:sp>
       <p:pic>
         <p:nvPicPr>
-          <p:cNvPr id="129" name="Image 0" descr="/home/claude/modelo_logico_BBDD.JPG"/>
-          <p:cNvPicPr/>
+          <p:cNvPr id="3" name="Imagen 2">
+            <a:extLst>
+              <a:ext uri="{FF2B5EF4-FFF2-40B4-BE49-F238E27FC236}">
+                <a16:creationId xmlns:a16="http://schemas.microsoft.com/office/drawing/2014/main" id="{91EAF5B8-8EA4-47DF-51F3-1A0A8F513CAB}"/>
+              </a:ext>
+            </a:extLst>
+          </p:cNvPr>
+          <p:cNvPicPr>
+            <a:picLocks noChangeAspect="1"/>
+          </p:cNvPicPr>
           <p:nvPr/>
         </p:nvPicPr>
         <p:blipFill>
-          <a:blip r:embed="rId1"/>
-          <a:stretch/>
+          <a:blip r:embed="rId3">
+            <a:extLst>
+              <a:ext uri="{28A0092B-C50C-407E-A947-70E740481C1C}">
+                <a14:useLocalDpi xmlns:a14="http://schemas.microsoft.com/office/drawing/2010/main" val="0"/>
+              </a:ext>
+            </a:extLst>
+          </a:blip>
+          <a:stretch>
+            <a:fillRect/>
+          </a:stretch>
         </p:blipFill>
         <p:spPr>
           <a:xfrm>
-            <a:off x="384120" y="1508760"/>
-            <a:ext cx="7355880" cy="3400920"/>
-          </a:xfrm>
-          <a:prstGeom prst="rect">
-            <a:avLst/>
-          </a:prstGeom>
-          <a:noFill/>
-          <a:ln w="0">
-            <a:noFill/>
-          </a:ln>
+            <a:off x="3072049" y="483840"/>
+            <a:ext cx="5752284" cy="4275991"/>
+          </a:xfrm>
+          <a:prstGeom prst="rect">
+            <a:avLst/>
+          </a:prstGeom>
         </p:spPr>
       </p:pic>
     </p:spTree>
   </p:cSld>
-  <mc:AlternateContent>
-    <mc:Choice Requires="p14">
-      <p:transition spd="slow" p14:dur="2000"/>
-    </mc:Choice>
-    <mc:Fallback>
-      <p:transition spd="slow"/>
-    </mc:Fallback>
-  </mc:AlternateContent>
+  <p:clrMapOvr>
+    <a:masterClrMapping/>
+  </p:clrMapOvr>
+</p:sld>
+</file>
+
+<file path=ppt/slides/slide5.xml><?xml version="1.0" encoding="utf-8"?>
+<p:sld xmlns:a="http://schemas.openxmlformats.org/drawingml/2006/main" xmlns:r="http://schemas.openxmlformats.org/officeDocument/2006/relationships" xmlns:p="http://schemas.openxmlformats.org/presentationml/2006/main">
+  <p:cSld>
+    <p:spTree>
+      <p:nvGrpSpPr>
+        <p:cNvPr id="1" name=""/>
+        <p:cNvGrpSpPr/>
+        <p:nvPr/>
+      </p:nvGrpSpPr>
+      <p:grpSpPr>
+        <a:xfrm>
+          <a:off x="0" y="0"/>
+          <a:ext cx="0" cy="0"/>
+          <a:chOff x="0" y="0"/>
+          <a:chExt cx="0" cy="0"/>
+        </a:xfrm>
+      </p:grpSpPr>
+      <p:sp>
+        <p:nvSpPr>
+          <p:cNvPr id="2" name="CuadroTexto 1">
+            <a:extLst>
+              <a:ext uri="{FF2B5EF4-FFF2-40B4-BE49-F238E27FC236}">
+                <a16:creationId xmlns:a16="http://schemas.microsoft.com/office/drawing/2014/main" id="{34DE807C-852F-F44C-CB88-4769DEBB1FF4}"/>
+              </a:ext>
+            </a:extLst>
+          </p:cNvPr>
+          <p:cNvSpPr txBox="1"/>
+          <p:nvPr/>
+        </p:nvSpPr>
+        <p:spPr>
+          <a:xfrm>
+            <a:off x="3195021" y="1553737"/>
+            <a:ext cx="2304585" cy="461665"/>
+          </a:xfrm>
+          <a:prstGeom prst="rect">
+            <a:avLst/>
+          </a:prstGeom>
+          <a:noFill/>
+        </p:spPr>
+        <p:txBody>
+          <a:bodyPr wrap="square" rtlCol="0">
+            <a:spAutoFit/>
+          </a:bodyPr>
+          <a:lstStyle/>
+          <a:p>
+            <a:r>
+              <a:rPr lang="es-ES" sz="2400" b="1" dirty="0"/>
+              <a:t>ESKERRIK ASKO! </a:t>
+            </a:r>
+          </a:p>
+        </p:txBody>
+      </p:sp>
+      <p:sp>
+        <p:nvSpPr>
+          <p:cNvPr id="3" name="CuadroTexto 2">
+            <a:extLst>
+              <a:ext uri="{FF2B5EF4-FFF2-40B4-BE49-F238E27FC236}">
+                <a16:creationId xmlns:a16="http://schemas.microsoft.com/office/drawing/2014/main" id="{6B516C09-2399-C0A7-97CA-14A24F8FBA16}"/>
+              </a:ext>
+            </a:extLst>
+          </p:cNvPr>
+          <p:cNvSpPr txBox="1"/>
+          <p:nvPr/>
+        </p:nvSpPr>
+        <p:spPr>
+          <a:xfrm>
+            <a:off x="3560956" y="2371695"/>
+            <a:ext cx="1706044" cy="400110"/>
+          </a:xfrm>
+          <a:prstGeom prst="rect">
+            <a:avLst/>
+          </a:prstGeom>
+          <a:noFill/>
+        </p:spPr>
+        <p:txBody>
+          <a:bodyPr wrap="none" rtlCol="0">
+            <a:spAutoFit/>
+          </a:bodyPr>
+          <a:lstStyle/>
+          <a:p>
+            <a:r>
+              <a:rPr lang="es-ES" sz="2000" b="1" dirty="0"/>
+              <a:t>¿PREGUNTAS?</a:t>
+            </a:r>
+          </a:p>
+        </p:txBody>
+      </p:sp>
+    </p:spTree>
+    <p:extLst>
+      <p:ext uri="{BB962C8B-B14F-4D97-AF65-F5344CB8AC3E}">
+        <p14:creationId xmlns:p14="http://schemas.microsoft.com/office/powerpoint/2010/main" val="312439820"/>
+      </p:ext>
+    </p:extLst>
+  </p:cSld>
+  <p:clrMapOvr>
+    <a:masterClrMapping/>
+  </p:clrMapOvr>
 </p:sld>
 </file>
 
 <file path=ppt/theme/theme1.xml><?xml version="1.0" encoding="utf-8"?>
-<a:theme xmlns:a="http://schemas.openxmlformats.org/drawingml/2006/main" xmlns:r="http://schemas.openxmlformats.org/officeDocument/2006/relationships" name="Office Theme">
+<a:theme xmlns:a="http://schemas.openxmlformats.org/drawingml/2006/main" name="Office Theme">
   <a:themeElements>
     <a:clrScheme name="Office">
       <a:dk1>
@@ -8429,12 +7686,12 @@
     </a:clrScheme>
     <a:fontScheme name="Office">
       <a:majorFont>
-        <a:latin typeface="Calibri Light" panose="020F0302020204030204" pitchFamily="0" charset="1"/>
+        <a:latin typeface="Calibri Light" panose="020F0302020204030204"/>
         <a:ea typeface=""/>
         <a:cs typeface=""/>
       </a:majorFont>
       <a:minorFont>
-        <a:latin typeface="Calibri" panose="020F0502020204030204" pitchFamily="0" charset="1"/>
+        <a:latin typeface="Calibri" panose="020F0502020204030204"/>
         <a:ea typeface=""/>
         <a:cs typeface=""/>
       </a:minorFont>
@@ -8466,7 +7723,7 @@
             </a:gs>
           </a:gsLst>
           <a:lin ang="5400000" scaled="0"/>
-          <a:tileRect l="0" t="0" r="0" b="0"/>
+          <a:tileRect/>
         </a:gradFill>
         <a:gradFill>
           <a:gsLst>
@@ -8490,7 +7747,7 @@
             </a:gs>
           </a:gsLst>
           <a:lin ang="5400000" scaled="0"/>
-          <a:tileRect l="0" t="0" r="0" b="0"/>
+          <a:tileRect/>
         </a:gradFill>
       </a:fillStyleLst>
       <a:lnStyleLst>
@@ -8550,16 +7807,18 @@
             </a:gs>
           </a:gsLst>
           <a:lin ang="5400000" scaled="0"/>
-          <a:tileRect l="0" t="0" r="0" b="0"/>
+          <a:tileRect/>
         </a:gradFill>
       </a:bgFillStyleLst>
     </a:fmtScheme>
   </a:themeElements>
+  <a:objectDefaults/>
+  <a:extraClrSchemeLst/>
 </a:theme>
 </file>
 
 <file path=ppt/theme/theme2.xml><?xml version="1.0" encoding="utf-8"?>
-<a:theme xmlns:a="http://schemas.openxmlformats.org/drawingml/2006/main" xmlns:r="http://schemas.openxmlformats.org/officeDocument/2006/relationships" name="Office Theme">
+<a:theme xmlns:a="http://schemas.openxmlformats.org/drawingml/2006/main" name="Office Theme">
   <a:themeElements>
     <a:clrScheme name="LibreOffice">
       <a:dk1>
@@ -8601,14 +7860,14 @@
     </a:clrScheme>
     <a:fontScheme name="Office">
       <a:majorFont>
-        <a:latin typeface="Arial" pitchFamily="0" charset="1"/>
-        <a:ea typeface="DejaVu Sans" pitchFamily="0" charset="1"/>
-        <a:cs typeface="DejaVu Sans" pitchFamily="0" charset="1"/>
+        <a:latin typeface="Arial"/>
+        <a:ea typeface="DejaVu Sans"/>
+        <a:cs typeface="DejaVu Sans"/>
       </a:majorFont>
       <a:minorFont>
-        <a:latin typeface="Arial" pitchFamily="0" charset="1"/>
-        <a:ea typeface="DejaVu Sans" pitchFamily="0" charset="1"/>
-        <a:cs typeface="DejaVu Sans" pitchFamily="0" charset="1"/>
+        <a:latin typeface="Arial"/>
+        <a:ea typeface="DejaVu Sans"/>
+        <a:cs typeface="DejaVu Sans"/>
       </a:minorFont>
     </a:fontScheme>
     <a:fmtScheme>
@@ -8661,5 +7920,7 @@
       </a:bgFillStyleLst>
     </a:fmtScheme>
   </a:themeElements>
+  <a:objectDefaults/>
+  <a:extraClrSchemeLst/>
 </a:theme>
 </file>